--- a/research/rag/late-chunking.pptx
+++ b/research/rag/late-chunking.pptx
@@ -6,9 +6,10 @@
   </p:sldMasterIdLst>
   <p:sldIdLst>
     <p:sldId id="256" r:id="rId2"/>
+    <p:sldId id="257" r:id="rId3"/>
   </p:sldIdLst>
   <p:notesMasterIdLst>
-    <p:notesMasterId r:id="rId3"/>
+    <p:notesMasterId r:id="rId4"/>
   </p:notesMasterIdLst>
   <p:sldSz cx="14630400" cy="8229600"/>
   <p:notesSz cx="8229600" cy="14630400"/>
@@ -554,6 +555,101 @@
 </p:notes>
 </file>
 
+<file path=ppt/notesSlides/notesSlide2.xml><?xml version="1.0" encoding="utf-8"?>
+<p:notes xmlns:a="http://schemas.openxmlformats.org/drawingml/2006/main" xmlns:r="http://schemas.openxmlformats.org/officeDocument/2006/relationships" xmlns:p="http://schemas.openxmlformats.org/presentationml/2006/main">
+  <p:cSld>
+    <p:spTree>
+      <p:nvGrpSpPr>
+        <p:cNvPr id="1" name=""/>
+        <p:cNvGrpSpPr/>
+        <p:nvPr/>
+      </p:nvGrpSpPr>
+      <p:grpSpPr>
+        <a:xfrm>
+          <a:off x="0" y="0"/>
+          <a:ext cx="0" cy="0"/>
+          <a:chOff x="0" y="0"/>
+          <a:chExt cx="0" cy="0"/>
+        </a:xfrm>
+      </p:grpSpPr>
+      <p:sp>
+        <p:nvSpPr>
+          <p:cNvPr id="2" name="Slide Image Placeholder 1"/>
+          <p:cNvSpPr>
+            <a:spLocks noGrp="1" noRot="1" noChangeAspect="1"/>
+          </p:cNvSpPr>
+          <p:nvPr>
+            <p:ph type="sldImg"/>
+          </p:nvPr>
+        </p:nvSpPr>
+        <p:spPr/>
+      </p:sp>
+      <p:sp>
+        <p:nvSpPr>
+          <p:cNvPr id="3" name="Notes Placeholder 2"/>
+          <p:cNvSpPr>
+            <a:spLocks noGrp="1"/>
+          </p:cNvSpPr>
+          <p:nvPr>
+            <p:ph type="body" idx="1"/>
+          </p:nvPr>
+        </p:nvSpPr>
+        <p:spPr/>
+        <p:txBody>
+          <a:bodyPr/>
+          <a:lstStyle/>
+          <a:p>
+            <a:r>
+              <a:rPr lang="en-US" dirty="0"/>
+              <a:t>슬라이드 2: Late Chunking 원리: 자르는 시점만 모델 통과 뒤로 옮깁니다
+위 줄(기존 방식): 문서를 청크 3개로 자른 뒤 청크마다 임베딩 모델을 따로 통과시킵니다. 모델은 같은 모델 하나이고 3회 호출하는 것입니다. 모델이 한 번에 보는 글이 청크 하나뿐이라, "Its"가 베를린을 가리킨다는 정보가 벡터에 들어가지 못합니다.
+아래 줄(Late Chunking): 같은 청크 경계를 쓰되, 문서 전체를 긴 문맥 임베딩 모델에 한 번 통과시켜 토큰 9개 각각의 벡터를 먼저 얻습니다. 임베딩 모델은 모든 토큰이 서로를 보는 양방향 구조라 토큰 벡터마다 문서 전체 정보가 섞입니다. 그 뒤 청크 경계대로 토큰 벡터를 구간별로 평균 내면 청크 벡터 3개가 나옵니다.
+바뀌지 않는 것: 청크 수, 저장하는 벡터 수, 벡터DB 검색 방식은 기존과 같습니다. 바뀌는 것은 벡터에 담긴 문맥뿐이라 검색기 코드는 손대지 않아도 됩니다.
+전제: 토큰별 벡터를 내주는 모델이어야 하고(Cohere embed API처럼 최종 벡터 하나만 주는 API는 불가), 문서 전체를 담을 긴 문맥 모델이어야 합니다. 모델 한도(jina-embeddings-v3는 8192토큰)를 넘는 문서는 큰 창으로 나눠 통과시키고 창끼리 512토큰을 겹쳐 문맥을 보충합니다(논문 v3의 long late chunking).
+토큰 9개는 설명을 위한 단순화입니다. 실제로는 청크 하나가 수십에서 수백 토큰입니다. 글자 경계를 토큰 구간으로 바꿀 때는 tokenizer의 offset mapping을 씁니다.
+오른쪽 표: 논문 표 1의 값으로, jina-embeddings-v2-small에서 각 문장 임베딩과 "Berlin" 임베딩의 코사인 유사도입니다. 베를린이라는 단어가 없는 문장 2가 0.7084에서 0.8249로 가장 크게 올랐습니다.
+상세 문서: https://github.com/unicorn-campus/hybrid-ai/blob/main/research/rag/late-chunking.md#3-원리와-처리-절차</a:t>
+            </a:r>
+            <a:endParaRPr lang="en-US" dirty="0"/>
+          </a:p>
+        </p:txBody>
+      </p:sp>
+      <p:sp>
+        <p:nvSpPr>
+          <p:cNvPr id="4" name="Slide Number Placeholder 3"/>
+          <p:cNvSpPr>
+            <a:spLocks noGrp="1"/>
+          </p:cNvSpPr>
+          <p:nvPr>
+            <p:ph type="sldNum" sz="quarter" idx="10"/>
+          </p:nvPr>
+        </p:nvSpPr>
+        <p:spPr/>
+        <p:txBody>
+          <a:bodyPr/>
+          <a:lstStyle/>
+          <a:p>
+            <a:fld id="{F7021451-1387-4CA6-816F-3879F97B5CBC}" type="slidenum">
+              <a:rPr lang="en-US"/>
+              <a:t>2</a:t>
+            </a:fld>
+            <a:endParaRPr lang="en-US"/>
+          </a:p>
+        </p:txBody>
+      </p:sp>
+    </p:spTree>
+    <p:extLst>
+      <p:ext uri="{BB962C8B-B14F-4D97-AF65-F5344CB8AC3E}">
+        <p14:creationId xmlns:p14="http://schemas.microsoft.com/office/powerpoint/2010/main" val="1024086991"/>
+      </p:ext>
+    </p:extLst>
+  </p:cSld>
+  <p:clrMapOvr>
+    <a:masterClrMapping/>
+  </p:clrMapOvr>
+</p:notes>
+</file>
+
 <file path=ppt/slideLayouts/slideLayout1.xml><?xml version="1.0" encoding="utf-8"?>
 <p:sldLayout xmlns:a="http://schemas.openxmlformats.org/drawingml/2006/main" xmlns:r="http://schemas.openxmlformats.org/officeDocument/2006/relationships" xmlns:p="http://schemas.openxmlformats.org/presentationml/2006/main" preserve="1">
   <p:cSld name="DEFAULT">
@@ -3432,7 +3528,7 @@
               <a:buNone/>
             </a:pPr>
             <a:r>
-              <a:rPr lang="en-US" sz="1400" dirty="0">
+              <a:rPr lang="en-US" sz="1200" dirty="0">
                 <a:solidFill>
                   <a:srgbClr val="7C8598"/>
                 </a:solidFill>
@@ -3440,9 +3536,9 @@
                 <a:ea typeface="Pretendard" pitchFamily="34" charset="-122"/>
                 <a:cs typeface="Pretendard" pitchFamily="34" charset="-120"/>
               </a:rPr>
-              <a:t>출처: Günther 외, Late Chunking (arXiv 2409.04701 v3). Jina AI 블로그 1편(2024-08-22)과 2편(2024-10-03)</a:t>
+              <a:t>출처: Günther 외, Late Chunking (arXiv 2409.04701 v3). Jina AI 블로그 1편(2024-08-22)과 2편(2024-10-03). voyage-context-3, context-4 (Voyage AI, MongoDB)</a:t>
             </a:r>
-            <a:endParaRPr lang="en-US" sz="1400" dirty="0"/>
+            <a:endParaRPr lang="en-US" sz="1200" dirty="0"/>
           </a:p>
         </p:txBody>
       </p:sp>
@@ -3489,6 +3585,3804 @@
             <a:fld id="{F7021451-1387-4CA6-816F-3879F97B5CBC}" type="slidenum">
               <a:rPr b="0" lang="en-US"/>
               <a:t>1</a:t>
+            </a:fld>
+            <a:endParaRPr lang="en-US"/>
+          </a:p>
+        </p:txBody>
+      </p:sp>
+    </p:spTree>
+  </p:cSld>
+  <p:clrMapOvr>
+    <a:masterClrMapping/>
+  </p:clrMapOvr>
+</p:sld>
+</file>
+
+<file path=ppt/slides/slide2.xml><?xml version="1.0" encoding="utf-8"?>
+<p:sld xmlns:a="http://schemas.openxmlformats.org/drawingml/2006/main" xmlns:r="http://schemas.openxmlformats.org/officeDocument/2006/relationships" xmlns:p="http://schemas.openxmlformats.org/presentationml/2006/main">
+  <p:cSld name="Slide 2">
+    <p:spTree>
+      <p:nvGrpSpPr>
+        <p:cNvPr id="1" name=""/>
+        <p:cNvGrpSpPr/>
+        <p:nvPr/>
+      </p:nvGrpSpPr>
+      <p:grpSpPr>
+        <a:xfrm>
+          <a:off x="0" y="0"/>
+          <a:ext cx="0" cy="0"/>
+          <a:chOff x="0" y="0"/>
+          <a:chExt cx="0" cy="0"/>
+        </a:xfrm>
+      </p:grpSpPr>
+      <p:sp>
+        <p:nvSpPr>
+          <p:cNvPr id="2" name="Text 2"/>
+          <p:cNvSpPr/>
+          <p:nvPr>
+            <p:ph type="title"/>
+          </p:nvPr>
+        </p:nvSpPr>
+        <p:spPr>
+          <a:xfrm>
+            <a:off x="509321" y="99670"/>
+            <a:ext cx="13738860" cy="828446"/>
+          </a:xfrm>
+          <a:prstGeom prst="rect">
+            <a:avLst/>
+          </a:prstGeom>
+          <a:noFill/>
+          <a:ln/>
+        </p:spPr>
+        <p:txBody>
+          <a:bodyPr wrap="square" lIns="0" tIns="0" rIns="0" bIns="0" rtlCol="0" anchor="ctr"/>
+          <a:lstStyle/>
+          <a:p>
+            <a:pPr algn="l" indent="0" marL="0">
+              <a:buNone/>
+            </a:pPr>
+            <a:r>
+              <a:rPr lang="en-US" sz="3200" b="1" dirty="0">
+                <a:solidFill>
+                  <a:srgbClr val="2C2926"/>
+                </a:solidFill>
+                <a:latin typeface="Pretendard" pitchFamily="34" charset="0"/>
+                <a:ea typeface="Pretendard" pitchFamily="34" charset="-122"/>
+                <a:cs typeface="Pretendard" pitchFamily="34" charset="-120"/>
+              </a:rPr>
+              <a:t>Late Chunking 원리: 자르는 시점만 모델 통과 뒤로 옮깁니다</a:t>
+            </a:r>
+            <a:endParaRPr lang="en-US" sz="3200" dirty="0"/>
+          </a:p>
+        </p:txBody>
+      </p:sp>
+      <p:sp>
+        <p:nvSpPr>
+          <p:cNvPr id="3" name="Text 1"/>
+          <p:cNvSpPr txBox="1"/>
+          <p:nvPr/>
+        </p:nvSpPr>
+        <p:spPr>
+          <a:xfrm>
+            <a:off x="509321" y="1151230"/>
+            <a:ext cx="13624560" cy="384048"/>
+          </a:xfrm>
+          <a:prstGeom prst="rect">
+            <a:avLst/>
+          </a:prstGeom>
+          <a:noFill/>
+          <a:ln/>
+        </p:spPr>
+        <p:txBody>
+          <a:bodyPr wrap="square" lIns="0" tIns="0" rIns="0" bIns="0" rtlCol="0" anchor="ctr"/>
+          <a:lstStyle/>
+          <a:p>
+            <a:pPr indent="0" marL="0">
+              <a:buNone/>
+            </a:pPr>
+            <a:r>
+              <a:rPr lang="en-US" sz="1800" dirty="0">
+                <a:solidFill>
+                  <a:srgbClr val="000000"/>
+                </a:solidFill>
+                <a:latin typeface="Pretendard SemiBold" pitchFamily="34" charset="0"/>
+                <a:ea typeface="Pretendard SemiBold" pitchFamily="34" charset="-122"/>
+                <a:cs typeface="Pretendard SemiBold" pitchFamily="34" charset="-120"/>
+              </a:rPr>
+              <a:t>청크 경계는 똑같이 미리 정합니다. 다른 점은 모델에 청크를 따로 넣느냐, 문서 전체를 한 번에 넣고 나서 나누느냐입니다.</a:t>
+            </a:r>
+            <a:endParaRPr lang="en-US" sz="1800" dirty="0"/>
+          </a:p>
+        </p:txBody>
+      </p:sp>
+      <p:sp>
+        <p:nvSpPr>
+          <p:cNvPr id="4" name="Text 2"/>
+          <p:cNvSpPr/>
+          <p:nvPr/>
+        </p:nvSpPr>
+        <p:spPr>
+          <a:xfrm>
+            <a:off x="509321" y="1737360"/>
+            <a:ext cx="9555480" cy="411480"/>
+          </a:xfrm>
+          <a:prstGeom prst="roundRect">
+            <a:avLst>
+              <a:gd name="adj" fmla="val 13333"/>
+            </a:avLst>
+          </a:prstGeom>
+          <a:solidFill>
+            <a:srgbClr val="404155"/>
+          </a:solidFill>
+          <a:ln/>
+        </p:spPr>
+        <p:txBody>
+          <a:bodyPr wrap="square" lIns="0" tIns="0" rIns="0" bIns="0" rtlCol="0" anchor="ctr"/>
+          <a:lstStyle/>
+          <a:p>
+            <a:pPr algn="ctr" indent="0" marL="0">
+              <a:buNone/>
+            </a:pPr>
+            <a:r>
+              <a:rPr lang="en-US" sz="1800" b="1" dirty="0">
+                <a:solidFill>
+                  <a:srgbClr val="FFFFFF"/>
+                </a:solidFill>
+                <a:latin typeface="Pretendard" pitchFamily="34" charset="0"/>
+                <a:ea typeface="Pretendard" pitchFamily="34" charset="-122"/>
+                <a:cs typeface="Pretendard" pitchFamily="34" charset="-120"/>
+              </a:rPr>
+              <a:t>기존 방식: 자르고 나서 임베딩 (chunk → embed)</a:t>
+            </a:r>
+            <a:endParaRPr lang="en-US" sz="1800" dirty="0"/>
+          </a:p>
+        </p:txBody>
+      </p:sp>
+      <p:sp>
+        <p:nvSpPr>
+          <p:cNvPr id="5" name="Shape 3"/>
+          <p:cNvSpPr/>
+          <p:nvPr/>
+        </p:nvSpPr>
+        <p:spPr>
+          <a:xfrm>
+            <a:off x="509321" y="2240280"/>
+            <a:ext cx="2103120" cy="1371600"/>
+          </a:xfrm>
+          <a:prstGeom prst="roundRect">
+            <a:avLst>
+              <a:gd name="adj" fmla="val 5333"/>
+            </a:avLst>
+          </a:prstGeom>
+          <a:solidFill>
+            <a:srgbClr val="F5F8FC"/>
+          </a:solidFill>
+          <a:ln w="12700">
+            <a:solidFill>
+              <a:srgbClr val="D9E0EC"/>
+            </a:solidFill>
+            <a:prstDash val="solid"/>
+          </a:ln>
+        </p:spPr>
+      </p:sp>
+      <p:sp>
+        <p:nvSpPr>
+          <p:cNvPr id="6" name="Text 4"/>
+          <p:cNvSpPr txBox="1"/>
+          <p:nvPr/>
+        </p:nvSpPr>
+        <p:spPr>
+          <a:xfrm>
+            <a:off x="646481" y="2331720"/>
+            <a:ext cx="1828800" cy="274320"/>
+          </a:xfrm>
+          <a:prstGeom prst="rect">
+            <a:avLst/>
+          </a:prstGeom>
+          <a:noFill/>
+          <a:ln/>
+        </p:spPr>
+        <p:txBody>
+          <a:bodyPr wrap="square" lIns="0" tIns="0" rIns="0" bIns="0" rtlCol="0" anchor="ctr"/>
+          <a:lstStyle/>
+          <a:p>
+            <a:pPr algn="l" indent="0" marL="0">
+              <a:buNone/>
+            </a:pPr>
+            <a:r>
+              <a:rPr lang="en-US" sz="1400" b="1" dirty="0">
+                <a:solidFill>
+                  <a:srgbClr val="1E2A5C"/>
+                </a:solidFill>
+                <a:latin typeface="Pretendard" pitchFamily="34" charset="0"/>
+                <a:ea typeface="Pretendard" pitchFamily="34" charset="-122"/>
+                <a:cs typeface="Pretendard" pitchFamily="34" charset="-120"/>
+              </a:rPr>
+              <a:t>문서 (토큰 9개로 단순화)</a:t>
+            </a:r>
+            <a:endParaRPr lang="en-US" sz="1400" dirty="0"/>
+          </a:p>
+        </p:txBody>
+      </p:sp>
+      <p:sp>
+        <p:nvSpPr>
+          <p:cNvPr id="7" name="Shape 5"/>
+          <p:cNvSpPr/>
+          <p:nvPr/>
+        </p:nvSpPr>
+        <p:spPr>
+          <a:xfrm>
+            <a:off x="664769" y="2807208"/>
+            <a:ext cx="155448" cy="155448"/>
+          </a:xfrm>
+          <a:prstGeom prst="roundRect">
+            <a:avLst>
+              <a:gd name="adj" fmla="val 17647"/>
+            </a:avLst>
+          </a:prstGeom>
+          <a:solidFill>
+            <a:srgbClr val="2E74C6"/>
+          </a:solidFill>
+          <a:ln/>
+        </p:spPr>
+      </p:sp>
+      <p:sp>
+        <p:nvSpPr>
+          <p:cNvPr id="8" name="Shape 6"/>
+          <p:cNvSpPr/>
+          <p:nvPr/>
+        </p:nvSpPr>
+        <p:spPr>
+          <a:xfrm>
+            <a:off x="856793" y="2807208"/>
+            <a:ext cx="155448" cy="155448"/>
+          </a:xfrm>
+          <a:prstGeom prst="roundRect">
+            <a:avLst>
+              <a:gd name="adj" fmla="val 17647"/>
+            </a:avLst>
+          </a:prstGeom>
+          <a:solidFill>
+            <a:srgbClr val="2E74C6"/>
+          </a:solidFill>
+          <a:ln/>
+        </p:spPr>
+      </p:sp>
+      <p:sp>
+        <p:nvSpPr>
+          <p:cNvPr id="9" name="Shape 7"/>
+          <p:cNvSpPr/>
+          <p:nvPr/>
+        </p:nvSpPr>
+        <p:spPr>
+          <a:xfrm>
+            <a:off x="1048817" y="2807208"/>
+            <a:ext cx="155448" cy="155448"/>
+          </a:xfrm>
+          <a:prstGeom prst="roundRect">
+            <a:avLst>
+              <a:gd name="adj" fmla="val 17647"/>
+            </a:avLst>
+          </a:prstGeom>
+          <a:solidFill>
+            <a:srgbClr val="2E74C6"/>
+          </a:solidFill>
+          <a:ln/>
+        </p:spPr>
+      </p:sp>
+      <p:sp>
+        <p:nvSpPr>
+          <p:cNvPr id="10" name="Shape 8"/>
+          <p:cNvSpPr/>
+          <p:nvPr/>
+        </p:nvSpPr>
+        <p:spPr>
+          <a:xfrm>
+            <a:off x="1295705" y="2807208"/>
+            <a:ext cx="155448" cy="155448"/>
+          </a:xfrm>
+          <a:prstGeom prst="roundRect">
+            <a:avLst>
+              <a:gd name="adj" fmla="val 17647"/>
+            </a:avLst>
+          </a:prstGeom>
+          <a:solidFill>
+            <a:srgbClr val="1E2A5C"/>
+          </a:solidFill>
+          <a:ln/>
+        </p:spPr>
+      </p:sp>
+      <p:sp>
+        <p:nvSpPr>
+          <p:cNvPr id="11" name="Shape 9"/>
+          <p:cNvSpPr/>
+          <p:nvPr/>
+        </p:nvSpPr>
+        <p:spPr>
+          <a:xfrm>
+            <a:off x="1487729" y="2807208"/>
+            <a:ext cx="155448" cy="155448"/>
+          </a:xfrm>
+          <a:prstGeom prst="roundRect">
+            <a:avLst>
+              <a:gd name="adj" fmla="val 17647"/>
+            </a:avLst>
+          </a:prstGeom>
+          <a:solidFill>
+            <a:srgbClr val="1E2A5C"/>
+          </a:solidFill>
+          <a:ln/>
+        </p:spPr>
+      </p:sp>
+      <p:sp>
+        <p:nvSpPr>
+          <p:cNvPr id="12" name="Shape 10"/>
+          <p:cNvSpPr/>
+          <p:nvPr/>
+        </p:nvSpPr>
+        <p:spPr>
+          <a:xfrm>
+            <a:off x="1679753" y="2807208"/>
+            <a:ext cx="155448" cy="155448"/>
+          </a:xfrm>
+          <a:prstGeom prst="roundRect">
+            <a:avLst>
+              <a:gd name="adj" fmla="val 17647"/>
+            </a:avLst>
+          </a:prstGeom>
+          <a:solidFill>
+            <a:srgbClr val="1E2A5C"/>
+          </a:solidFill>
+          <a:ln/>
+        </p:spPr>
+      </p:sp>
+      <p:sp>
+        <p:nvSpPr>
+          <p:cNvPr id="13" name="Shape 11"/>
+          <p:cNvSpPr/>
+          <p:nvPr/>
+        </p:nvSpPr>
+        <p:spPr>
+          <a:xfrm>
+            <a:off x="1926641" y="2807208"/>
+            <a:ext cx="155448" cy="155448"/>
+          </a:xfrm>
+          <a:prstGeom prst="roundRect">
+            <a:avLst>
+              <a:gd name="adj" fmla="val 17647"/>
+            </a:avLst>
+          </a:prstGeom>
+          <a:solidFill>
+            <a:srgbClr val="404155"/>
+          </a:solidFill>
+          <a:ln/>
+        </p:spPr>
+      </p:sp>
+      <p:sp>
+        <p:nvSpPr>
+          <p:cNvPr id="14" name="Shape 12"/>
+          <p:cNvSpPr/>
+          <p:nvPr/>
+        </p:nvSpPr>
+        <p:spPr>
+          <a:xfrm>
+            <a:off x="2118665" y="2807208"/>
+            <a:ext cx="155448" cy="155448"/>
+          </a:xfrm>
+          <a:prstGeom prst="roundRect">
+            <a:avLst>
+              <a:gd name="adj" fmla="val 17647"/>
+            </a:avLst>
+          </a:prstGeom>
+          <a:solidFill>
+            <a:srgbClr val="404155"/>
+          </a:solidFill>
+          <a:ln/>
+        </p:spPr>
+      </p:sp>
+      <p:sp>
+        <p:nvSpPr>
+          <p:cNvPr id="15" name="Shape 13"/>
+          <p:cNvSpPr/>
+          <p:nvPr/>
+        </p:nvSpPr>
+        <p:spPr>
+          <a:xfrm>
+            <a:off x="2310689" y="2807208"/>
+            <a:ext cx="155448" cy="155448"/>
+          </a:xfrm>
+          <a:prstGeom prst="roundRect">
+            <a:avLst>
+              <a:gd name="adj" fmla="val 17647"/>
+            </a:avLst>
+          </a:prstGeom>
+          <a:solidFill>
+            <a:srgbClr val="404155"/>
+          </a:solidFill>
+          <a:ln/>
+        </p:spPr>
+      </p:sp>
+      <p:sp>
+        <p:nvSpPr>
+          <p:cNvPr id="16" name="Text 14"/>
+          <p:cNvSpPr txBox="1"/>
+          <p:nvPr/>
+        </p:nvSpPr>
+        <p:spPr>
+          <a:xfrm>
+            <a:off x="646481" y="3227832"/>
+            <a:ext cx="1828800" cy="274320"/>
+          </a:xfrm>
+          <a:prstGeom prst="rect">
+            <a:avLst/>
+          </a:prstGeom>
+          <a:noFill/>
+          <a:ln/>
+        </p:spPr>
+        <p:txBody>
+          <a:bodyPr wrap="square" lIns="0" tIns="0" rIns="0" bIns="0" rtlCol="0" anchor="ctr"/>
+          <a:lstStyle/>
+          <a:p>
+            <a:pPr algn="l" indent="0" marL="0">
+              <a:buNone/>
+            </a:pPr>
+            <a:r>
+              <a:rPr lang="en-US" sz="1400" dirty="0">
+                <a:solidFill>
+                  <a:srgbClr val="4A5364"/>
+                </a:solidFill>
+                <a:latin typeface="Pretendard" pitchFamily="34" charset="0"/>
+                <a:ea typeface="Pretendard" pitchFamily="34" charset="-122"/>
+                <a:cs typeface="Pretendard" pitchFamily="34" charset="-120"/>
+              </a:rPr>
+              <a:t>청크 경계는 미리 정함</a:t>
+            </a:r>
+            <a:endParaRPr lang="en-US" sz="1400" dirty="0"/>
+          </a:p>
+        </p:txBody>
+      </p:sp>
+      <p:sp>
+        <p:nvSpPr>
+          <p:cNvPr id="17" name="Shape 15"/>
+          <p:cNvSpPr/>
+          <p:nvPr/>
+        </p:nvSpPr>
+        <p:spPr>
+          <a:xfrm>
+            <a:off x="2703881" y="2788920"/>
+            <a:ext cx="274320" cy="274320"/>
+          </a:xfrm>
+          <a:prstGeom prst="rightArrow">
+            <a:avLst/>
+          </a:prstGeom>
+          <a:solidFill>
+            <a:srgbClr val="2E74C6"/>
+          </a:solidFill>
+          <a:ln/>
+        </p:spPr>
+      </p:sp>
+      <p:sp>
+        <p:nvSpPr>
+          <p:cNvPr id="18" name="Shape 16"/>
+          <p:cNvSpPr/>
+          <p:nvPr/>
+        </p:nvSpPr>
+        <p:spPr>
+          <a:xfrm>
+            <a:off x="3069641" y="2240280"/>
+            <a:ext cx="1371600" cy="384048"/>
+          </a:xfrm>
+          <a:prstGeom prst="roundRect">
+            <a:avLst>
+              <a:gd name="adj" fmla="val 19048"/>
+            </a:avLst>
+          </a:prstGeom>
+          <a:solidFill>
+            <a:srgbClr val="EEF3FA"/>
+          </a:solidFill>
+          <a:ln w="12700">
+            <a:solidFill>
+              <a:srgbClr val="D9E0EC"/>
+            </a:solidFill>
+            <a:prstDash val="solid"/>
+          </a:ln>
+        </p:spPr>
+      </p:sp>
+      <p:sp>
+        <p:nvSpPr>
+          <p:cNvPr id="19" name="Shape 17"/>
+          <p:cNvSpPr/>
+          <p:nvPr/>
+        </p:nvSpPr>
+        <p:spPr>
+          <a:xfrm>
+            <a:off x="3179369" y="2354580"/>
+            <a:ext cx="155448" cy="155448"/>
+          </a:xfrm>
+          <a:prstGeom prst="roundRect">
+            <a:avLst>
+              <a:gd name="adj" fmla="val 17647"/>
+            </a:avLst>
+          </a:prstGeom>
+          <a:solidFill>
+            <a:srgbClr val="2E74C6"/>
+          </a:solidFill>
+          <a:ln/>
+        </p:spPr>
+      </p:sp>
+      <p:sp>
+        <p:nvSpPr>
+          <p:cNvPr id="20" name="Shape 18"/>
+          <p:cNvSpPr/>
+          <p:nvPr/>
+        </p:nvSpPr>
+        <p:spPr>
+          <a:xfrm>
+            <a:off x="3371393" y="2354580"/>
+            <a:ext cx="155448" cy="155448"/>
+          </a:xfrm>
+          <a:prstGeom prst="roundRect">
+            <a:avLst>
+              <a:gd name="adj" fmla="val 17647"/>
+            </a:avLst>
+          </a:prstGeom>
+          <a:solidFill>
+            <a:srgbClr val="2E74C6"/>
+          </a:solidFill>
+          <a:ln/>
+        </p:spPr>
+      </p:sp>
+      <p:sp>
+        <p:nvSpPr>
+          <p:cNvPr id="21" name="Shape 19"/>
+          <p:cNvSpPr/>
+          <p:nvPr/>
+        </p:nvSpPr>
+        <p:spPr>
+          <a:xfrm>
+            <a:off x="3563417" y="2354580"/>
+            <a:ext cx="155448" cy="155448"/>
+          </a:xfrm>
+          <a:prstGeom prst="roundRect">
+            <a:avLst>
+              <a:gd name="adj" fmla="val 17647"/>
+            </a:avLst>
+          </a:prstGeom>
+          <a:solidFill>
+            <a:srgbClr val="2E74C6"/>
+          </a:solidFill>
+          <a:ln/>
+        </p:spPr>
+      </p:sp>
+      <p:sp>
+        <p:nvSpPr>
+          <p:cNvPr id="22" name="Text 20"/>
+          <p:cNvSpPr txBox="1"/>
+          <p:nvPr/>
+        </p:nvSpPr>
+        <p:spPr>
+          <a:xfrm>
+            <a:off x="3782873" y="2240280"/>
+            <a:ext cx="612648" cy="384048"/>
+          </a:xfrm>
+          <a:prstGeom prst="rect">
+            <a:avLst/>
+          </a:prstGeom>
+          <a:noFill/>
+          <a:ln/>
+        </p:spPr>
+        <p:txBody>
+          <a:bodyPr wrap="square" lIns="0" tIns="0" rIns="0" bIns="0" rtlCol="0" anchor="ctr"/>
+          <a:lstStyle/>
+          <a:p>
+            <a:pPr algn="l" indent="0" marL="0">
+              <a:buNone/>
+            </a:pPr>
+            <a:r>
+              <a:rPr lang="en-US" sz="1400" b="1" dirty="0">
+                <a:solidFill>
+                  <a:srgbClr val="1E2A5C"/>
+                </a:solidFill>
+                <a:latin typeface="Pretendard" pitchFamily="34" charset="0"/>
+                <a:ea typeface="Pretendard" pitchFamily="34" charset="-122"/>
+                <a:cs typeface="Pretendard" pitchFamily="34" charset="-120"/>
+              </a:rPr>
+              <a:t>청크 1</a:t>
+            </a:r>
+            <a:endParaRPr lang="en-US" sz="1400" dirty="0"/>
+          </a:p>
+        </p:txBody>
+      </p:sp>
+      <p:sp>
+        <p:nvSpPr>
+          <p:cNvPr id="23" name="Shape 21"/>
+          <p:cNvSpPr/>
+          <p:nvPr/>
+        </p:nvSpPr>
+        <p:spPr>
+          <a:xfrm>
+            <a:off x="4505249" y="2295144"/>
+            <a:ext cx="274320" cy="274320"/>
+          </a:xfrm>
+          <a:prstGeom prst="rightArrow">
+            <a:avLst/>
+          </a:prstGeom>
+          <a:solidFill>
+            <a:srgbClr val="2E74C6"/>
+          </a:solidFill>
+          <a:ln/>
+        </p:spPr>
+      </p:sp>
+      <p:sp>
+        <p:nvSpPr>
+          <p:cNvPr id="24" name="Text 22"/>
+          <p:cNvSpPr/>
+          <p:nvPr/>
+        </p:nvSpPr>
+        <p:spPr>
+          <a:xfrm>
+            <a:off x="4843577" y="2240280"/>
+            <a:ext cx="1188720" cy="384048"/>
+          </a:xfrm>
+          <a:prstGeom prst="roundRect">
+            <a:avLst>
+              <a:gd name="adj" fmla="val 19048"/>
+            </a:avLst>
+          </a:prstGeom>
+          <a:solidFill>
+            <a:srgbClr val="F5F8FC"/>
+          </a:solidFill>
+          <a:ln w="12700">
+            <a:solidFill>
+              <a:srgbClr val="D9E0EC"/>
+            </a:solidFill>
+          </a:ln>
+        </p:spPr>
+        <p:txBody>
+          <a:bodyPr wrap="square" lIns="50800" tIns="50800" rIns="50800" bIns="50800" rtlCol="0" anchor="ctr"/>
+          <a:lstStyle/>
+          <a:p>
+            <a:pPr algn="ctr" indent="0" marL="0">
+              <a:buNone/>
+            </a:pPr>
+            <a:r>
+              <a:rPr lang="en-US" sz="1400" dirty="0">
+                <a:solidFill>
+                  <a:srgbClr val="2B3242"/>
+                </a:solidFill>
+                <a:latin typeface="Pretendard" pitchFamily="34" charset="0"/>
+                <a:ea typeface="Pretendard" pitchFamily="34" charset="-122"/>
+                <a:cs typeface="Pretendard" pitchFamily="34" charset="-120"/>
+              </a:rPr>
+              <a:t>임베딩 모델</a:t>
+            </a:r>
+            <a:endParaRPr lang="en-US" sz="1400" dirty="0"/>
+          </a:p>
+        </p:txBody>
+      </p:sp>
+      <p:sp>
+        <p:nvSpPr>
+          <p:cNvPr id="25" name="Shape 23"/>
+          <p:cNvSpPr/>
+          <p:nvPr/>
+        </p:nvSpPr>
+        <p:spPr>
+          <a:xfrm>
+            <a:off x="6096305" y="2295144"/>
+            <a:ext cx="274320" cy="274320"/>
+          </a:xfrm>
+          <a:prstGeom prst="rightArrow">
+            <a:avLst/>
+          </a:prstGeom>
+          <a:solidFill>
+            <a:srgbClr val="2E74C6"/>
+          </a:solidFill>
+          <a:ln/>
+        </p:spPr>
+      </p:sp>
+      <p:sp>
+        <p:nvSpPr>
+          <p:cNvPr id="26" name="Text 24"/>
+          <p:cNvSpPr/>
+          <p:nvPr/>
+        </p:nvSpPr>
+        <p:spPr>
+          <a:xfrm>
+            <a:off x="6434633" y="2240280"/>
+            <a:ext cx="868680" cy="384048"/>
+          </a:xfrm>
+          <a:prstGeom prst="roundRect">
+            <a:avLst>
+              <a:gd name="adj" fmla="val 19048"/>
+            </a:avLst>
+          </a:prstGeom>
+          <a:solidFill>
+            <a:srgbClr val="F5F8FC"/>
+          </a:solidFill>
+          <a:ln w="12700">
+            <a:solidFill>
+              <a:srgbClr val="D9E0EC"/>
+            </a:solidFill>
+          </a:ln>
+        </p:spPr>
+        <p:txBody>
+          <a:bodyPr wrap="square" lIns="50800" tIns="50800" rIns="50800" bIns="50800" rtlCol="0" anchor="ctr"/>
+          <a:lstStyle/>
+          <a:p>
+            <a:pPr algn="ctr" indent="0" marL="0">
+              <a:buNone/>
+            </a:pPr>
+            <a:r>
+              <a:rPr lang="en-US" sz="1400" dirty="0">
+                <a:solidFill>
+                  <a:srgbClr val="2B3242"/>
+                </a:solidFill>
+                <a:latin typeface="Pretendard" pitchFamily="34" charset="0"/>
+                <a:ea typeface="Pretendard" pitchFamily="34" charset="-122"/>
+                <a:cs typeface="Pretendard" pitchFamily="34" charset="-120"/>
+              </a:rPr>
+              <a:t>토큰 평균</a:t>
+            </a:r>
+            <a:endParaRPr lang="en-US" sz="1400" dirty="0"/>
+          </a:p>
+        </p:txBody>
+      </p:sp>
+      <p:sp>
+        <p:nvSpPr>
+          <p:cNvPr id="27" name="Shape 25"/>
+          <p:cNvSpPr/>
+          <p:nvPr/>
+        </p:nvSpPr>
+        <p:spPr>
+          <a:xfrm>
+            <a:off x="7367321" y="2295144"/>
+            <a:ext cx="274320" cy="274320"/>
+          </a:xfrm>
+          <a:prstGeom prst="rightArrow">
+            <a:avLst/>
+          </a:prstGeom>
+          <a:solidFill>
+            <a:srgbClr val="2E74C6"/>
+          </a:solidFill>
+          <a:ln/>
+        </p:spPr>
+      </p:sp>
+      <p:sp>
+        <p:nvSpPr>
+          <p:cNvPr id="28" name="Text 26"/>
+          <p:cNvSpPr/>
+          <p:nvPr/>
+        </p:nvSpPr>
+        <p:spPr>
+          <a:xfrm>
+            <a:off x="7705649" y="2240280"/>
+            <a:ext cx="914400" cy="384048"/>
+          </a:xfrm>
+          <a:prstGeom prst="roundRect">
+            <a:avLst>
+              <a:gd name="adj" fmla="val 19048"/>
+            </a:avLst>
+          </a:prstGeom>
+          <a:solidFill>
+            <a:srgbClr val="2E74C6"/>
+          </a:solidFill>
+          <a:ln/>
+        </p:spPr>
+        <p:txBody>
+          <a:bodyPr wrap="square" lIns="50800" tIns="50800" rIns="50800" bIns="50800" rtlCol="0" anchor="ctr"/>
+          <a:lstStyle/>
+          <a:p>
+            <a:pPr algn="ctr" indent="0" marL="0">
+              <a:buNone/>
+            </a:pPr>
+            <a:r>
+              <a:rPr lang="en-US" sz="1400" b="1" dirty="0">
+                <a:solidFill>
+                  <a:srgbClr val="FFFFFF"/>
+                </a:solidFill>
+                <a:latin typeface="Pretendard" pitchFamily="34" charset="0"/>
+                <a:ea typeface="Pretendard" pitchFamily="34" charset="-122"/>
+                <a:cs typeface="Pretendard" pitchFamily="34" charset="-120"/>
+              </a:rPr>
+              <a:t>벡터 1</a:t>
+            </a:r>
+            <a:endParaRPr lang="en-US" sz="1400" dirty="0"/>
+          </a:p>
+        </p:txBody>
+      </p:sp>
+      <p:sp>
+        <p:nvSpPr>
+          <p:cNvPr id="29" name="Text 27"/>
+          <p:cNvSpPr txBox="1"/>
+          <p:nvPr/>
+        </p:nvSpPr>
+        <p:spPr>
+          <a:xfrm>
+            <a:off x="8757209" y="2240280"/>
+            <a:ext cx="1307592" cy="1371600"/>
+          </a:xfrm>
+          <a:prstGeom prst="rect">
+            <a:avLst/>
+          </a:prstGeom>
+          <a:noFill/>
+          <a:ln/>
+        </p:spPr>
+        <p:txBody>
+          <a:bodyPr wrap="square" lIns="0" tIns="0" rIns="0" bIns="0" rtlCol="0" anchor="ctr"/>
+          <a:lstStyle/>
+          <a:p>
+            <a:pPr algn="l" indent="0" marL="0">
+              <a:buNone/>
+            </a:pPr>
+            <a:r>
+              <a:rPr lang="en-US" sz="1400" b="1" dirty="0">
+                <a:solidFill>
+                  <a:srgbClr val="1E2A5C"/>
+                </a:solidFill>
+                <a:latin typeface="Pretendard" pitchFamily="34" charset="0"/>
+                <a:ea typeface="Pretendard" pitchFamily="34" charset="-122"/>
+                <a:cs typeface="Pretendard" pitchFamily="34" charset="-120"/>
+              </a:rPr>
+              <a:t>같은 모델을 3회 호출. 청크끼리 서로 못 봄</a:t>
+            </a:r>
+            <a:endParaRPr lang="en-US" sz="1400" dirty="0"/>
+          </a:p>
+        </p:txBody>
+      </p:sp>
+      <p:sp>
+        <p:nvSpPr>
+          <p:cNvPr id="30" name="Shape 28"/>
+          <p:cNvSpPr/>
+          <p:nvPr/>
+        </p:nvSpPr>
+        <p:spPr>
+          <a:xfrm>
+            <a:off x="3069641" y="2734056"/>
+            <a:ext cx="1371600" cy="384048"/>
+          </a:xfrm>
+          <a:prstGeom prst="roundRect">
+            <a:avLst>
+              <a:gd name="adj" fmla="val 19048"/>
+            </a:avLst>
+          </a:prstGeom>
+          <a:solidFill>
+            <a:srgbClr val="EEF3FA"/>
+          </a:solidFill>
+          <a:ln w="12700">
+            <a:solidFill>
+              <a:srgbClr val="D9E0EC"/>
+            </a:solidFill>
+            <a:prstDash val="solid"/>
+          </a:ln>
+        </p:spPr>
+      </p:sp>
+      <p:sp>
+        <p:nvSpPr>
+          <p:cNvPr id="31" name="Shape 29"/>
+          <p:cNvSpPr/>
+          <p:nvPr/>
+        </p:nvSpPr>
+        <p:spPr>
+          <a:xfrm>
+            <a:off x="3179369" y="2848356"/>
+            <a:ext cx="155448" cy="155448"/>
+          </a:xfrm>
+          <a:prstGeom prst="roundRect">
+            <a:avLst>
+              <a:gd name="adj" fmla="val 17647"/>
+            </a:avLst>
+          </a:prstGeom>
+          <a:solidFill>
+            <a:srgbClr val="1E2A5C"/>
+          </a:solidFill>
+          <a:ln/>
+        </p:spPr>
+      </p:sp>
+      <p:sp>
+        <p:nvSpPr>
+          <p:cNvPr id="32" name="Shape 30"/>
+          <p:cNvSpPr/>
+          <p:nvPr/>
+        </p:nvSpPr>
+        <p:spPr>
+          <a:xfrm>
+            <a:off x="3371393" y="2848356"/>
+            <a:ext cx="155448" cy="155448"/>
+          </a:xfrm>
+          <a:prstGeom prst="roundRect">
+            <a:avLst>
+              <a:gd name="adj" fmla="val 17647"/>
+            </a:avLst>
+          </a:prstGeom>
+          <a:solidFill>
+            <a:srgbClr val="1E2A5C"/>
+          </a:solidFill>
+          <a:ln/>
+        </p:spPr>
+      </p:sp>
+      <p:sp>
+        <p:nvSpPr>
+          <p:cNvPr id="33" name="Shape 31"/>
+          <p:cNvSpPr/>
+          <p:nvPr/>
+        </p:nvSpPr>
+        <p:spPr>
+          <a:xfrm>
+            <a:off x="3563417" y="2848356"/>
+            <a:ext cx="155448" cy="155448"/>
+          </a:xfrm>
+          <a:prstGeom prst="roundRect">
+            <a:avLst>
+              <a:gd name="adj" fmla="val 17647"/>
+            </a:avLst>
+          </a:prstGeom>
+          <a:solidFill>
+            <a:srgbClr val="1E2A5C"/>
+          </a:solidFill>
+          <a:ln/>
+        </p:spPr>
+      </p:sp>
+      <p:sp>
+        <p:nvSpPr>
+          <p:cNvPr id="34" name="Text 32"/>
+          <p:cNvSpPr txBox="1"/>
+          <p:nvPr/>
+        </p:nvSpPr>
+        <p:spPr>
+          <a:xfrm>
+            <a:off x="3782873" y="2734056"/>
+            <a:ext cx="612648" cy="384048"/>
+          </a:xfrm>
+          <a:prstGeom prst="rect">
+            <a:avLst/>
+          </a:prstGeom>
+          <a:noFill/>
+          <a:ln/>
+        </p:spPr>
+        <p:txBody>
+          <a:bodyPr wrap="square" lIns="0" tIns="0" rIns="0" bIns="0" rtlCol="0" anchor="ctr"/>
+          <a:lstStyle/>
+          <a:p>
+            <a:pPr algn="l" indent="0" marL="0">
+              <a:buNone/>
+            </a:pPr>
+            <a:r>
+              <a:rPr lang="en-US" sz="1400" b="1" dirty="0">
+                <a:solidFill>
+                  <a:srgbClr val="1E2A5C"/>
+                </a:solidFill>
+                <a:latin typeface="Pretendard" pitchFamily="34" charset="0"/>
+                <a:ea typeface="Pretendard" pitchFamily="34" charset="-122"/>
+                <a:cs typeface="Pretendard" pitchFamily="34" charset="-120"/>
+              </a:rPr>
+              <a:t>청크 2</a:t>
+            </a:r>
+            <a:endParaRPr lang="en-US" sz="1400" dirty="0"/>
+          </a:p>
+        </p:txBody>
+      </p:sp>
+      <p:sp>
+        <p:nvSpPr>
+          <p:cNvPr id="35" name="Shape 33"/>
+          <p:cNvSpPr/>
+          <p:nvPr/>
+        </p:nvSpPr>
+        <p:spPr>
+          <a:xfrm>
+            <a:off x="4505249" y="2788920"/>
+            <a:ext cx="274320" cy="274320"/>
+          </a:xfrm>
+          <a:prstGeom prst="rightArrow">
+            <a:avLst/>
+          </a:prstGeom>
+          <a:solidFill>
+            <a:srgbClr val="2E74C6"/>
+          </a:solidFill>
+          <a:ln/>
+        </p:spPr>
+      </p:sp>
+      <p:sp>
+        <p:nvSpPr>
+          <p:cNvPr id="36" name="Text 34"/>
+          <p:cNvSpPr/>
+          <p:nvPr/>
+        </p:nvSpPr>
+        <p:spPr>
+          <a:xfrm>
+            <a:off x="4843577" y="2734056"/>
+            <a:ext cx="1188720" cy="384048"/>
+          </a:xfrm>
+          <a:prstGeom prst="roundRect">
+            <a:avLst>
+              <a:gd name="adj" fmla="val 19048"/>
+            </a:avLst>
+          </a:prstGeom>
+          <a:solidFill>
+            <a:srgbClr val="F5F8FC"/>
+          </a:solidFill>
+          <a:ln w="12700">
+            <a:solidFill>
+              <a:srgbClr val="D9E0EC"/>
+            </a:solidFill>
+          </a:ln>
+        </p:spPr>
+        <p:txBody>
+          <a:bodyPr wrap="square" lIns="50800" tIns="50800" rIns="50800" bIns="50800" rtlCol="0" anchor="ctr"/>
+          <a:lstStyle/>
+          <a:p>
+            <a:pPr algn="ctr" indent="0" marL="0">
+              <a:buNone/>
+            </a:pPr>
+            <a:r>
+              <a:rPr lang="en-US" sz="1400" dirty="0">
+                <a:solidFill>
+                  <a:srgbClr val="2B3242"/>
+                </a:solidFill>
+                <a:latin typeface="Pretendard" pitchFamily="34" charset="0"/>
+                <a:ea typeface="Pretendard" pitchFamily="34" charset="-122"/>
+                <a:cs typeface="Pretendard" pitchFamily="34" charset="-120"/>
+              </a:rPr>
+              <a:t>임베딩 모델</a:t>
+            </a:r>
+            <a:endParaRPr lang="en-US" sz="1400" dirty="0"/>
+          </a:p>
+        </p:txBody>
+      </p:sp>
+      <p:sp>
+        <p:nvSpPr>
+          <p:cNvPr id="37" name="Shape 35"/>
+          <p:cNvSpPr/>
+          <p:nvPr/>
+        </p:nvSpPr>
+        <p:spPr>
+          <a:xfrm>
+            <a:off x="6096305" y="2788920"/>
+            <a:ext cx="274320" cy="274320"/>
+          </a:xfrm>
+          <a:prstGeom prst="rightArrow">
+            <a:avLst/>
+          </a:prstGeom>
+          <a:solidFill>
+            <a:srgbClr val="2E74C6"/>
+          </a:solidFill>
+          <a:ln/>
+        </p:spPr>
+      </p:sp>
+      <p:sp>
+        <p:nvSpPr>
+          <p:cNvPr id="38" name="Text 36"/>
+          <p:cNvSpPr/>
+          <p:nvPr/>
+        </p:nvSpPr>
+        <p:spPr>
+          <a:xfrm>
+            <a:off x="6434633" y="2734056"/>
+            <a:ext cx="868680" cy="384048"/>
+          </a:xfrm>
+          <a:prstGeom prst="roundRect">
+            <a:avLst>
+              <a:gd name="adj" fmla="val 19048"/>
+            </a:avLst>
+          </a:prstGeom>
+          <a:solidFill>
+            <a:srgbClr val="F5F8FC"/>
+          </a:solidFill>
+          <a:ln w="12700">
+            <a:solidFill>
+              <a:srgbClr val="D9E0EC"/>
+            </a:solidFill>
+          </a:ln>
+        </p:spPr>
+        <p:txBody>
+          <a:bodyPr wrap="square" lIns="50800" tIns="50800" rIns="50800" bIns="50800" rtlCol="0" anchor="ctr"/>
+          <a:lstStyle/>
+          <a:p>
+            <a:pPr algn="ctr" indent="0" marL="0">
+              <a:buNone/>
+            </a:pPr>
+            <a:r>
+              <a:rPr lang="en-US" sz="1400" dirty="0">
+                <a:solidFill>
+                  <a:srgbClr val="2B3242"/>
+                </a:solidFill>
+                <a:latin typeface="Pretendard" pitchFamily="34" charset="0"/>
+                <a:ea typeface="Pretendard" pitchFamily="34" charset="-122"/>
+                <a:cs typeface="Pretendard" pitchFamily="34" charset="-120"/>
+              </a:rPr>
+              <a:t>토큰 평균</a:t>
+            </a:r>
+            <a:endParaRPr lang="en-US" sz="1400" dirty="0"/>
+          </a:p>
+        </p:txBody>
+      </p:sp>
+      <p:sp>
+        <p:nvSpPr>
+          <p:cNvPr id="39" name="Shape 37"/>
+          <p:cNvSpPr/>
+          <p:nvPr/>
+        </p:nvSpPr>
+        <p:spPr>
+          <a:xfrm>
+            <a:off x="7367321" y="2788920"/>
+            <a:ext cx="274320" cy="274320"/>
+          </a:xfrm>
+          <a:prstGeom prst="rightArrow">
+            <a:avLst/>
+          </a:prstGeom>
+          <a:solidFill>
+            <a:srgbClr val="2E74C6"/>
+          </a:solidFill>
+          <a:ln/>
+        </p:spPr>
+      </p:sp>
+      <p:sp>
+        <p:nvSpPr>
+          <p:cNvPr id="40" name="Text 38"/>
+          <p:cNvSpPr/>
+          <p:nvPr/>
+        </p:nvSpPr>
+        <p:spPr>
+          <a:xfrm>
+            <a:off x="7705649" y="2734056"/>
+            <a:ext cx="914400" cy="384048"/>
+          </a:xfrm>
+          <a:prstGeom prst="roundRect">
+            <a:avLst>
+              <a:gd name="adj" fmla="val 19048"/>
+            </a:avLst>
+          </a:prstGeom>
+          <a:solidFill>
+            <a:srgbClr val="1E2A5C"/>
+          </a:solidFill>
+          <a:ln/>
+        </p:spPr>
+        <p:txBody>
+          <a:bodyPr wrap="square" lIns="50800" tIns="50800" rIns="50800" bIns="50800" rtlCol="0" anchor="ctr"/>
+          <a:lstStyle/>
+          <a:p>
+            <a:pPr algn="ctr" indent="0" marL="0">
+              <a:buNone/>
+            </a:pPr>
+            <a:r>
+              <a:rPr lang="en-US" sz="1400" b="1" dirty="0">
+                <a:solidFill>
+                  <a:srgbClr val="FFFFFF"/>
+                </a:solidFill>
+                <a:latin typeface="Pretendard" pitchFamily="34" charset="0"/>
+                <a:ea typeface="Pretendard" pitchFamily="34" charset="-122"/>
+                <a:cs typeface="Pretendard" pitchFamily="34" charset="-120"/>
+              </a:rPr>
+              <a:t>벡터 2</a:t>
+            </a:r>
+            <a:endParaRPr lang="en-US" sz="1400" dirty="0"/>
+          </a:p>
+        </p:txBody>
+      </p:sp>
+      <p:sp>
+        <p:nvSpPr>
+          <p:cNvPr id="41" name="Shape 39"/>
+          <p:cNvSpPr/>
+          <p:nvPr/>
+        </p:nvSpPr>
+        <p:spPr>
+          <a:xfrm>
+            <a:off x="3069641" y="3227832"/>
+            <a:ext cx="1371600" cy="384048"/>
+          </a:xfrm>
+          <a:prstGeom prst="roundRect">
+            <a:avLst>
+              <a:gd name="adj" fmla="val 19048"/>
+            </a:avLst>
+          </a:prstGeom>
+          <a:solidFill>
+            <a:srgbClr val="EEF3FA"/>
+          </a:solidFill>
+          <a:ln w="12700">
+            <a:solidFill>
+              <a:srgbClr val="D9E0EC"/>
+            </a:solidFill>
+            <a:prstDash val="solid"/>
+          </a:ln>
+        </p:spPr>
+      </p:sp>
+      <p:sp>
+        <p:nvSpPr>
+          <p:cNvPr id="42" name="Shape 40"/>
+          <p:cNvSpPr/>
+          <p:nvPr/>
+        </p:nvSpPr>
+        <p:spPr>
+          <a:xfrm>
+            <a:off x="3179369" y="3342132"/>
+            <a:ext cx="155448" cy="155448"/>
+          </a:xfrm>
+          <a:prstGeom prst="roundRect">
+            <a:avLst>
+              <a:gd name="adj" fmla="val 17647"/>
+            </a:avLst>
+          </a:prstGeom>
+          <a:solidFill>
+            <a:srgbClr val="404155"/>
+          </a:solidFill>
+          <a:ln/>
+        </p:spPr>
+      </p:sp>
+      <p:sp>
+        <p:nvSpPr>
+          <p:cNvPr id="43" name="Shape 41"/>
+          <p:cNvSpPr/>
+          <p:nvPr/>
+        </p:nvSpPr>
+        <p:spPr>
+          <a:xfrm>
+            <a:off x="3371393" y="3342132"/>
+            <a:ext cx="155448" cy="155448"/>
+          </a:xfrm>
+          <a:prstGeom prst="roundRect">
+            <a:avLst>
+              <a:gd name="adj" fmla="val 17647"/>
+            </a:avLst>
+          </a:prstGeom>
+          <a:solidFill>
+            <a:srgbClr val="404155"/>
+          </a:solidFill>
+          <a:ln/>
+        </p:spPr>
+      </p:sp>
+      <p:sp>
+        <p:nvSpPr>
+          <p:cNvPr id="44" name="Shape 42"/>
+          <p:cNvSpPr/>
+          <p:nvPr/>
+        </p:nvSpPr>
+        <p:spPr>
+          <a:xfrm>
+            <a:off x="3563417" y="3342132"/>
+            <a:ext cx="155448" cy="155448"/>
+          </a:xfrm>
+          <a:prstGeom prst="roundRect">
+            <a:avLst>
+              <a:gd name="adj" fmla="val 17647"/>
+            </a:avLst>
+          </a:prstGeom>
+          <a:solidFill>
+            <a:srgbClr val="404155"/>
+          </a:solidFill>
+          <a:ln/>
+        </p:spPr>
+      </p:sp>
+      <p:sp>
+        <p:nvSpPr>
+          <p:cNvPr id="45" name="Text 43"/>
+          <p:cNvSpPr txBox="1"/>
+          <p:nvPr/>
+        </p:nvSpPr>
+        <p:spPr>
+          <a:xfrm>
+            <a:off x="3782873" y="3227832"/>
+            <a:ext cx="612648" cy="384048"/>
+          </a:xfrm>
+          <a:prstGeom prst="rect">
+            <a:avLst/>
+          </a:prstGeom>
+          <a:noFill/>
+          <a:ln/>
+        </p:spPr>
+        <p:txBody>
+          <a:bodyPr wrap="square" lIns="0" tIns="0" rIns="0" bIns="0" rtlCol="0" anchor="ctr"/>
+          <a:lstStyle/>
+          <a:p>
+            <a:pPr algn="l" indent="0" marL="0">
+              <a:buNone/>
+            </a:pPr>
+            <a:r>
+              <a:rPr lang="en-US" sz="1400" b="1" dirty="0">
+                <a:solidFill>
+                  <a:srgbClr val="1E2A5C"/>
+                </a:solidFill>
+                <a:latin typeface="Pretendard" pitchFamily="34" charset="0"/>
+                <a:ea typeface="Pretendard" pitchFamily="34" charset="-122"/>
+                <a:cs typeface="Pretendard" pitchFamily="34" charset="-120"/>
+              </a:rPr>
+              <a:t>청크 3</a:t>
+            </a:r>
+            <a:endParaRPr lang="en-US" sz="1400" dirty="0"/>
+          </a:p>
+        </p:txBody>
+      </p:sp>
+      <p:sp>
+        <p:nvSpPr>
+          <p:cNvPr id="46" name="Shape 44"/>
+          <p:cNvSpPr/>
+          <p:nvPr/>
+        </p:nvSpPr>
+        <p:spPr>
+          <a:xfrm>
+            <a:off x="4505249" y="3282696"/>
+            <a:ext cx="274320" cy="274320"/>
+          </a:xfrm>
+          <a:prstGeom prst="rightArrow">
+            <a:avLst/>
+          </a:prstGeom>
+          <a:solidFill>
+            <a:srgbClr val="2E74C6"/>
+          </a:solidFill>
+          <a:ln/>
+        </p:spPr>
+      </p:sp>
+      <p:sp>
+        <p:nvSpPr>
+          <p:cNvPr id="47" name="Text 45"/>
+          <p:cNvSpPr/>
+          <p:nvPr/>
+        </p:nvSpPr>
+        <p:spPr>
+          <a:xfrm>
+            <a:off x="4843577" y="3227832"/>
+            <a:ext cx="1188720" cy="384048"/>
+          </a:xfrm>
+          <a:prstGeom prst="roundRect">
+            <a:avLst>
+              <a:gd name="adj" fmla="val 19048"/>
+            </a:avLst>
+          </a:prstGeom>
+          <a:solidFill>
+            <a:srgbClr val="F5F8FC"/>
+          </a:solidFill>
+          <a:ln w="12700">
+            <a:solidFill>
+              <a:srgbClr val="D9E0EC"/>
+            </a:solidFill>
+          </a:ln>
+        </p:spPr>
+        <p:txBody>
+          <a:bodyPr wrap="square" lIns="50800" tIns="50800" rIns="50800" bIns="50800" rtlCol="0" anchor="ctr"/>
+          <a:lstStyle/>
+          <a:p>
+            <a:pPr algn="ctr" indent="0" marL="0">
+              <a:buNone/>
+            </a:pPr>
+            <a:r>
+              <a:rPr lang="en-US" sz="1400" dirty="0">
+                <a:solidFill>
+                  <a:srgbClr val="2B3242"/>
+                </a:solidFill>
+                <a:latin typeface="Pretendard" pitchFamily="34" charset="0"/>
+                <a:ea typeface="Pretendard" pitchFamily="34" charset="-122"/>
+                <a:cs typeface="Pretendard" pitchFamily="34" charset="-120"/>
+              </a:rPr>
+              <a:t>임베딩 모델</a:t>
+            </a:r>
+            <a:endParaRPr lang="en-US" sz="1400" dirty="0"/>
+          </a:p>
+        </p:txBody>
+      </p:sp>
+      <p:sp>
+        <p:nvSpPr>
+          <p:cNvPr id="48" name="Shape 46"/>
+          <p:cNvSpPr/>
+          <p:nvPr/>
+        </p:nvSpPr>
+        <p:spPr>
+          <a:xfrm>
+            <a:off x="6096305" y="3282696"/>
+            <a:ext cx="274320" cy="274320"/>
+          </a:xfrm>
+          <a:prstGeom prst="rightArrow">
+            <a:avLst/>
+          </a:prstGeom>
+          <a:solidFill>
+            <a:srgbClr val="2E74C6"/>
+          </a:solidFill>
+          <a:ln/>
+        </p:spPr>
+      </p:sp>
+      <p:sp>
+        <p:nvSpPr>
+          <p:cNvPr id="49" name="Text 47"/>
+          <p:cNvSpPr/>
+          <p:nvPr/>
+        </p:nvSpPr>
+        <p:spPr>
+          <a:xfrm>
+            <a:off x="6434633" y="3227832"/>
+            <a:ext cx="868680" cy="384048"/>
+          </a:xfrm>
+          <a:prstGeom prst="roundRect">
+            <a:avLst>
+              <a:gd name="adj" fmla="val 19048"/>
+            </a:avLst>
+          </a:prstGeom>
+          <a:solidFill>
+            <a:srgbClr val="F5F8FC"/>
+          </a:solidFill>
+          <a:ln w="12700">
+            <a:solidFill>
+              <a:srgbClr val="D9E0EC"/>
+            </a:solidFill>
+          </a:ln>
+        </p:spPr>
+        <p:txBody>
+          <a:bodyPr wrap="square" lIns="50800" tIns="50800" rIns="50800" bIns="50800" rtlCol="0" anchor="ctr"/>
+          <a:lstStyle/>
+          <a:p>
+            <a:pPr algn="ctr" indent="0" marL="0">
+              <a:buNone/>
+            </a:pPr>
+            <a:r>
+              <a:rPr lang="en-US" sz="1400" dirty="0">
+                <a:solidFill>
+                  <a:srgbClr val="2B3242"/>
+                </a:solidFill>
+                <a:latin typeface="Pretendard" pitchFamily="34" charset="0"/>
+                <a:ea typeface="Pretendard" pitchFamily="34" charset="-122"/>
+                <a:cs typeface="Pretendard" pitchFamily="34" charset="-120"/>
+              </a:rPr>
+              <a:t>토큰 평균</a:t>
+            </a:r>
+            <a:endParaRPr lang="en-US" sz="1400" dirty="0"/>
+          </a:p>
+        </p:txBody>
+      </p:sp>
+      <p:sp>
+        <p:nvSpPr>
+          <p:cNvPr id="50" name="Shape 48"/>
+          <p:cNvSpPr/>
+          <p:nvPr/>
+        </p:nvSpPr>
+        <p:spPr>
+          <a:xfrm>
+            <a:off x="7367321" y="3282696"/>
+            <a:ext cx="274320" cy="274320"/>
+          </a:xfrm>
+          <a:prstGeom prst="rightArrow">
+            <a:avLst/>
+          </a:prstGeom>
+          <a:solidFill>
+            <a:srgbClr val="2E74C6"/>
+          </a:solidFill>
+          <a:ln/>
+        </p:spPr>
+      </p:sp>
+      <p:sp>
+        <p:nvSpPr>
+          <p:cNvPr id="51" name="Text 49"/>
+          <p:cNvSpPr/>
+          <p:nvPr/>
+        </p:nvSpPr>
+        <p:spPr>
+          <a:xfrm>
+            <a:off x="7705649" y="3227832"/>
+            <a:ext cx="914400" cy="384048"/>
+          </a:xfrm>
+          <a:prstGeom prst="roundRect">
+            <a:avLst>
+              <a:gd name="adj" fmla="val 19048"/>
+            </a:avLst>
+          </a:prstGeom>
+          <a:solidFill>
+            <a:srgbClr val="404155"/>
+          </a:solidFill>
+          <a:ln/>
+        </p:spPr>
+        <p:txBody>
+          <a:bodyPr wrap="square" lIns="50800" tIns="50800" rIns="50800" bIns="50800" rtlCol="0" anchor="ctr"/>
+          <a:lstStyle/>
+          <a:p>
+            <a:pPr algn="ctr" indent="0" marL="0">
+              <a:buNone/>
+            </a:pPr>
+            <a:r>
+              <a:rPr lang="en-US" sz="1400" b="1" dirty="0">
+                <a:solidFill>
+                  <a:srgbClr val="FFFFFF"/>
+                </a:solidFill>
+                <a:latin typeface="Pretendard" pitchFamily="34" charset="0"/>
+                <a:ea typeface="Pretendard" pitchFamily="34" charset="-122"/>
+                <a:cs typeface="Pretendard" pitchFamily="34" charset="-120"/>
+              </a:rPr>
+              <a:t>벡터 3</a:t>
+            </a:r>
+            <a:endParaRPr lang="en-US" sz="1400" dirty="0"/>
+          </a:p>
+        </p:txBody>
+      </p:sp>
+      <p:sp>
+        <p:nvSpPr>
+          <p:cNvPr id="52" name="Text 50"/>
+          <p:cNvSpPr txBox="1"/>
+          <p:nvPr/>
+        </p:nvSpPr>
+        <p:spPr>
+          <a:xfrm>
+            <a:off x="509321" y="3657600"/>
+            <a:ext cx="9555480" cy="274320"/>
+          </a:xfrm>
+          <a:prstGeom prst="rect">
+            <a:avLst/>
+          </a:prstGeom>
+          <a:noFill/>
+          <a:ln/>
+        </p:spPr>
+        <p:txBody>
+          <a:bodyPr wrap="square" lIns="0" tIns="0" rIns="0" bIns="0" rtlCol="0" anchor="ctr"/>
+          <a:lstStyle/>
+          <a:p>
+            <a:pPr algn="l" indent="0" marL="0">
+              <a:buNone/>
+            </a:pPr>
+            <a:r>
+              <a:rPr lang="en-US" sz="1400" dirty="0">
+                <a:solidFill>
+                  <a:srgbClr val="4A5364"/>
+                </a:solidFill>
+                <a:latin typeface="Pretendard" pitchFamily="34" charset="0"/>
+                <a:ea typeface="Pretendard" pitchFamily="34" charset="-122"/>
+                <a:cs typeface="Pretendard" pitchFamily="34" charset="-120"/>
+              </a:rPr>
+              <a:t>"Its more than 3.85 million..." 청크만 보면 모델은 "Its"가 무엇인지 알 수 없음</a:t>
+            </a:r>
+            <a:endParaRPr lang="en-US" sz="1400" dirty="0"/>
+          </a:p>
+        </p:txBody>
+      </p:sp>
+      <p:sp>
+        <p:nvSpPr>
+          <p:cNvPr id="53" name="Text 51"/>
+          <p:cNvSpPr/>
+          <p:nvPr/>
+        </p:nvSpPr>
+        <p:spPr>
+          <a:xfrm>
+            <a:off x="509321" y="3977640"/>
+            <a:ext cx="9555480" cy="411480"/>
+          </a:xfrm>
+          <a:prstGeom prst="roundRect">
+            <a:avLst>
+              <a:gd name="adj" fmla="val 13333"/>
+            </a:avLst>
+          </a:prstGeom>
+          <a:solidFill>
+            <a:srgbClr val="404155"/>
+          </a:solidFill>
+          <a:ln/>
+        </p:spPr>
+        <p:txBody>
+          <a:bodyPr wrap="square" lIns="0" tIns="0" rIns="0" bIns="0" rtlCol="0" anchor="ctr"/>
+          <a:lstStyle/>
+          <a:p>
+            <a:pPr algn="ctr" indent="0" marL="0">
+              <a:buNone/>
+            </a:pPr>
+            <a:r>
+              <a:rPr lang="en-US" sz="1800" b="1" dirty="0">
+                <a:solidFill>
+                  <a:srgbClr val="FFFFFF"/>
+                </a:solidFill>
+                <a:latin typeface="Pretendard" pitchFamily="34" charset="0"/>
+                <a:ea typeface="Pretendard" pitchFamily="34" charset="-122"/>
+                <a:cs typeface="Pretendard" pitchFamily="34" charset="-120"/>
+              </a:rPr>
+              <a:t>Late Chunking: 임베딩하고 나서 자르기 (embed → chunk)</a:t>
+            </a:r>
+            <a:endParaRPr lang="en-US" sz="1800" dirty="0"/>
+          </a:p>
+        </p:txBody>
+      </p:sp>
+      <p:sp>
+        <p:nvSpPr>
+          <p:cNvPr id="54" name="Shape 52"/>
+          <p:cNvSpPr/>
+          <p:nvPr/>
+        </p:nvSpPr>
+        <p:spPr>
+          <a:xfrm>
+            <a:off x="509321" y="4480560"/>
+            <a:ext cx="2103120" cy="1371600"/>
+          </a:xfrm>
+          <a:prstGeom prst="roundRect">
+            <a:avLst>
+              <a:gd name="adj" fmla="val 5333"/>
+            </a:avLst>
+          </a:prstGeom>
+          <a:solidFill>
+            <a:srgbClr val="F5F8FC"/>
+          </a:solidFill>
+          <a:ln w="12700">
+            <a:solidFill>
+              <a:srgbClr val="D9E0EC"/>
+            </a:solidFill>
+            <a:prstDash val="solid"/>
+          </a:ln>
+        </p:spPr>
+      </p:sp>
+      <p:sp>
+        <p:nvSpPr>
+          <p:cNvPr id="55" name="Text 53"/>
+          <p:cNvSpPr txBox="1"/>
+          <p:nvPr/>
+        </p:nvSpPr>
+        <p:spPr>
+          <a:xfrm>
+            <a:off x="646481" y="4572000"/>
+            <a:ext cx="1828800" cy="274320"/>
+          </a:xfrm>
+          <a:prstGeom prst="rect">
+            <a:avLst/>
+          </a:prstGeom>
+          <a:noFill/>
+          <a:ln/>
+        </p:spPr>
+        <p:txBody>
+          <a:bodyPr wrap="square" lIns="0" tIns="0" rIns="0" bIns="0" rtlCol="0" anchor="ctr"/>
+          <a:lstStyle/>
+          <a:p>
+            <a:pPr algn="l" indent="0" marL="0">
+              <a:buNone/>
+            </a:pPr>
+            <a:r>
+              <a:rPr lang="en-US" sz="1400" b="1" dirty="0">
+                <a:solidFill>
+                  <a:srgbClr val="1E2A5C"/>
+                </a:solidFill>
+                <a:latin typeface="Pretendard" pitchFamily="34" charset="0"/>
+                <a:ea typeface="Pretendard" pitchFamily="34" charset="-122"/>
+                <a:cs typeface="Pretendard" pitchFamily="34" charset="-120"/>
+              </a:rPr>
+              <a:t>문서 (토큰 9개로 단순화)</a:t>
+            </a:r>
+            <a:endParaRPr lang="en-US" sz="1400" dirty="0"/>
+          </a:p>
+        </p:txBody>
+      </p:sp>
+      <p:sp>
+        <p:nvSpPr>
+          <p:cNvPr id="56" name="Shape 54"/>
+          <p:cNvSpPr/>
+          <p:nvPr/>
+        </p:nvSpPr>
+        <p:spPr>
+          <a:xfrm>
+            <a:off x="664769" y="5047488"/>
+            <a:ext cx="155448" cy="155448"/>
+          </a:xfrm>
+          <a:prstGeom prst="roundRect">
+            <a:avLst>
+              <a:gd name="adj" fmla="val 17647"/>
+            </a:avLst>
+          </a:prstGeom>
+          <a:solidFill>
+            <a:srgbClr val="2E74C6"/>
+          </a:solidFill>
+          <a:ln/>
+        </p:spPr>
+      </p:sp>
+      <p:sp>
+        <p:nvSpPr>
+          <p:cNvPr id="57" name="Shape 55"/>
+          <p:cNvSpPr/>
+          <p:nvPr/>
+        </p:nvSpPr>
+        <p:spPr>
+          <a:xfrm>
+            <a:off x="856793" y="5047488"/>
+            <a:ext cx="155448" cy="155448"/>
+          </a:xfrm>
+          <a:prstGeom prst="roundRect">
+            <a:avLst>
+              <a:gd name="adj" fmla="val 17647"/>
+            </a:avLst>
+          </a:prstGeom>
+          <a:solidFill>
+            <a:srgbClr val="2E74C6"/>
+          </a:solidFill>
+          <a:ln/>
+        </p:spPr>
+      </p:sp>
+      <p:sp>
+        <p:nvSpPr>
+          <p:cNvPr id="58" name="Shape 56"/>
+          <p:cNvSpPr/>
+          <p:nvPr/>
+        </p:nvSpPr>
+        <p:spPr>
+          <a:xfrm>
+            <a:off x="1048817" y="5047488"/>
+            <a:ext cx="155448" cy="155448"/>
+          </a:xfrm>
+          <a:prstGeom prst="roundRect">
+            <a:avLst>
+              <a:gd name="adj" fmla="val 17647"/>
+            </a:avLst>
+          </a:prstGeom>
+          <a:solidFill>
+            <a:srgbClr val="2E74C6"/>
+          </a:solidFill>
+          <a:ln/>
+        </p:spPr>
+      </p:sp>
+      <p:sp>
+        <p:nvSpPr>
+          <p:cNvPr id="59" name="Shape 57"/>
+          <p:cNvSpPr/>
+          <p:nvPr/>
+        </p:nvSpPr>
+        <p:spPr>
+          <a:xfrm>
+            <a:off x="1295705" y="5047488"/>
+            <a:ext cx="155448" cy="155448"/>
+          </a:xfrm>
+          <a:prstGeom prst="roundRect">
+            <a:avLst>
+              <a:gd name="adj" fmla="val 17647"/>
+            </a:avLst>
+          </a:prstGeom>
+          <a:solidFill>
+            <a:srgbClr val="1E2A5C"/>
+          </a:solidFill>
+          <a:ln/>
+        </p:spPr>
+      </p:sp>
+      <p:sp>
+        <p:nvSpPr>
+          <p:cNvPr id="60" name="Shape 58"/>
+          <p:cNvSpPr/>
+          <p:nvPr/>
+        </p:nvSpPr>
+        <p:spPr>
+          <a:xfrm>
+            <a:off x="1487729" y="5047488"/>
+            <a:ext cx="155448" cy="155448"/>
+          </a:xfrm>
+          <a:prstGeom prst="roundRect">
+            <a:avLst>
+              <a:gd name="adj" fmla="val 17647"/>
+            </a:avLst>
+          </a:prstGeom>
+          <a:solidFill>
+            <a:srgbClr val="1E2A5C"/>
+          </a:solidFill>
+          <a:ln/>
+        </p:spPr>
+      </p:sp>
+      <p:sp>
+        <p:nvSpPr>
+          <p:cNvPr id="61" name="Shape 59"/>
+          <p:cNvSpPr/>
+          <p:nvPr/>
+        </p:nvSpPr>
+        <p:spPr>
+          <a:xfrm>
+            <a:off x="1679753" y="5047488"/>
+            <a:ext cx="155448" cy="155448"/>
+          </a:xfrm>
+          <a:prstGeom prst="roundRect">
+            <a:avLst>
+              <a:gd name="adj" fmla="val 17647"/>
+            </a:avLst>
+          </a:prstGeom>
+          <a:solidFill>
+            <a:srgbClr val="1E2A5C"/>
+          </a:solidFill>
+          <a:ln/>
+        </p:spPr>
+      </p:sp>
+      <p:sp>
+        <p:nvSpPr>
+          <p:cNvPr id="62" name="Shape 60"/>
+          <p:cNvSpPr/>
+          <p:nvPr/>
+        </p:nvSpPr>
+        <p:spPr>
+          <a:xfrm>
+            <a:off x="1926641" y="5047488"/>
+            <a:ext cx="155448" cy="155448"/>
+          </a:xfrm>
+          <a:prstGeom prst="roundRect">
+            <a:avLst>
+              <a:gd name="adj" fmla="val 17647"/>
+            </a:avLst>
+          </a:prstGeom>
+          <a:solidFill>
+            <a:srgbClr val="404155"/>
+          </a:solidFill>
+          <a:ln/>
+        </p:spPr>
+      </p:sp>
+      <p:sp>
+        <p:nvSpPr>
+          <p:cNvPr id="63" name="Shape 61"/>
+          <p:cNvSpPr/>
+          <p:nvPr/>
+        </p:nvSpPr>
+        <p:spPr>
+          <a:xfrm>
+            <a:off x="2118665" y="5047488"/>
+            <a:ext cx="155448" cy="155448"/>
+          </a:xfrm>
+          <a:prstGeom prst="roundRect">
+            <a:avLst>
+              <a:gd name="adj" fmla="val 17647"/>
+            </a:avLst>
+          </a:prstGeom>
+          <a:solidFill>
+            <a:srgbClr val="404155"/>
+          </a:solidFill>
+          <a:ln/>
+        </p:spPr>
+      </p:sp>
+      <p:sp>
+        <p:nvSpPr>
+          <p:cNvPr id="64" name="Shape 62"/>
+          <p:cNvSpPr/>
+          <p:nvPr/>
+        </p:nvSpPr>
+        <p:spPr>
+          <a:xfrm>
+            <a:off x="2310689" y="5047488"/>
+            <a:ext cx="155448" cy="155448"/>
+          </a:xfrm>
+          <a:prstGeom prst="roundRect">
+            <a:avLst>
+              <a:gd name="adj" fmla="val 17647"/>
+            </a:avLst>
+          </a:prstGeom>
+          <a:solidFill>
+            <a:srgbClr val="404155"/>
+          </a:solidFill>
+          <a:ln/>
+        </p:spPr>
+      </p:sp>
+      <p:sp>
+        <p:nvSpPr>
+          <p:cNvPr id="65" name="Text 63"/>
+          <p:cNvSpPr txBox="1"/>
+          <p:nvPr/>
+        </p:nvSpPr>
+        <p:spPr>
+          <a:xfrm>
+            <a:off x="646481" y="5468112"/>
+            <a:ext cx="1828800" cy="274320"/>
+          </a:xfrm>
+          <a:prstGeom prst="rect">
+            <a:avLst/>
+          </a:prstGeom>
+          <a:noFill/>
+          <a:ln/>
+        </p:spPr>
+        <p:txBody>
+          <a:bodyPr wrap="square" lIns="0" tIns="0" rIns="0" bIns="0" rtlCol="0" anchor="ctr"/>
+          <a:lstStyle/>
+          <a:p>
+            <a:pPr algn="l" indent="0" marL="0">
+              <a:buNone/>
+            </a:pPr>
+            <a:r>
+              <a:rPr lang="en-US" sz="1400" dirty="0">
+                <a:solidFill>
+                  <a:srgbClr val="4A5364"/>
+                </a:solidFill>
+                <a:latin typeface="Pretendard" pitchFamily="34" charset="0"/>
+                <a:ea typeface="Pretendard" pitchFamily="34" charset="-122"/>
+                <a:cs typeface="Pretendard" pitchFamily="34" charset="-120"/>
+              </a:rPr>
+              <a:t>같은 경계, 적용만 나중에</a:t>
+            </a:r>
+            <a:endParaRPr lang="en-US" sz="1400" dirty="0"/>
+          </a:p>
+        </p:txBody>
+      </p:sp>
+      <p:sp>
+        <p:nvSpPr>
+          <p:cNvPr id="66" name="Shape 64"/>
+          <p:cNvSpPr/>
+          <p:nvPr/>
+        </p:nvSpPr>
+        <p:spPr>
+          <a:xfrm>
+            <a:off x="2703881" y="5029200"/>
+            <a:ext cx="274320" cy="274320"/>
+          </a:xfrm>
+          <a:prstGeom prst="rightArrow">
+            <a:avLst/>
+          </a:prstGeom>
+          <a:solidFill>
+            <a:srgbClr val="2E74C6"/>
+          </a:solidFill>
+          <a:ln/>
+        </p:spPr>
+      </p:sp>
+      <p:sp>
+        <p:nvSpPr>
+          <p:cNvPr id="67" name="Text 65"/>
+          <p:cNvSpPr/>
+          <p:nvPr/>
+        </p:nvSpPr>
+        <p:spPr>
+          <a:xfrm>
+            <a:off x="3069641" y="4480560"/>
+            <a:ext cx="1463040" cy="1371600"/>
+          </a:xfrm>
+          <a:prstGeom prst="roundRect">
+            <a:avLst>
+              <a:gd name="adj" fmla="val 5333"/>
+            </a:avLst>
+          </a:prstGeom>
+          <a:solidFill>
+            <a:srgbClr val="F5F8FC"/>
+          </a:solidFill>
+          <a:ln w="12700">
+            <a:solidFill>
+              <a:srgbClr val="D9E0EC"/>
+            </a:solidFill>
+          </a:ln>
+        </p:spPr>
+        <p:txBody>
+          <a:bodyPr wrap="square" lIns="50800" tIns="50800" rIns="50800" bIns="50800" rtlCol="0" anchor="ctr"/>
+          <a:lstStyle/>
+          <a:p>
+            <a:pPr algn="ctr" indent="0" marL="0">
+              <a:buNone/>
+            </a:pPr>
+            <a:r>
+              <a:rPr lang="en-US" sz="1400" b="1" dirty="0">
+                <a:solidFill>
+                  <a:srgbClr val="1E2A5C"/>
+                </a:solidFill>
+                <a:latin typeface="Pretendard" pitchFamily="34" charset="0"/>
+                <a:ea typeface="Pretendard" pitchFamily="34" charset="-122"/>
+                <a:cs typeface="Pretendard" pitchFamily="34" charset="-120"/>
+              </a:rPr>
+              <a:t>임베딩 모델 1회 통과 (긴 문맥 모델 필요)</a:t>
+            </a:r>
+            <a:endParaRPr lang="en-US" sz="1400" dirty="0"/>
+          </a:p>
+        </p:txBody>
+      </p:sp>
+      <p:sp>
+        <p:nvSpPr>
+          <p:cNvPr id="68" name="Shape 66"/>
+          <p:cNvSpPr/>
+          <p:nvPr/>
+        </p:nvSpPr>
+        <p:spPr>
+          <a:xfrm>
+            <a:off x="4596689" y="5029200"/>
+            <a:ext cx="274320" cy="274320"/>
+          </a:xfrm>
+          <a:prstGeom prst="rightArrow">
+            <a:avLst/>
+          </a:prstGeom>
+          <a:solidFill>
+            <a:srgbClr val="2E74C6"/>
+          </a:solidFill>
+          <a:ln/>
+        </p:spPr>
+      </p:sp>
+      <p:sp>
+        <p:nvSpPr>
+          <p:cNvPr id="69" name="Shape 67"/>
+          <p:cNvSpPr/>
+          <p:nvPr/>
+        </p:nvSpPr>
+        <p:spPr>
+          <a:xfrm>
+            <a:off x="4935017" y="4480560"/>
+            <a:ext cx="2377440" cy="1371600"/>
+          </a:xfrm>
+          <a:prstGeom prst="roundRect">
+            <a:avLst>
+              <a:gd name="adj" fmla="val 5333"/>
+            </a:avLst>
+          </a:prstGeom>
+          <a:solidFill>
+            <a:srgbClr val="EEF3FA"/>
+          </a:solidFill>
+          <a:ln w="12700">
+            <a:solidFill>
+              <a:srgbClr val="D9E0EC"/>
+            </a:solidFill>
+            <a:prstDash val="solid"/>
+          </a:ln>
+        </p:spPr>
+      </p:sp>
+      <p:sp>
+        <p:nvSpPr>
+          <p:cNvPr id="70" name="Text 68"/>
+          <p:cNvSpPr txBox="1"/>
+          <p:nvPr/>
+        </p:nvSpPr>
+        <p:spPr>
+          <a:xfrm>
+            <a:off x="5072177" y="4572000"/>
+            <a:ext cx="2103120" cy="274320"/>
+          </a:xfrm>
+          <a:prstGeom prst="rect">
+            <a:avLst/>
+          </a:prstGeom>
+          <a:noFill/>
+          <a:ln/>
+        </p:spPr>
+        <p:txBody>
+          <a:bodyPr wrap="square" lIns="0" tIns="0" rIns="0" bIns="0" rtlCol="0" anchor="ctr"/>
+          <a:lstStyle/>
+          <a:p>
+            <a:pPr algn="l" indent="0" marL="0">
+              <a:buNone/>
+            </a:pPr>
+            <a:r>
+              <a:rPr lang="en-US" sz="1400" b="1" dirty="0">
+                <a:solidFill>
+                  <a:srgbClr val="1E2A5C"/>
+                </a:solidFill>
+                <a:latin typeface="Pretendard" pitchFamily="34" charset="0"/>
+                <a:ea typeface="Pretendard" pitchFamily="34" charset="-122"/>
+                <a:cs typeface="Pretendard" pitchFamily="34" charset="-120"/>
+              </a:rPr>
+              <a:t>토큰 벡터 9개</a:t>
+            </a:r>
+            <a:endParaRPr lang="en-US" sz="1400" dirty="0"/>
+          </a:p>
+        </p:txBody>
+      </p:sp>
+      <p:sp>
+        <p:nvSpPr>
+          <p:cNvPr id="71" name="Shape 69"/>
+          <p:cNvSpPr/>
+          <p:nvPr/>
+        </p:nvSpPr>
+        <p:spPr>
+          <a:xfrm>
+            <a:off x="5090465" y="5047488"/>
+            <a:ext cx="173736" cy="173736"/>
+          </a:xfrm>
+          <a:prstGeom prst="roundRect">
+            <a:avLst>
+              <a:gd name="adj" fmla="val 15789"/>
+            </a:avLst>
+          </a:prstGeom>
+          <a:solidFill>
+            <a:srgbClr val="2E74C6"/>
+          </a:solidFill>
+          <a:ln/>
+        </p:spPr>
+      </p:sp>
+      <p:sp>
+        <p:nvSpPr>
+          <p:cNvPr id="72" name="Shape 70"/>
+          <p:cNvSpPr/>
+          <p:nvPr/>
+        </p:nvSpPr>
+        <p:spPr>
+          <a:xfrm>
+            <a:off x="5309921" y="5047488"/>
+            <a:ext cx="173736" cy="173736"/>
+          </a:xfrm>
+          <a:prstGeom prst="roundRect">
+            <a:avLst>
+              <a:gd name="adj" fmla="val 15789"/>
+            </a:avLst>
+          </a:prstGeom>
+          <a:solidFill>
+            <a:srgbClr val="2E74C6"/>
+          </a:solidFill>
+          <a:ln/>
+        </p:spPr>
+      </p:sp>
+      <p:sp>
+        <p:nvSpPr>
+          <p:cNvPr id="73" name="Shape 71"/>
+          <p:cNvSpPr/>
+          <p:nvPr/>
+        </p:nvSpPr>
+        <p:spPr>
+          <a:xfrm>
+            <a:off x="5529377" y="5047488"/>
+            <a:ext cx="173736" cy="173736"/>
+          </a:xfrm>
+          <a:prstGeom prst="roundRect">
+            <a:avLst>
+              <a:gd name="adj" fmla="val 15789"/>
+            </a:avLst>
+          </a:prstGeom>
+          <a:solidFill>
+            <a:srgbClr val="2E74C6"/>
+          </a:solidFill>
+          <a:ln/>
+        </p:spPr>
+      </p:sp>
+      <p:sp>
+        <p:nvSpPr>
+          <p:cNvPr id="74" name="Shape 72"/>
+          <p:cNvSpPr/>
+          <p:nvPr/>
+        </p:nvSpPr>
+        <p:spPr>
+          <a:xfrm>
+            <a:off x="5812841" y="5047488"/>
+            <a:ext cx="173736" cy="173736"/>
+          </a:xfrm>
+          <a:prstGeom prst="roundRect">
+            <a:avLst>
+              <a:gd name="adj" fmla="val 15789"/>
+            </a:avLst>
+          </a:prstGeom>
+          <a:solidFill>
+            <a:srgbClr val="1E2A5C"/>
+          </a:solidFill>
+          <a:ln/>
+        </p:spPr>
+      </p:sp>
+      <p:sp>
+        <p:nvSpPr>
+          <p:cNvPr id="75" name="Shape 73"/>
+          <p:cNvSpPr/>
+          <p:nvPr/>
+        </p:nvSpPr>
+        <p:spPr>
+          <a:xfrm>
+            <a:off x="6032297" y="5047488"/>
+            <a:ext cx="173736" cy="173736"/>
+          </a:xfrm>
+          <a:prstGeom prst="roundRect">
+            <a:avLst>
+              <a:gd name="adj" fmla="val 15789"/>
+            </a:avLst>
+          </a:prstGeom>
+          <a:solidFill>
+            <a:srgbClr val="1E2A5C"/>
+          </a:solidFill>
+          <a:ln/>
+        </p:spPr>
+      </p:sp>
+      <p:sp>
+        <p:nvSpPr>
+          <p:cNvPr id="76" name="Shape 74"/>
+          <p:cNvSpPr/>
+          <p:nvPr/>
+        </p:nvSpPr>
+        <p:spPr>
+          <a:xfrm>
+            <a:off x="6251753" y="5047488"/>
+            <a:ext cx="173736" cy="173736"/>
+          </a:xfrm>
+          <a:prstGeom prst="roundRect">
+            <a:avLst>
+              <a:gd name="adj" fmla="val 15789"/>
+            </a:avLst>
+          </a:prstGeom>
+          <a:solidFill>
+            <a:srgbClr val="1E2A5C"/>
+          </a:solidFill>
+          <a:ln/>
+        </p:spPr>
+      </p:sp>
+      <p:sp>
+        <p:nvSpPr>
+          <p:cNvPr id="77" name="Shape 75"/>
+          <p:cNvSpPr/>
+          <p:nvPr/>
+        </p:nvSpPr>
+        <p:spPr>
+          <a:xfrm>
+            <a:off x="6535217" y="5047488"/>
+            <a:ext cx="173736" cy="173736"/>
+          </a:xfrm>
+          <a:prstGeom prst="roundRect">
+            <a:avLst>
+              <a:gd name="adj" fmla="val 15789"/>
+            </a:avLst>
+          </a:prstGeom>
+          <a:solidFill>
+            <a:srgbClr val="404155"/>
+          </a:solidFill>
+          <a:ln/>
+        </p:spPr>
+      </p:sp>
+      <p:sp>
+        <p:nvSpPr>
+          <p:cNvPr id="78" name="Shape 76"/>
+          <p:cNvSpPr/>
+          <p:nvPr/>
+        </p:nvSpPr>
+        <p:spPr>
+          <a:xfrm>
+            <a:off x="6754673" y="5047488"/>
+            <a:ext cx="173736" cy="173736"/>
+          </a:xfrm>
+          <a:prstGeom prst="roundRect">
+            <a:avLst>
+              <a:gd name="adj" fmla="val 15789"/>
+            </a:avLst>
+          </a:prstGeom>
+          <a:solidFill>
+            <a:srgbClr val="404155"/>
+          </a:solidFill>
+          <a:ln/>
+        </p:spPr>
+      </p:sp>
+      <p:sp>
+        <p:nvSpPr>
+          <p:cNvPr id="79" name="Shape 77"/>
+          <p:cNvSpPr/>
+          <p:nvPr/>
+        </p:nvSpPr>
+        <p:spPr>
+          <a:xfrm>
+            <a:off x="6974129" y="5047488"/>
+            <a:ext cx="173736" cy="173736"/>
+          </a:xfrm>
+          <a:prstGeom prst="roundRect">
+            <a:avLst>
+              <a:gd name="adj" fmla="val 15789"/>
+            </a:avLst>
+          </a:prstGeom>
+          <a:solidFill>
+            <a:srgbClr val="404155"/>
+          </a:solidFill>
+          <a:ln/>
+        </p:spPr>
+      </p:sp>
+      <p:sp>
+        <p:nvSpPr>
+          <p:cNvPr id="80" name="Text 78"/>
+          <p:cNvSpPr txBox="1"/>
+          <p:nvPr/>
+        </p:nvSpPr>
+        <p:spPr>
+          <a:xfrm>
+            <a:off x="5072177" y="5468112"/>
+            <a:ext cx="2103120" cy="274320"/>
+          </a:xfrm>
+          <a:prstGeom prst="rect">
+            <a:avLst/>
+          </a:prstGeom>
+          <a:noFill/>
+          <a:ln/>
+        </p:spPr>
+        <p:txBody>
+          <a:bodyPr wrap="square" lIns="0" tIns="0" rIns="0" bIns="0" rtlCol="0" anchor="ctr"/>
+          <a:lstStyle/>
+          <a:p>
+            <a:pPr algn="l" indent="0" marL="0">
+              <a:buNone/>
+            </a:pPr>
+            <a:r>
+              <a:rPr lang="en-US" sz="1400" dirty="0">
+                <a:solidFill>
+                  <a:srgbClr val="4A5364"/>
+                </a:solidFill>
+                <a:latin typeface="Pretendard" pitchFamily="34" charset="0"/>
+                <a:ea typeface="Pretendard" pitchFamily="34" charset="-122"/>
+                <a:cs typeface="Pretendard" pitchFamily="34" charset="-120"/>
+              </a:rPr>
+              <a:t>각 토큰이 문서 전체를 봄 (양방향)</a:t>
+            </a:r>
+            <a:endParaRPr lang="en-US" sz="1400" dirty="0"/>
+          </a:p>
+        </p:txBody>
+      </p:sp>
+      <p:sp>
+        <p:nvSpPr>
+          <p:cNvPr id="81" name="Shape 79"/>
+          <p:cNvSpPr/>
+          <p:nvPr/>
+        </p:nvSpPr>
+        <p:spPr>
+          <a:xfrm>
+            <a:off x="7376465" y="5029200"/>
+            <a:ext cx="274320" cy="274320"/>
+          </a:xfrm>
+          <a:prstGeom prst="rightArrow">
+            <a:avLst/>
+          </a:prstGeom>
+          <a:solidFill>
+            <a:srgbClr val="2E74C6"/>
+          </a:solidFill>
+          <a:ln/>
+        </p:spPr>
+      </p:sp>
+      <p:sp>
+        <p:nvSpPr>
+          <p:cNvPr id="82" name="Text 80"/>
+          <p:cNvSpPr/>
+          <p:nvPr/>
+        </p:nvSpPr>
+        <p:spPr>
+          <a:xfrm>
+            <a:off x="7714793" y="4480560"/>
+            <a:ext cx="914400" cy="1371600"/>
+          </a:xfrm>
+          <a:prstGeom prst="roundRect">
+            <a:avLst>
+              <a:gd name="adj" fmla="val 8000"/>
+            </a:avLst>
+          </a:prstGeom>
+          <a:solidFill>
+            <a:srgbClr val="F5F8FC"/>
+          </a:solidFill>
+          <a:ln w="12700">
+            <a:solidFill>
+              <a:srgbClr val="D9E0EC"/>
+            </a:solidFill>
+          </a:ln>
+        </p:spPr>
+        <p:txBody>
+          <a:bodyPr wrap="square" lIns="50800" tIns="50800" rIns="50800" bIns="50800" rtlCol="0" anchor="ctr"/>
+          <a:lstStyle/>
+          <a:p>
+            <a:pPr algn="ctr" indent="0" marL="0">
+              <a:buNone/>
+            </a:pPr>
+            <a:r>
+              <a:rPr lang="en-US" sz="1400" dirty="0">
+                <a:solidFill>
+                  <a:srgbClr val="2B3242"/>
+                </a:solidFill>
+                <a:latin typeface="Pretendard" pitchFamily="34" charset="0"/>
+                <a:ea typeface="Pretendard" pitchFamily="34" charset="-122"/>
+                <a:cs typeface="Pretendard" pitchFamily="34" charset="-120"/>
+              </a:rPr>
+              <a:t>구간별 평균</a:t>
+            </a:r>
+            <a:endParaRPr lang="en-US" sz="1400" dirty="0"/>
+          </a:p>
+        </p:txBody>
+      </p:sp>
+      <p:sp>
+        <p:nvSpPr>
+          <p:cNvPr id="83" name="Shape 81"/>
+          <p:cNvSpPr/>
+          <p:nvPr/>
+        </p:nvSpPr>
+        <p:spPr>
+          <a:xfrm>
+            <a:off x="8693201" y="5029200"/>
+            <a:ext cx="274320" cy="274320"/>
+          </a:xfrm>
+          <a:prstGeom prst="rightArrow">
+            <a:avLst/>
+          </a:prstGeom>
+          <a:solidFill>
+            <a:srgbClr val="2E74C6"/>
+          </a:solidFill>
+          <a:ln/>
+        </p:spPr>
+      </p:sp>
+      <p:sp>
+        <p:nvSpPr>
+          <p:cNvPr id="84" name="Text 82"/>
+          <p:cNvSpPr/>
+          <p:nvPr/>
+        </p:nvSpPr>
+        <p:spPr>
+          <a:xfrm>
+            <a:off x="9031529" y="4480560"/>
+            <a:ext cx="914400" cy="384048"/>
+          </a:xfrm>
+          <a:prstGeom prst="roundRect">
+            <a:avLst>
+              <a:gd name="adj" fmla="val 19048"/>
+            </a:avLst>
+          </a:prstGeom>
+          <a:solidFill>
+            <a:srgbClr val="2E74C6"/>
+          </a:solidFill>
+          <a:ln/>
+        </p:spPr>
+        <p:txBody>
+          <a:bodyPr wrap="square" lIns="50800" tIns="50800" rIns="50800" bIns="50800" rtlCol="0" anchor="ctr"/>
+          <a:lstStyle/>
+          <a:p>
+            <a:pPr algn="ctr" indent="0" marL="0">
+              <a:buNone/>
+            </a:pPr>
+            <a:r>
+              <a:rPr lang="en-US" sz="1400" b="1" dirty="0">
+                <a:solidFill>
+                  <a:srgbClr val="FFFFFF"/>
+                </a:solidFill>
+                <a:latin typeface="Pretendard" pitchFamily="34" charset="0"/>
+                <a:ea typeface="Pretendard" pitchFamily="34" charset="-122"/>
+                <a:cs typeface="Pretendard" pitchFamily="34" charset="-120"/>
+              </a:rPr>
+              <a:t>벡터 1</a:t>
+            </a:r>
+            <a:endParaRPr lang="en-US" sz="1400" dirty="0"/>
+          </a:p>
+        </p:txBody>
+      </p:sp>
+      <p:sp>
+        <p:nvSpPr>
+          <p:cNvPr id="85" name="Text 83"/>
+          <p:cNvSpPr/>
+          <p:nvPr/>
+        </p:nvSpPr>
+        <p:spPr>
+          <a:xfrm>
+            <a:off x="9031529" y="4974336"/>
+            <a:ext cx="914400" cy="384048"/>
+          </a:xfrm>
+          <a:prstGeom prst="roundRect">
+            <a:avLst>
+              <a:gd name="adj" fmla="val 19048"/>
+            </a:avLst>
+          </a:prstGeom>
+          <a:solidFill>
+            <a:srgbClr val="1E2A5C"/>
+          </a:solidFill>
+          <a:ln/>
+        </p:spPr>
+        <p:txBody>
+          <a:bodyPr wrap="square" lIns="50800" tIns="50800" rIns="50800" bIns="50800" rtlCol="0" anchor="ctr"/>
+          <a:lstStyle/>
+          <a:p>
+            <a:pPr algn="ctr" indent="0" marL="0">
+              <a:buNone/>
+            </a:pPr>
+            <a:r>
+              <a:rPr lang="en-US" sz="1400" b="1" dirty="0">
+                <a:solidFill>
+                  <a:srgbClr val="FFFFFF"/>
+                </a:solidFill>
+                <a:latin typeface="Pretendard" pitchFamily="34" charset="0"/>
+                <a:ea typeface="Pretendard" pitchFamily="34" charset="-122"/>
+                <a:cs typeface="Pretendard" pitchFamily="34" charset="-120"/>
+              </a:rPr>
+              <a:t>벡터 2</a:t>
+            </a:r>
+            <a:endParaRPr lang="en-US" sz="1400" dirty="0"/>
+          </a:p>
+        </p:txBody>
+      </p:sp>
+      <p:sp>
+        <p:nvSpPr>
+          <p:cNvPr id="86" name="Text 84"/>
+          <p:cNvSpPr/>
+          <p:nvPr/>
+        </p:nvSpPr>
+        <p:spPr>
+          <a:xfrm>
+            <a:off x="9031529" y="5468112"/>
+            <a:ext cx="914400" cy="384048"/>
+          </a:xfrm>
+          <a:prstGeom prst="roundRect">
+            <a:avLst>
+              <a:gd name="adj" fmla="val 19048"/>
+            </a:avLst>
+          </a:prstGeom>
+          <a:solidFill>
+            <a:srgbClr val="404155"/>
+          </a:solidFill>
+          <a:ln/>
+        </p:spPr>
+        <p:txBody>
+          <a:bodyPr wrap="square" lIns="50800" tIns="50800" rIns="50800" bIns="50800" rtlCol="0" anchor="ctr"/>
+          <a:lstStyle/>
+          <a:p>
+            <a:pPr algn="ctr" indent="0" marL="0">
+              <a:buNone/>
+            </a:pPr>
+            <a:r>
+              <a:rPr lang="en-US" sz="1400" b="1" dirty="0">
+                <a:solidFill>
+                  <a:srgbClr val="FFFFFF"/>
+                </a:solidFill>
+                <a:latin typeface="Pretendard" pitchFamily="34" charset="0"/>
+                <a:ea typeface="Pretendard" pitchFamily="34" charset="-122"/>
+                <a:cs typeface="Pretendard" pitchFamily="34" charset="-120"/>
+              </a:rPr>
+              <a:t>벡터 3</a:t>
+            </a:r>
+            <a:endParaRPr lang="en-US" sz="1400" dirty="0"/>
+          </a:p>
+        </p:txBody>
+      </p:sp>
+      <p:sp>
+        <p:nvSpPr>
+          <p:cNvPr id="87" name="Text 85"/>
+          <p:cNvSpPr txBox="1"/>
+          <p:nvPr/>
+        </p:nvSpPr>
+        <p:spPr>
+          <a:xfrm>
+            <a:off x="509321" y="5897880"/>
+            <a:ext cx="9555480" cy="274320"/>
+          </a:xfrm>
+          <a:prstGeom prst="rect">
+            <a:avLst/>
+          </a:prstGeom>
+          <a:noFill/>
+          <a:ln/>
+        </p:spPr>
+        <p:txBody>
+          <a:bodyPr wrap="square" lIns="0" tIns="0" rIns="0" bIns="0" rtlCol="0" anchor="ctr"/>
+          <a:lstStyle/>
+          <a:p>
+            <a:pPr algn="l" indent="0" marL="0">
+              <a:buNone/>
+            </a:pPr>
+            <a:r>
+              <a:rPr lang="en-US" sz="1400" dirty="0">
+                <a:solidFill>
+                  <a:srgbClr val="4A5364"/>
+                </a:solidFill>
+                <a:latin typeface="Pretendard" pitchFamily="34" charset="0"/>
+                <a:ea typeface="Pretendard" pitchFamily="34" charset="-122"/>
+                <a:cs typeface="Pretendard" pitchFamily="34" charset="-120"/>
+              </a:rPr>
+              <a:t>저장하는 벡터 수와 검색 방식은 그대로. 바뀌는 것은 벡터에 담긴 문맥뿐</a:t>
+            </a:r>
+            <a:endParaRPr lang="en-US" sz="1400" dirty="0"/>
+          </a:p>
+        </p:txBody>
+      </p:sp>
+      <p:sp>
+        <p:nvSpPr>
+          <p:cNvPr id="88" name="Text 86"/>
+          <p:cNvSpPr/>
+          <p:nvPr/>
+        </p:nvSpPr>
+        <p:spPr>
+          <a:xfrm>
+            <a:off x="10339121" y="1737360"/>
+            <a:ext cx="3794760" cy="411480"/>
+          </a:xfrm>
+          <a:prstGeom prst="roundRect">
+            <a:avLst>
+              <a:gd name="adj" fmla="val 13333"/>
+            </a:avLst>
+          </a:prstGeom>
+          <a:solidFill>
+            <a:srgbClr val="404155"/>
+          </a:solidFill>
+          <a:ln/>
+        </p:spPr>
+        <p:txBody>
+          <a:bodyPr wrap="square" lIns="0" tIns="0" rIns="0" bIns="0" rtlCol="0" anchor="ctr"/>
+          <a:lstStyle/>
+          <a:p>
+            <a:pPr algn="ctr" indent="0" marL="0">
+              <a:buNone/>
+            </a:pPr>
+            <a:r>
+              <a:rPr lang="en-US" sz="1800" b="1" dirty="0">
+                <a:solidFill>
+                  <a:srgbClr val="FFFFFF"/>
+                </a:solidFill>
+                <a:latin typeface="Pretendard" pitchFamily="34" charset="0"/>
+                <a:ea typeface="Pretendard" pitchFamily="34" charset="-122"/>
+                <a:cs typeface="Pretendard" pitchFamily="34" charset="-120"/>
+              </a:rPr>
+              <a:t>예시: 베를린 문서를 문장 3개로 자름</a:t>
+            </a:r>
+            <a:endParaRPr lang="en-US" sz="1800" dirty="0"/>
+          </a:p>
+        </p:txBody>
+      </p:sp>
+      <p:sp>
+        <p:nvSpPr>
+          <p:cNvPr id="89" name="Text 87"/>
+          <p:cNvSpPr/>
+          <p:nvPr/>
+        </p:nvSpPr>
+        <p:spPr>
+          <a:xfrm>
+            <a:off x="10339121" y="2240280"/>
+            <a:ext cx="3794760" cy="1783080"/>
+          </a:xfrm>
+          <a:prstGeom prst="roundRect">
+            <a:avLst>
+              <a:gd name="adj" fmla="val 5128"/>
+            </a:avLst>
+          </a:prstGeom>
+          <a:solidFill>
+            <a:srgbClr val="EEF3FA"/>
+          </a:solidFill>
+          <a:ln w="12700">
+            <a:solidFill>
+              <a:srgbClr val="D9E0EC"/>
+            </a:solidFill>
+          </a:ln>
+        </p:spPr>
+        <p:txBody>
+          <a:bodyPr wrap="square" lIns="182880" tIns="128016" rIns="182880" bIns="91440" rtlCol="0" anchor="t"/>
+          <a:lstStyle/>
+          <a:p>
+            <a:pPr algn="l" indent="0" marL="0">
+              <a:spcAft>
+                <a:spcPts val="600"/>
+              </a:spcAft>
+              <a:buNone/>
+            </a:pPr>
+            <a:r>
+              <a:rPr lang="en-US" sz="1400" dirty="0">
+                <a:solidFill>
+                  <a:srgbClr val="2B3242"/>
+                </a:solidFill>
+                <a:latin typeface="Pretendard" pitchFamily="34" charset="0"/>
+                <a:ea typeface="Pretendard" pitchFamily="34" charset="-122"/>
+                <a:cs typeface="Pretendard" pitchFamily="34" charset="-120"/>
+              </a:rPr>
+              <a:t>문장 1: "Berlin is the capital and largest city..."</a:t>
+            </a:r>
+            <a:endParaRPr lang="en-US" sz="1400" dirty="0"/>
+          </a:p>
+          <a:p>
+            <a:pPr algn="l" indent="0" marL="0">
+              <a:spcAft>
+                <a:spcPts val="600"/>
+              </a:spcAft>
+              <a:buNone/>
+            </a:pPr>
+            <a:r>
+              <a:rPr lang="en-US" sz="1400" dirty="0">
+                <a:solidFill>
+                  <a:srgbClr val="2B3242"/>
+                </a:solidFill>
+                <a:latin typeface="Pretendard" pitchFamily="34" charset="0"/>
+                <a:ea typeface="Pretendard" pitchFamily="34" charset="-122"/>
+                <a:cs typeface="Pretendard" pitchFamily="34" charset="-120"/>
+              </a:rPr>
+              <a:t>문장 2: "Its more than 3.85 million inhabitants..."</a:t>
+            </a:r>
+            <a:endParaRPr lang="en-US" sz="1400" dirty="0"/>
+          </a:p>
+          <a:p>
+            <a:pPr algn="l" indent="0" marL="0">
+              <a:spcAft>
+                <a:spcPts val="600"/>
+              </a:spcAft>
+              <a:buNone/>
+            </a:pPr>
+            <a:r>
+              <a:rPr lang="en-US" sz="1400" dirty="0">
+                <a:solidFill>
+                  <a:srgbClr val="2B3242"/>
+                </a:solidFill>
+                <a:latin typeface="Pretendard" pitchFamily="34" charset="0"/>
+                <a:ea typeface="Pretendard" pitchFamily="34" charset="-122"/>
+                <a:cs typeface="Pretendard" pitchFamily="34" charset="-120"/>
+              </a:rPr>
+              <a:t>문장 3: "The city is also one of the states..."</a:t>
+            </a:r>
+            <a:endParaRPr lang="en-US" sz="1400" dirty="0"/>
+          </a:p>
+        </p:txBody>
+      </p:sp>
+      <p:graphicFrame>
+        <p:nvGraphicFramePr>
+          <p:cNvPr id="3" name="Table 0"/>
+          <p:cNvGraphicFramePr>
+            <a:graphicFrameLocks noGrp="1"/>
+          </p:cNvGraphicFramePr>
+          <p:nvPr>
+            <p:extLst>
+              <p:ext uri="{D42A27DB-BD31-4B8C-83A1-F6EECF244321}">
+                <p14:modId xmlns:p14="http://schemas.microsoft.com/office/powerpoint/2010/main" val="1579011935"/>
+              </p:ext>
+            </p:extLst>
+          </p:nvPr>
+        </p:nvGraphicFramePr>
+        <p:xfrm>
+          <a:off x="10339121" y="4160520"/>
+          <a:ext cx="3794760" cy="914400"/>
+        </p:xfrm>
+        <a:graphic>
+          <a:graphicData uri="http://schemas.openxmlformats.org/drawingml/2006/table">
+            <a:tbl>
+              <a:tblPr/>
+              <a:tblGrid>
+                <a:gridCol w="1606601"/>
+                <a:gridCol w="1097280"/>
+                <a:gridCol w="1097280"/>
+              </a:tblGrid>
+              <a:tr h="411480">
+                <a:tc>
+                  <a:txBody>
+                    <a:bodyPr/>
+                    <a:lstStyle/>
+                    <a:p>
+                      <a:pPr indent="0" marL="0">
+                        <a:buNone/>
+                      </a:pPr>
+                      <a:r>
+                        <a:rPr lang="en-US" sz="1400" b="1" dirty="0">
+                          <a:solidFill>
+                            <a:srgbClr val="1E2A5C"/>
+                          </a:solidFill>
+                          <a:latin typeface="Pretendard" pitchFamily="34" charset="0"/>
+                          <a:ea typeface="Pretendard" pitchFamily="34" charset="-122"/>
+                          <a:cs typeface="Pretendard" pitchFamily="34" charset="-120"/>
+                        </a:rPr>
+                        <a:t>문장</a:t>
+                      </a:r>
+                      <a:endParaRPr lang="en-US" sz="1400" dirty="0">
+                        <a:latin typeface="Pretendard" charset="0"/>
+                        <a:ea typeface="Pretendard" charset="0"/>
+                        <a:cs typeface="Pretendard" charset="0"/>
+                      </a:endParaRPr>
+                    </a:p>
+                  </a:txBody>
+                  <a:tcPr marL="73152" marR="73152" marT="45720" marB="45720" anchor="ctr">
+                    <a:lnL w="12700" cap="flat" cmpd="sng" algn="ctr">
+                      <a:solidFill>
+                        <a:srgbClr val="EDF0F6"/>
+                      </a:solidFill>
+                      <a:prstDash val="solid"/>
+                      <a:round/>
+                      <a:headEnd type="none" w="med" len="med"/>
+                      <a:tailEnd type="none" w="med" len="med"/>
+                    </a:lnL>
+                    <a:lnR w="12700" cap="flat" cmpd="sng" algn="ctr">
+                      <a:solidFill>
+                        <a:srgbClr val="EDF0F6"/>
+                      </a:solidFill>
+                      <a:prstDash val="solid"/>
+                      <a:round/>
+                      <a:headEnd type="none" w="med" len="med"/>
+                      <a:tailEnd type="none" w="med" len="med"/>
+                    </a:lnR>
+                    <a:lnT w="12700" cap="flat" cmpd="sng" algn="ctr">
+                      <a:solidFill>
+                        <a:srgbClr val="EDF0F6"/>
+                      </a:solidFill>
+                      <a:prstDash val="solid"/>
+                      <a:round/>
+                      <a:headEnd type="none" w="med" len="med"/>
+                      <a:tailEnd type="none" w="med" len="med"/>
+                    </a:lnT>
+                    <a:lnB w="12700" cap="flat" cmpd="sng" algn="ctr">
+                      <a:solidFill>
+                        <a:srgbClr val="EDF0F6"/>
+                      </a:solidFill>
+                      <a:prstDash val="solid"/>
+                      <a:round/>
+                      <a:headEnd type="none" w="med" len="med"/>
+                      <a:tailEnd type="none" w="med" len="med"/>
+                    </a:lnB>
+                    <a:solidFill>
+                      <a:srgbClr val="E2EEF9"/>
+                    </a:solidFill>
+                  </a:tcPr>
+                </a:tc>
+                <a:tc>
+                  <a:txBody>
+                    <a:bodyPr/>
+                    <a:lstStyle/>
+                    <a:p>
+                      <a:pPr indent="0" marL="0">
+                        <a:buNone/>
+                      </a:pPr>
+                      <a:r>
+                        <a:rPr lang="en-US" sz="1400" b="1" dirty="0">
+                          <a:solidFill>
+                            <a:srgbClr val="1E2A5C"/>
+                          </a:solidFill>
+                          <a:latin typeface="Pretendard" pitchFamily="34" charset="0"/>
+                          <a:ea typeface="Pretendard" pitchFamily="34" charset="-122"/>
+                          <a:cs typeface="Pretendard" pitchFamily="34" charset="-120"/>
+                        </a:rPr>
+                        <a:t>기존</a:t>
+                      </a:r>
+                      <a:endParaRPr lang="en-US" sz="1400" dirty="0">
+                        <a:latin typeface="Pretendard" charset="0"/>
+                        <a:ea typeface="Pretendard" charset="0"/>
+                        <a:cs typeface="Pretendard" charset="0"/>
+                      </a:endParaRPr>
+                    </a:p>
+                  </a:txBody>
+                  <a:tcPr marL="73152" marR="73152" marT="45720" marB="45720" anchor="ctr">
+                    <a:lnL w="12700" cap="flat" cmpd="sng" algn="ctr">
+                      <a:solidFill>
+                        <a:srgbClr val="EDF0F6"/>
+                      </a:solidFill>
+                      <a:prstDash val="solid"/>
+                      <a:round/>
+                      <a:headEnd type="none" w="med" len="med"/>
+                      <a:tailEnd type="none" w="med" len="med"/>
+                    </a:lnL>
+                    <a:lnR w="12700" cap="flat" cmpd="sng" algn="ctr">
+                      <a:solidFill>
+                        <a:srgbClr val="EDF0F6"/>
+                      </a:solidFill>
+                      <a:prstDash val="solid"/>
+                      <a:round/>
+                      <a:headEnd type="none" w="med" len="med"/>
+                      <a:tailEnd type="none" w="med" len="med"/>
+                    </a:lnR>
+                    <a:lnT w="12700" cap="flat" cmpd="sng" algn="ctr">
+                      <a:solidFill>
+                        <a:srgbClr val="EDF0F6"/>
+                      </a:solidFill>
+                      <a:prstDash val="solid"/>
+                      <a:round/>
+                      <a:headEnd type="none" w="med" len="med"/>
+                      <a:tailEnd type="none" w="med" len="med"/>
+                    </a:lnT>
+                    <a:lnB w="12700" cap="flat" cmpd="sng" algn="ctr">
+                      <a:solidFill>
+                        <a:srgbClr val="EDF0F6"/>
+                      </a:solidFill>
+                      <a:prstDash val="solid"/>
+                      <a:round/>
+                      <a:headEnd type="none" w="med" len="med"/>
+                      <a:tailEnd type="none" w="med" len="med"/>
+                    </a:lnB>
+                    <a:solidFill>
+                      <a:srgbClr val="E2EEF9"/>
+                    </a:solidFill>
+                  </a:tcPr>
+                </a:tc>
+                <a:tc>
+                  <a:txBody>
+                    <a:bodyPr/>
+                    <a:lstStyle/>
+                    <a:p>
+                      <a:pPr indent="0" marL="0">
+                        <a:buNone/>
+                      </a:pPr>
+                      <a:r>
+                        <a:rPr lang="en-US" sz="1400" b="1" dirty="0">
+                          <a:solidFill>
+                            <a:srgbClr val="1E2A5C"/>
+                          </a:solidFill>
+                          <a:latin typeface="Pretendard" pitchFamily="34" charset="0"/>
+                          <a:ea typeface="Pretendard" pitchFamily="34" charset="-122"/>
+                          <a:cs typeface="Pretendard" pitchFamily="34" charset="-120"/>
+                        </a:rPr>
+                        <a:t>Late</a:t>
+                      </a:r>
+                      <a:endParaRPr lang="en-US" sz="1400" dirty="0">
+                        <a:latin typeface="Pretendard" charset="0"/>
+                        <a:ea typeface="Pretendard" charset="0"/>
+                        <a:cs typeface="Pretendard" charset="0"/>
+                      </a:endParaRPr>
+                    </a:p>
+                  </a:txBody>
+                  <a:tcPr marL="73152" marR="73152" marT="45720" marB="45720" anchor="ctr">
+                    <a:lnL w="12700" cap="flat" cmpd="sng" algn="ctr">
+                      <a:solidFill>
+                        <a:srgbClr val="EDF0F6"/>
+                      </a:solidFill>
+                      <a:prstDash val="solid"/>
+                      <a:round/>
+                      <a:headEnd type="none" w="med" len="med"/>
+                      <a:tailEnd type="none" w="med" len="med"/>
+                    </a:lnL>
+                    <a:lnR w="12700" cap="flat" cmpd="sng" algn="ctr">
+                      <a:solidFill>
+                        <a:srgbClr val="EDF0F6"/>
+                      </a:solidFill>
+                      <a:prstDash val="solid"/>
+                      <a:round/>
+                      <a:headEnd type="none" w="med" len="med"/>
+                      <a:tailEnd type="none" w="med" len="med"/>
+                    </a:lnR>
+                    <a:lnT w="12700" cap="flat" cmpd="sng" algn="ctr">
+                      <a:solidFill>
+                        <a:srgbClr val="EDF0F6"/>
+                      </a:solidFill>
+                      <a:prstDash val="solid"/>
+                      <a:round/>
+                      <a:headEnd type="none" w="med" len="med"/>
+                      <a:tailEnd type="none" w="med" len="med"/>
+                    </a:lnT>
+                    <a:lnB w="12700" cap="flat" cmpd="sng" algn="ctr">
+                      <a:solidFill>
+                        <a:srgbClr val="EDF0F6"/>
+                      </a:solidFill>
+                      <a:prstDash val="solid"/>
+                      <a:round/>
+                      <a:headEnd type="none" w="med" len="med"/>
+                      <a:tailEnd type="none" w="med" len="med"/>
+                    </a:lnB>
+                    <a:solidFill>
+                      <a:srgbClr val="E2EEF9"/>
+                    </a:solidFill>
+                  </a:tcPr>
+                </a:tc>
+              </a:tr>
+              <a:tr h="457200">
+                <a:tc>
+                  <a:txBody>
+                    <a:bodyPr/>
+                    <a:lstStyle/>
+                    <a:p>
+                      <a:pPr indent="0" marL="0">
+                        <a:buNone/>
+                      </a:pPr>
+                      <a:r>
+                        <a:rPr lang="en-US" sz="1400" b="1" dirty="0">
+                          <a:solidFill>
+                            <a:srgbClr val="1E2A5C"/>
+                          </a:solidFill>
+                          <a:latin typeface="Pretendard" pitchFamily="34" charset="0"/>
+                          <a:ea typeface="Pretendard" pitchFamily="34" charset="-122"/>
+                          <a:cs typeface="Pretendard" pitchFamily="34" charset="-120"/>
+                        </a:rPr>
+                        <a:t>문장 1</a:t>
+                      </a:r>
+                      <a:endParaRPr lang="en-US" sz="1400" dirty="0">
+                        <a:latin typeface="Pretendard" charset="0"/>
+                        <a:ea typeface="Pretendard" charset="0"/>
+                        <a:cs typeface="Pretendard" charset="0"/>
+                      </a:endParaRPr>
+                    </a:p>
+                  </a:txBody>
+                  <a:tcPr marL="73152" marR="73152" marT="45720" marB="45720" anchor="ctr">
+                    <a:lnL w="12700" cap="flat" cmpd="sng" algn="ctr">
+                      <a:solidFill>
+                        <a:srgbClr val="EDF0F6"/>
+                      </a:solidFill>
+                      <a:prstDash val="solid"/>
+                      <a:round/>
+                      <a:headEnd type="none" w="med" len="med"/>
+                      <a:tailEnd type="none" w="med" len="med"/>
+                    </a:lnL>
+                    <a:lnR w="12700" cap="flat" cmpd="sng" algn="ctr">
+                      <a:solidFill>
+                        <a:srgbClr val="EDF0F6"/>
+                      </a:solidFill>
+                      <a:prstDash val="solid"/>
+                      <a:round/>
+                      <a:headEnd type="none" w="med" len="med"/>
+                      <a:tailEnd type="none" w="med" len="med"/>
+                    </a:lnR>
+                    <a:lnT w="12700" cap="flat" cmpd="sng" algn="ctr">
+                      <a:solidFill>
+                        <a:srgbClr val="EDF0F6"/>
+                      </a:solidFill>
+                      <a:prstDash val="solid"/>
+                      <a:round/>
+                      <a:headEnd type="none" w="med" len="med"/>
+                      <a:tailEnd type="none" w="med" len="med"/>
+                    </a:lnT>
+                    <a:lnB w="12700" cap="flat" cmpd="sng" algn="ctr">
+                      <a:solidFill>
+                        <a:srgbClr val="EDF0F6"/>
+                      </a:solidFill>
+                      <a:prstDash val="solid"/>
+                      <a:round/>
+                      <a:headEnd type="none" w="med" len="med"/>
+                      <a:tailEnd type="none" w="med" len="med"/>
+                    </a:lnB>
+                    <a:solidFill>
+                      <a:srgbClr val="FFFFFF"/>
+                    </a:solidFill>
+                  </a:tcPr>
+                </a:tc>
+                <a:tc>
+                  <a:txBody>
+                    <a:bodyPr/>
+                    <a:lstStyle/>
+                    <a:p>
+                      <a:pPr indent="0" marL="0">
+                        <a:buNone/>
+                      </a:pPr>
+                      <a:r>
+                        <a:rPr lang="en-US" sz="1400" dirty="0">
+                          <a:solidFill>
+                            <a:srgbClr val="2B3242"/>
+                          </a:solidFill>
+                          <a:latin typeface="Pretendard" pitchFamily="34" charset="0"/>
+                          <a:ea typeface="Pretendard" pitchFamily="34" charset="-122"/>
+                          <a:cs typeface="Pretendard" pitchFamily="34" charset="-120"/>
+                        </a:rPr>
+                        <a:t>0.8486</a:t>
+                      </a:r>
+                      <a:endParaRPr lang="en-US" sz="1400" dirty="0">
+                        <a:latin typeface="Pretendard" charset="0"/>
+                        <a:ea typeface="Pretendard" charset="0"/>
+                        <a:cs typeface="Pretendard" charset="0"/>
+                      </a:endParaRPr>
+                    </a:p>
+                  </a:txBody>
+                  <a:tcPr marL="73152" marR="73152" marT="45720" marB="45720" anchor="ctr">
+                    <a:lnL w="12700" cap="flat" cmpd="sng" algn="ctr">
+                      <a:solidFill>
+                        <a:srgbClr val="EDF0F6"/>
+                      </a:solidFill>
+                      <a:prstDash val="solid"/>
+                      <a:round/>
+                      <a:headEnd type="none" w="med" len="med"/>
+                      <a:tailEnd type="none" w="med" len="med"/>
+                    </a:lnL>
+                    <a:lnR w="12700" cap="flat" cmpd="sng" algn="ctr">
+                      <a:solidFill>
+                        <a:srgbClr val="EDF0F6"/>
+                      </a:solidFill>
+                      <a:prstDash val="solid"/>
+                      <a:round/>
+                      <a:headEnd type="none" w="med" len="med"/>
+                      <a:tailEnd type="none" w="med" len="med"/>
+                    </a:lnR>
+                    <a:lnT w="12700" cap="flat" cmpd="sng" algn="ctr">
+                      <a:solidFill>
+                        <a:srgbClr val="EDF0F6"/>
+                      </a:solidFill>
+                      <a:prstDash val="solid"/>
+                      <a:round/>
+                      <a:headEnd type="none" w="med" len="med"/>
+                      <a:tailEnd type="none" w="med" len="med"/>
+                    </a:lnT>
+                    <a:lnB w="12700" cap="flat" cmpd="sng" algn="ctr">
+                      <a:solidFill>
+                        <a:srgbClr val="EDF0F6"/>
+                      </a:solidFill>
+                      <a:prstDash val="solid"/>
+                      <a:round/>
+                      <a:headEnd type="none" w="med" len="med"/>
+                      <a:tailEnd type="none" w="med" len="med"/>
+                    </a:lnB>
+                    <a:solidFill>
+                      <a:srgbClr val="FFFFFF"/>
+                    </a:solidFill>
+                  </a:tcPr>
+                </a:tc>
+                <a:tc>
+                  <a:txBody>
+                    <a:bodyPr/>
+                    <a:lstStyle/>
+                    <a:p>
+                      <a:pPr indent="0" marL="0">
+                        <a:buNone/>
+                      </a:pPr>
+                      <a:r>
+                        <a:rPr lang="en-US" sz="1400" dirty="0">
+                          <a:solidFill>
+                            <a:srgbClr val="2B3242"/>
+                          </a:solidFill>
+                          <a:latin typeface="Pretendard" pitchFamily="34" charset="0"/>
+                          <a:ea typeface="Pretendard" pitchFamily="34" charset="-122"/>
+                          <a:cs typeface="Pretendard" pitchFamily="34" charset="-120"/>
+                        </a:rPr>
+                        <a:t>0.8495</a:t>
+                      </a:r>
+                      <a:endParaRPr lang="en-US" sz="1400" dirty="0">
+                        <a:latin typeface="Pretendard" charset="0"/>
+                        <a:ea typeface="Pretendard" charset="0"/>
+                        <a:cs typeface="Pretendard" charset="0"/>
+                      </a:endParaRPr>
+                    </a:p>
+                  </a:txBody>
+                  <a:tcPr marL="73152" marR="73152" marT="45720" marB="45720" anchor="ctr">
+                    <a:lnL w="12700" cap="flat" cmpd="sng" algn="ctr">
+                      <a:solidFill>
+                        <a:srgbClr val="EDF0F6"/>
+                      </a:solidFill>
+                      <a:prstDash val="solid"/>
+                      <a:round/>
+                      <a:headEnd type="none" w="med" len="med"/>
+                      <a:tailEnd type="none" w="med" len="med"/>
+                    </a:lnL>
+                    <a:lnR w="12700" cap="flat" cmpd="sng" algn="ctr">
+                      <a:solidFill>
+                        <a:srgbClr val="EDF0F6"/>
+                      </a:solidFill>
+                      <a:prstDash val="solid"/>
+                      <a:round/>
+                      <a:headEnd type="none" w="med" len="med"/>
+                      <a:tailEnd type="none" w="med" len="med"/>
+                    </a:lnR>
+                    <a:lnT w="12700" cap="flat" cmpd="sng" algn="ctr">
+                      <a:solidFill>
+                        <a:srgbClr val="EDF0F6"/>
+                      </a:solidFill>
+                      <a:prstDash val="solid"/>
+                      <a:round/>
+                      <a:headEnd type="none" w="med" len="med"/>
+                      <a:tailEnd type="none" w="med" len="med"/>
+                    </a:lnT>
+                    <a:lnB w="12700" cap="flat" cmpd="sng" algn="ctr">
+                      <a:solidFill>
+                        <a:srgbClr val="EDF0F6"/>
+                      </a:solidFill>
+                      <a:prstDash val="solid"/>
+                      <a:round/>
+                      <a:headEnd type="none" w="med" len="med"/>
+                      <a:tailEnd type="none" w="med" len="med"/>
+                    </a:lnB>
+                    <a:solidFill>
+                      <a:srgbClr val="FFFFFF"/>
+                    </a:solidFill>
+                  </a:tcPr>
+                </a:tc>
+              </a:tr>
+              <a:tr h="457200">
+                <a:tc>
+                  <a:txBody>
+                    <a:bodyPr/>
+                    <a:lstStyle/>
+                    <a:p>
+                      <a:pPr indent="0" marL="0">
+                        <a:buNone/>
+                      </a:pPr>
+                      <a:r>
+                        <a:rPr lang="en-US" sz="1400" b="1" dirty="0">
+                          <a:solidFill>
+                            <a:srgbClr val="1E2A5C"/>
+                          </a:solidFill>
+                          <a:latin typeface="Pretendard" pitchFamily="34" charset="0"/>
+                          <a:ea typeface="Pretendard" pitchFamily="34" charset="-122"/>
+                          <a:cs typeface="Pretendard" pitchFamily="34" charset="-120"/>
+                        </a:rPr>
+                        <a:t>문장 2</a:t>
+                      </a:r>
+                      <a:endParaRPr lang="en-US" sz="1400" dirty="0">
+                        <a:latin typeface="Pretendard" charset="0"/>
+                        <a:ea typeface="Pretendard" charset="0"/>
+                        <a:cs typeface="Pretendard" charset="0"/>
+                      </a:endParaRPr>
+                    </a:p>
+                  </a:txBody>
+                  <a:tcPr marL="73152" marR="73152" marT="45720" marB="45720" anchor="ctr">
+                    <a:lnL w="12700" cap="flat" cmpd="sng" algn="ctr">
+                      <a:solidFill>
+                        <a:srgbClr val="EDF0F6"/>
+                      </a:solidFill>
+                      <a:prstDash val="solid"/>
+                      <a:round/>
+                      <a:headEnd type="none" w="med" len="med"/>
+                      <a:tailEnd type="none" w="med" len="med"/>
+                    </a:lnL>
+                    <a:lnR w="12700" cap="flat" cmpd="sng" algn="ctr">
+                      <a:solidFill>
+                        <a:srgbClr val="EDF0F6"/>
+                      </a:solidFill>
+                      <a:prstDash val="solid"/>
+                      <a:round/>
+                      <a:headEnd type="none" w="med" len="med"/>
+                      <a:tailEnd type="none" w="med" len="med"/>
+                    </a:lnR>
+                    <a:lnT w="12700" cap="flat" cmpd="sng" algn="ctr">
+                      <a:solidFill>
+                        <a:srgbClr val="EDF0F6"/>
+                      </a:solidFill>
+                      <a:prstDash val="solid"/>
+                      <a:round/>
+                      <a:headEnd type="none" w="med" len="med"/>
+                      <a:tailEnd type="none" w="med" len="med"/>
+                    </a:lnT>
+                    <a:lnB w="12700" cap="flat" cmpd="sng" algn="ctr">
+                      <a:solidFill>
+                        <a:srgbClr val="EDF0F6"/>
+                      </a:solidFill>
+                      <a:prstDash val="solid"/>
+                      <a:round/>
+                      <a:headEnd type="none" w="med" len="med"/>
+                      <a:tailEnd type="none" w="med" len="med"/>
+                    </a:lnB>
+                    <a:solidFill>
+                      <a:srgbClr val="F5F8FC"/>
+                    </a:solidFill>
+                  </a:tcPr>
+                </a:tc>
+                <a:tc>
+                  <a:txBody>
+                    <a:bodyPr/>
+                    <a:lstStyle/>
+                    <a:p>
+                      <a:pPr indent="0" marL="0">
+                        <a:buNone/>
+                      </a:pPr>
+                      <a:r>
+                        <a:rPr lang="en-US" sz="1400" dirty="0">
+                          <a:solidFill>
+                            <a:srgbClr val="2B3242"/>
+                          </a:solidFill>
+                          <a:latin typeface="Pretendard" pitchFamily="34" charset="0"/>
+                          <a:ea typeface="Pretendard" pitchFamily="34" charset="-122"/>
+                          <a:cs typeface="Pretendard" pitchFamily="34" charset="-120"/>
+                        </a:rPr>
+                        <a:t>0.7084</a:t>
+                      </a:r>
+                      <a:endParaRPr lang="en-US" sz="1400" dirty="0">
+                        <a:latin typeface="Pretendard" charset="0"/>
+                        <a:ea typeface="Pretendard" charset="0"/>
+                        <a:cs typeface="Pretendard" charset="0"/>
+                      </a:endParaRPr>
+                    </a:p>
+                  </a:txBody>
+                  <a:tcPr marL="73152" marR="73152" marT="45720" marB="45720" anchor="ctr">
+                    <a:lnL w="12700" cap="flat" cmpd="sng" algn="ctr">
+                      <a:solidFill>
+                        <a:srgbClr val="EDF0F6"/>
+                      </a:solidFill>
+                      <a:prstDash val="solid"/>
+                      <a:round/>
+                      <a:headEnd type="none" w="med" len="med"/>
+                      <a:tailEnd type="none" w="med" len="med"/>
+                    </a:lnL>
+                    <a:lnR w="12700" cap="flat" cmpd="sng" algn="ctr">
+                      <a:solidFill>
+                        <a:srgbClr val="EDF0F6"/>
+                      </a:solidFill>
+                      <a:prstDash val="solid"/>
+                      <a:round/>
+                      <a:headEnd type="none" w="med" len="med"/>
+                      <a:tailEnd type="none" w="med" len="med"/>
+                    </a:lnR>
+                    <a:lnT w="12700" cap="flat" cmpd="sng" algn="ctr">
+                      <a:solidFill>
+                        <a:srgbClr val="EDF0F6"/>
+                      </a:solidFill>
+                      <a:prstDash val="solid"/>
+                      <a:round/>
+                      <a:headEnd type="none" w="med" len="med"/>
+                      <a:tailEnd type="none" w="med" len="med"/>
+                    </a:lnT>
+                    <a:lnB w="12700" cap="flat" cmpd="sng" algn="ctr">
+                      <a:solidFill>
+                        <a:srgbClr val="EDF0F6"/>
+                      </a:solidFill>
+                      <a:prstDash val="solid"/>
+                      <a:round/>
+                      <a:headEnd type="none" w="med" len="med"/>
+                      <a:tailEnd type="none" w="med" len="med"/>
+                    </a:lnB>
+                    <a:solidFill>
+                      <a:srgbClr val="F5F8FC"/>
+                    </a:solidFill>
+                  </a:tcPr>
+                </a:tc>
+                <a:tc>
+                  <a:txBody>
+                    <a:bodyPr/>
+                    <a:lstStyle/>
+                    <a:p>
+                      <a:pPr indent="0" marL="0">
+                        <a:buNone/>
+                      </a:pPr>
+                      <a:r>
+                        <a:rPr lang="en-US" sz="1400" dirty="0">
+                          <a:solidFill>
+                            <a:srgbClr val="2B3242"/>
+                          </a:solidFill>
+                          <a:latin typeface="Pretendard" pitchFamily="34" charset="0"/>
+                          <a:ea typeface="Pretendard" pitchFamily="34" charset="-122"/>
+                          <a:cs typeface="Pretendard" pitchFamily="34" charset="-120"/>
+                        </a:rPr>
+                        <a:t>0.8249</a:t>
+                      </a:r>
+                      <a:endParaRPr lang="en-US" sz="1400" dirty="0">
+                        <a:latin typeface="Pretendard" charset="0"/>
+                        <a:ea typeface="Pretendard" charset="0"/>
+                        <a:cs typeface="Pretendard" charset="0"/>
+                      </a:endParaRPr>
+                    </a:p>
+                  </a:txBody>
+                  <a:tcPr marL="73152" marR="73152" marT="45720" marB="45720" anchor="ctr">
+                    <a:lnL w="12700" cap="flat" cmpd="sng" algn="ctr">
+                      <a:solidFill>
+                        <a:srgbClr val="EDF0F6"/>
+                      </a:solidFill>
+                      <a:prstDash val="solid"/>
+                      <a:round/>
+                      <a:headEnd type="none" w="med" len="med"/>
+                      <a:tailEnd type="none" w="med" len="med"/>
+                    </a:lnL>
+                    <a:lnR w="12700" cap="flat" cmpd="sng" algn="ctr">
+                      <a:solidFill>
+                        <a:srgbClr val="EDF0F6"/>
+                      </a:solidFill>
+                      <a:prstDash val="solid"/>
+                      <a:round/>
+                      <a:headEnd type="none" w="med" len="med"/>
+                      <a:tailEnd type="none" w="med" len="med"/>
+                    </a:lnR>
+                    <a:lnT w="12700" cap="flat" cmpd="sng" algn="ctr">
+                      <a:solidFill>
+                        <a:srgbClr val="EDF0F6"/>
+                      </a:solidFill>
+                      <a:prstDash val="solid"/>
+                      <a:round/>
+                      <a:headEnd type="none" w="med" len="med"/>
+                      <a:tailEnd type="none" w="med" len="med"/>
+                    </a:lnT>
+                    <a:lnB w="12700" cap="flat" cmpd="sng" algn="ctr">
+                      <a:solidFill>
+                        <a:srgbClr val="EDF0F6"/>
+                      </a:solidFill>
+                      <a:prstDash val="solid"/>
+                      <a:round/>
+                      <a:headEnd type="none" w="med" len="med"/>
+                      <a:tailEnd type="none" w="med" len="med"/>
+                    </a:lnB>
+                    <a:solidFill>
+                      <a:srgbClr val="F5F8FC"/>
+                    </a:solidFill>
+                  </a:tcPr>
+                </a:tc>
+              </a:tr>
+              <a:tr h="457200">
+                <a:tc>
+                  <a:txBody>
+                    <a:bodyPr/>
+                    <a:lstStyle/>
+                    <a:p>
+                      <a:pPr indent="0" marL="0">
+                        <a:buNone/>
+                      </a:pPr>
+                      <a:r>
+                        <a:rPr lang="en-US" sz="1400" b="1" dirty="0">
+                          <a:solidFill>
+                            <a:srgbClr val="1E2A5C"/>
+                          </a:solidFill>
+                          <a:latin typeface="Pretendard" pitchFamily="34" charset="0"/>
+                          <a:ea typeface="Pretendard" pitchFamily="34" charset="-122"/>
+                          <a:cs typeface="Pretendard" pitchFamily="34" charset="-120"/>
+                        </a:rPr>
+                        <a:t>문장 3</a:t>
+                      </a:r>
+                      <a:endParaRPr lang="en-US" sz="1400" dirty="0">
+                        <a:latin typeface="Pretendard" charset="0"/>
+                        <a:ea typeface="Pretendard" charset="0"/>
+                        <a:cs typeface="Pretendard" charset="0"/>
+                      </a:endParaRPr>
+                    </a:p>
+                  </a:txBody>
+                  <a:tcPr marL="73152" marR="73152" marT="45720" marB="45720" anchor="ctr">
+                    <a:lnL w="12700" cap="flat" cmpd="sng" algn="ctr">
+                      <a:solidFill>
+                        <a:srgbClr val="EDF0F6"/>
+                      </a:solidFill>
+                      <a:prstDash val="solid"/>
+                      <a:round/>
+                      <a:headEnd type="none" w="med" len="med"/>
+                      <a:tailEnd type="none" w="med" len="med"/>
+                    </a:lnL>
+                    <a:lnR w="12700" cap="flat" cmpd="sng" algn="ctr">
+                      <a:solidFill>
+                        <a:srgbClr val="EDF0F6"/>
+                      </a:solidFill>
+                      <a:prstDash val="solid"/>
+                      <a:round/>
+                      <a:headEnd type="none" w="med" len="med"/>
+                      <a:tailEnd type="none" w="med" len="med"/>
+                    </a:lnR>
+                    <a:lnT w="12700" cap="flat" cmpd="sng" algn="ctr">
+                      <a:solidFill>
+                        <a:srgbClr val="EDF0F6"/>
+                      </a:solidFill>
+                      <a:prstDash val="solid"/>
+                      <a:round/>
+                      <a:headEnd type="none" w="med" len="med"/>
+                      <a:tailEnd type="none" w="med" len="med"/>
+                    </a:lnT>
+                    <a:lnB w="12700" cap="flat" cmpd="sng" algn="ctr">
+                      <a:solidFill>
+                        <a:srgbClr val="EDF0F6"/>
+                      </a:solidFill>
+                      <a:prstDash val="solid"/>
+                      <a:round/>
+                      <a:headEnd type="none" w="med" len="med"/>
+                      <a:tailEnd type="none" w="med" len="med"/>
+                    </a:lnB>
+                    <a:solidFill>
+                      <a:srgbClr val="FFFFFF"/>
+                    </a:solidFill>
+                  </a:tcPr>
+                </a:tc>
+                <a:tc>
+                  <a:txBody>
+                    <a:bodyPr/>
+                    <a:lstStyle/>
+                    <a:p>
+                      <a:pPr indent="0" marL="0">
+                        <a:buNone/>
+                      </a:pPr>
+                      <a:r>
+                        <a:rPr lang="en-US" sz="1400" dirty="0">
+                          <a:solidFill>
+                            <a:srgbClr val="2B3242"/>
+                          </a:solidFill>
+                          <a:latin typeface="Pretendard" pitchFamily="34" charset="0"/>
+                          <a:ea typeface="Pretendard" pitchFamily="34" charset="-122"/>
+                          <a:cs typeface="Pretendard" pitchFamily="34" charset="-120"/>
+                        </a:rPr>
+                        <a:t>0.7535</a:t>
+                      </a:r>
+                      <a:endParaRPr lang="en-US" sz="1400" dirty="0">
+                        <a:latin typeface="Pretendard" charset="0"/>
+                        <a:ea typeface="Pretendard" charset="0"/>
+                        <a:cs typeface="Pretendard" charset="0"/>
+                      </a:endParaRPr>
+                    </a:p>
+                  </a:txBody>
+                  <a:tcPr marL="73152" marR="73152" marT="45720" marB="45720" anchor="ctr">
+                    <a:lnL w="12700" cap="flat" cmpd="sng" algn="ctr">
+                      <a:solidFill>
+                        <a:srgbClr val="EDF0F6"/>
+                      </a:solidFill>
+                      <a:prstDash val="solid"/>
+                      <a:round/>
+                      <a:headEnd type="none" w="med" len="med"/>
+                      <a:tailEnd type="none" w="med" len="med"/>
+                    </a:lnL>
+                    <a:lnR w="12700" cap="flat" cmpd="sng" algn="ctr">
+                      <a:solidFill>
+                        <a:srgbClr val="EDF0F6"/>
+                      </a:solidFill>
+                      <a:prstDash val="solid"/>
+                      <a:round/>
+                      <a:headEnd type="none" w="med" len="med"/>
+                      <a:tailEnd type="none" w="med" len="med"/>
+                    </a:lnR>
+                    <a:lnT w="12700" cap="flat" cmpd="sng" algn="ctr">
+                      <a:solidFill>
+                        <a:srgbClr val="EDF0F6"/>
+                      </a:solidFill>
+                      <a:prstDash val="solid"/>
+                      <a:round/>
+                      <a:headEnd type="none" w="med" len="med"/>
+                      <a:tailEnd type="none" w="med" len="med"/>
+                    </a:lnT>
+                    <a:lnB w="12700" cap="flat" cmpd="sng" algn="ctr">
+                      <a:solidFill>
+                        <a:srgbClr val="EDF0F6"/>
+                      </a:solidFill>
+                      <a:prstDash val="solid"/>
+                      <a:round/>
+                      <a:headEnd type="none" w="med" len="med"/>
+                      <a:tailEnd type="none" w="med" len="med"/>
+                    </a:lnB>
+                    <a:solidFill>
+                      <a:srgbClr val="FFFFFF"/>
+                    </a:solidFill>
+                  </a:tcPr>
+                </a:tc>
+                <a:tc>
+                  <a:txBody>
+                    <a:bodyPr/>
+                    <a:lstStyle/>
+                    <a:p>
+                      <a:pPr indent="0" marL="0">
+                        <a:buNone/>
+                      </a:pPr>
+                      <a:r>
+                        <a:rPr lang="en-US" sz="1400" dirty="0">
+                          <a:solidFill>
+                            <a:srgbClr val="2B3242"/>
+                          </a:solidFill>
+                          <a:latin typeface="Pretendard" pitchFamily="34" charset="0"/>
+                          <a:ea typeface="Pretendard" pitchFamily="34" charset="-122"/>
+                          <a:cs typeface="Pretendard" pitchFamily="34" charset="-120"/>
+                        </a:rPr>
+                        <a:t>0.8498</a:t>
+                      </a:r>
+                      <a:endParaRPr lang="en-US" sz="1400" dirty="0">
+                        <a:latin typeface="Pretendard" charset="0"/>
+                        <a:ea typeface="Pretendard" charset="0"/>
+                        <a:cs typeface="Pretendard" charset="0"/>
+                      </a:endParaRPr>
+                    </a:p>
+                  </a:txBody>
+                  <a:tcPr marL="73152" marR="73152" marT="45720" marB="45720" anchor="ctr">
+                    <a:lnL w="12700" cap="flat" cmpd="sng" algn="ctr">
+                      <a:solidFill>
+                        <a:srgbClr val="EDF0F6"/>
+                      </a:solidFill>
+                      <a:prstDash val="solid"/>
+                      <a:round/>
+                      <a:headEnd type="none" w="med" len="med"/>
+                      <a:tailEnd type="none" w="med" len="med"/>
+                    </a:lnL>
+                    <a:lnR w="12700" cap="flat" cmpd="sng" algn="ctr">
+                      <a:solidFill>
+                        <a:srgbClr val="EDF0F6"/>
+                      </a:solidFill>
+                      <a:prstDash val="solid"/>
+                      <a:round/>
+                      <a:headEnd type="none" w="med" len="med"/>
+                      <a:tailEnd type="none" w="med" len="med"/>
+                    </a:lnR>
+                    <a:lnT w="12700" cap="flat" cmpd="sng" algn="ctr">
+                      <a:solidFill>
+                        <a:srgbClr val="EDF0F6"/>
+                      </a:solidFill>
+                      <a:prstDash val="solid"/>
+                      <a:round/>
+                      <a:headEnd type="none" w="med" len="med"/>
+                      <a:tailEnd type="none" w="med" len="med"/>
+                    </a:lnT>
+                    <a:lnB w="12700" cap="flat" cmpd="sng" algn="ctr">
+                      <a:solidFill>
+                        <a:srgbClr val="EDF0F6"/>
+                      </a:solidFill>
+                      <a:prstDash val="solid"/>
+                      <a:round/>
+                      <a:headEnd type="none" w="med" len="med"/>
+                      <a:tailEnd type="none" w="med" len="med"/>
+                    </a:lnB>
+                    <a:solidFill>
+                      <a:srgbClr val="FFFFFF"/>
+                    </a:solidFill>
+                  </a:tcPr>
+                </a:tc>
+              </a:tr>
+            </a:tbl>
+          </a:graphicData>
+        </a:graphic>
+      </p:graphicFrame>
+      <p:sp>
+        <p:nvSpPr>
+          <p:cNvPr id="91" name="Text 88"/>
+          <p:cNvSpPr txBox="1"/>
+          <p:nvPr/>
+        </p:nvSpPr>
+        <p:spPr>
+          <a:xfrm>
+            <a:off x="10339121" y="5989320"/>
+            <a:ext cx="3794760" cy="274320"/>
+          </a:xfrm>
+          <a:prstGeom prst="rect">
+            <a:avLst/>
+          </a:prstGeom>
+          <a:noFill/>
+          <a:ln/>
+        </p:spPr>
+        <p:txBody>
+          <a:bodyPr wrap="square" lIns="0" tIns="0" rIns="0" bIns="0" rtlCol="0" anchor="ctr"/>
+          <a:lstStyle/>
+          <a:p>
+            <a:pPr algn="l" indent="0" marL="0">
+              <a:buNone/>
+            </a:pPr>
+            <a:r>
+              <a:rPr lang="en-US" sz="1400" dirty="0">
+                <a:solidFill>
+                  <a:srgbClr val="4A5364"/>
+                </a:solidFill>
+                <a:latin typeface="Pretendard" pitchFamily="34" charset="0"/>
+                <a:ea typeface="Pretendard" pitchFamily="34" charset="-122"/>
+                <a:cs typeface="Pretendard" pitchFamily="34" charset="-120"/>
+              </a:rPr>
+              <a:t>"Berlin"과의 코사인 유사도 (Jina 논문 표 1)</a:t>
+            </a:r>
+            <a:endParaRPr lang="en-US" sz="1400" dirty="0"/>
+          </a:p>
+        </p:txBody>
+      </p:sp>
+      <p:sp>
+        <p:nvSpPr>
+          <p:cNvPr id="92" name="Shape 89"/>
+          <p:cNvSpPr/>
+          <p:nvPr/>
+        </p:nvSpPr>
+        <p:spPr>
+          <a:xfrm>
+            <a:off x="509321" y="6355080"/>
+            <a:ext cx="64008" cy="365760"/>
+          </a:xfrm>
+          <a:prstGeom prst="rect">
+            <a:avLst/>
+          </a:prstGeom>
+          <a:solidFill>
+            <a:srgbClr val="2E74C6"/>
+          </a:solidFill>
+          <a:ln/>
+        </p:spPr>
+      </p:sp>
+      <p:sp>
+        <p:nvSpPr>
+          <p:cNvPr id="93" name="Text 90"/>
+          <p:cNvSpPr txBox="1"/>
+          <p:nvPr/>
+        </p:nvSpPr>
+        <p:spPr>
+          <a:xfrm>
+            <a:off x="692201" y="6355080"/>
+            <a:ext cx="10920679" cy="365760"/>
+          </a:xfrm>
+          <a:prstGeom prst="rect">
+            <a:avLst/>
+          </a:prstGeom>
+          <a:noFill/>
+          <a:ln/>
+        </p:spPr>
+        <p:txBody>
+          <a:bodyPr wrap="square" lIns="0" tIns="0" rIns="0" bIns="0" rtlCol="0" anchor="ctr"/>
+          <a:lstStyle/>
+          <a:p>
+            <a:pPr indent="0" marL="0">
+              <a:buNone/>
+            </a:pPr>
+            <a:r>
+              <a:rPr lang="en-US" sz="1600" b="1" i="1" dirty="0">
+                <a:solidFill>
+                  <a:srgbClr val="1E2A5C"/>
+                </a:solidFill>
+                <a:latin typeface="Pretendard" pitchFamily="34" charset="0"/>
+                <a:ea typeface="Pretendard" pitchFamily="34" charset="-122"/>
+                <a:cs typeface="Pretendard" pitchFamily="34" charset="-120"/>
+              </a:rPr>
+              <a:t>경계는 같고, 모델을 자르기 전에 통과시키느냐 뒤에 통과시키느냐가 다릅니다. 모델 한도(예: 8192토큰)를 넘는 문서는 나눠 처리합니다.</a:t>
+            </a:r>
+            <a:endParaRPr lang="en-US" sz="1600" dirty="0"/>
+          </a:p>
+        </p:txBody>
+      </p:sp>
+      <p:sp>
+        <p:nvSpPr>
+          <p:cNvPr id="94" name="Shape 91"/>
+          <p:cNvSpPr/>
+          <p:nvPr/>
+        </p:nvSpPr>
+        <p:spPr>
+          <a:xfrm>
+            <a:off x="11795760" y="6812280"/>
+            <a:ext cx="2331720" cy="365760"/>
+          </a:xfrm>
+          <a:prstGeom prst="roundRect">
+            <a:avLst>
+              <a:gd name="adj" fmla="val 50000"/>
+            </a:avLst>
+          </a:prstGeom>
+          <a:solidFill>
+            <a:srgbClr val="EEF3FA"/>
+          </a:solidFill>
+          <a:ln w="12700">
+            <a:solidFill>
+              <a:srgbClr val="C3CEE0"/>
+            </a:solidFill>
+            <a:prstDash val="solid"/>
+          </a:ln>
+        </p:spPr>
+      </p:sp>
+      <p:sp>
+        <p:nvSpPr>
+          <p:cNvPr id="95" name="Text 92">
+            <a:hlinkClick r:id="rId1" tooltip=""/>
+          </p:cNvPr>
+          <p:cNvSpPr/>
+          <p:nvPr/>
+        </p:nvSpPr>
+        <p:spPr>
+          <a:xfrm>
+            <a:off x="11795760" y="6812280"/>
+            <a:ext cx="2331720" cy="365760"/>
+          </a:xfrm>
+          <a:prstGeom prst="rect">
+            <a:avLst/>
+          </a:prstGeom>
+          <a:noFill/>
+          <a:ln/>
+        </p:spPr>
+        <p:txBody>
+          <a:bodyPr wrap="square" lIns="0" tIns="0" rIns="0" bIns="0" rtlCol="0" anchor="ctr"/>
+          <a:lstStyle/>
+          <a:p>
+            <a:pPr algn="ctr" indent="0" marL="0">
+              <a:buNone/>
+            </a:pPr>
+            <a:r>
+              <a:rPr lang="en-US" sz="1400" b="1" u="sng" dirty="0">
+                <a:solidFill>
+                  <a:srgbClr val="1E2A5C"/>
+                </a:solidFill>
+                <a:latin typeface="Pretendard" pitchFamily="34" charset="0"/>
+                <a:ea typeface="Pretendard" pitchFamily="34" charset="-122"/>
+                <a:cs typeface="Pretendard" pitchFamily="34" charset="-120"/>
+                <a:hlinkClick r:id="rId1" invalidUrl="" action="" tgtFrame="" tooltip="" history="1" highlightClick="0" endSnd="0">
+                  <a:extLst>
+                    <a:ext uri="{A12FA001-AC4F-418D-AE19-62706E023703}">
+                      <ahyp:hlinkClr xmlns:ahyp="http://schemas.microsoft.com/office/drawing/2018/hyperlinkcolor" val="tx"/>
+                    </a:ext>
+                  </a:extLst>
+                </a:hlinkClick>
+              </a:rPr>
+              <a:t>상세 보기 →</a:t>
+            </a:r>
+            <a:endParaRPr lang="en-US" sz="1400" dirty="0"/>
+          </a:p>
+        </p:txBody>
+      </p:sp>
+      <p:sp>
+        <p:nvSpPr>
+          <p:cNvPr id="96" name="Shape 93"/>
+          <p:cNvSpPr/>
+          <p:nvPr/>
+        </p:nvSpPr>
+        <p:spPr>
+          <a:xfrm>
+            <a:off x="509321" y="7388352"/>
+            <a:ext cx="13624560" cy="0"/>
+          </a:xfrm>
+          <a:prstGeom prst="line">
+            <a:avLst/>
+          </a:prstGeom>
+          <a:noFill/>
+          <a:ln w="12700">
+            <a:solidFill>
+              <a:srgbClr val="E9ECF3"/>
+            </a:solidFill>
+            <a:prstDash val="solid"/>
+          </a:ln>
+        </p:spPr>
+      </p:sp>
+      <p:sp>
+        <p:nvSpPr>
+          <p:cNvPr id="97" name="Text 94"/>
+          <p:cNvSpPr txBox="1"/>
+          <p:nvPr/>
+        </p:nvSpPr>
+        <p:spPr>
+          <a:xfrm>
+            <a:off x="509321" y="7443216"/>
+            <a:ext cx="13624560" cy="384048"/>
+          </a:xfrm>
+          <a:prstGeom prst="rect">
+            <a:avLst/>
+          </a:prstGeom>
+          <a:noFill/>
+          <a:ln/>
+        </p:spPr>
+        <p:txBody>
+          <a:bodyPr wrap="square" lIns="0" tIns="0" rIns="0" bIns="0" rtlCol="0" anchor="t"/>
+          <a:lstStyle/>
+          <a:p>
+            <a:pPr indent="0" marL="0">
+              <a:buNone/>
+            </a:pPr>
+            <a:r>
+              <a:rPr lang="en-US" sz="1400" dirty="0">
+                <a:solidFill>
+                  <a:srgbClr val="7C8598"/>
+                </a:solidFill>
+                <a:latin typeface="Pretendard" pitchFamily="34" charset="0"/>
+                <a:ea typeface="Pretendard" pitchFamily="34" charset="-122"/>
+                <a:cs typeface="Pretendard" pitchFamily="34" charset="-120"/>
+              </a:rPr>
+              <a:t>출처: Günther 외, Late Chunking (arXiv 2409.04701 v3) 표 1과 알고리즘 1. Jina AI 블로그 2편(2024-10-03)</a:t>
+            </a:r>
+            <a:endParaRPr lang="en-US" sz="1400" dirty="0"/>
+          </a:p>
+        </p:txBody>
+      </p:sp>
+      <p:sp>
+        <p:nvSpPr>
+          <p:cNvPr id="25" name="Slide Number Placeholder 0"/>
+          <p:cNvSpPr>
+            <a:spLocks noGrp="1"/>
+          </p:cNvSpPr>
+          <p:nvPr>
+            <p:ph type="sldNum" idx="4"/>
+          </p:nvPr>
+        </p:nvSpPr>
+        <p:spPr>
+          <a:xfrm>
+            <a:off x="10893247" y="7787945"/>
+            <a:ext cx="3291840" cy="228600"/>
+          </a:xfrm>
+          <a:prstGeom prst="rect">
+            <a:avLst/>
+          </a:prstGeom>
+          <a:extLst>
+            <a:ext uri="{C572A759-6A51-4108-AA02-DFA0A04FC94B}">
+              <ma14:wrappingTextBoxFlag xmlns:ma14="http://schemas.microsoft.com/office/mac/drawingml/2011/main" val="0"/>
+            </a:ext>
+          </a:extLst>
+        </p:spPr>
+        <p:txBody>
+          <a:bodyPr/>
+          <a:lstStyle>
+            <a:lvl1pPr>
+              <a:defRPr sz="1600">
+                <a:solidFill>
+                  <a:srgbClr val="6B6B7B"/>
+                </a:solidFill>
+                <a:latin typeface="Pretendard"/>
+                <a:ea typeface="Pretendard"/>
+                <a:cs typeface="Pretendard"/>
+              </a:defRPr>
+            </a:lvl1pPr>
+          </a:lstStyle>
+          <a:p>
+            <a:pPr algn="r"/>
+            <a:fld id="{F7021451-1387-4CA6-816F-3879F97B5CBC}" type="slidenum">
+              <a:rPr b="0" lang="en-US"/>
+              <a:t>2</a:t>
             </a:fld>
             <a:endParaRPr lang="en-US"/>
           </a:p>

--- a/research/rag/late-chunking.pptx
+++ b/research/rag/late-chunking.pptx
@@ -608,6 +608,7 @@
 전제: 토큰별 벡터를 내주는 모델이어야 하고(Cohere embed API처럼 최종 벡터 하나만 주는 API는 불가), 문서 전체를 담을 긴 문맥 모델이어야 합니다. 모델 한도(jina-embeddings-v3는 8192토큰)를 넘는 문서는 큰 창으로 나눠 통과시키고 창끼리 512토큰을 겹쳐 문맥을 보충합니다(논문 v3의 long late chunking).
 토큰 9개는 설명을 위한 단순화입니다. 실제로는 청크 하나가 수십에서 수백 토큰입니다. 글자 경계를 토큰 구간으로 바꿀 때는 tokenizer의 offset mapping을 씁니다.
 오른쪽 표: 논문 표 1의 값으로, jina-embeddings-v2-small에서 각 문장 임베딩과 "Berlin" 임베딩의 코사인 유사도입니다. 베를린이라는 단어가 없는 문장 2가 0.7084에서 0.8249로 가장 크게 올랐습니다.
+아래 띠(평균 풀링): 임베딩 모델은 토큰마다 벡터를 하나씩 만들고, 벡터DB에는 청크당 벡터 1개를 저장하므로 이를 하나로 합쳐야 합니다. 가장 흔한 방법이 평균 풀링으로, 같은 자리끼리 더해 개수로 나눕니다. 예시에서 첫째 자리는 (0.2 + 0.4 + 0.6) ÷ 3 = 0.4, 둘째 자리는 (0.9 + 0.5 + 0.1) ÷ 3 = 0.5입니다. 실제 벡터는 2칸이 아니라 수백에서 수천 칸입니다. 실습의 Cohere API는 이 단계를 서버 안에서 끝내고 결과 벡터만 돌려주기 때문에 실습 코드에는 드러나지 않습니다. Late Chunking은 이 단계를 사용자가 직접 하되, 문서 전체를 본 토큰 벡터를 청크 구간별로 평균한다는 점만 다릅니다.
 상세 문서: https://github.com/unicorn-campus/hybrid-ai/blob/main/research/rag/late-chunking.md#3-원리와-처리-절차</a:t>
             </a:r>
             <a:endParaRPr lang="en-US" dirty="0"/>
@@ -5923,7 +5924,7 @@
                 <a:ea typeface="Pretendard" pitchFamily="34" charset="-122"/>
                 <a:cs typeface="Pretendard" pitchFamily="34" charset="-120"/>
               </a:rPr>
-              <a:t>구간별 평균</a:t>
+              <a:t>구간별 토큰 평균</a:t>
             </a:r>
             <a:endParaRPr lang="en-US" sz="1400" dirty="0"/>
           </a:p>
@@ -7146,18 +7147,241 @@
       </p:sp>
       <p:sp>
         <p:nvSpPr>
-          <p:cNvPr id="92" name="Shape 89"/>
-          <p:cNvSpPr/>
-          <p:nvPr/>
-        </p:nvSpPr>
-        <p:spPr>
-          <a:xfrm>
-            <a:off x="509321" y="6355080"/>
-            <a:ext cx="64008" cy="365760"/>
+          <p:cNvPr id="92" name="Text 89"/>
+          <p:cNvSpPr/>
+          <p:nvPr/>
+        </p:nvSpPr>
+        <p:spPr>
+          <a:xfrm>
+            <a:off x="509321" y="6336792"/>
+            <a:ext cx="2331720" cy="393192"/>
+          </a:xfrm>
+          <a:prstGeom prst="roundRect">
+            <a:avLst>
+              <a:gd name="adj" fmla="val 18605"/>
+            </a:avLst>
+          </a:prstGeom>
+          <a:solidFill>
+            <a:srgbClr val="404155"/>
+          </a:solidFill>
+          <a:ln/>
+        </p:spPr>
+        <p:txBody>
+          <a:bodyPr wrap="square" lIns="50800" tIns="50800" rIns="50800" bIns="50800" rtlCol="0" anchor="ctr"/>
+          <a:lstStyle/>
+          <a:p>
+            <a:pPr algn="ctr" indent="0" marL="0">
+              <a:buNone/>
+            </a:pPr>
+            <a:r>
+              <a:rPr lang="en-US" sz="1400" b="1" dirty="0">
+                <a:solidFill>
+                  <a:srgbClr val="FFFFFF"/>
+                </a:solidFill>
+                <a:latin typeface="Pretendard" pitchFamily="34" charset="0"/>
+                <a:ea typeface="Pretendard" pitchFamily="34" charset="-122"/>
+                <a:cs typeface="Pretendard" pitchFamily="34" charset="-120"/>
+              </a:rPr>
+              <a:t>평균 풀링(토큰 평균)이란?</a:t>
+            </a:r>
+            <a:endParaRPr lang="en-US" sz="1400" dirty="0"/>
+          </a:p>
+        </p:txBody>
+      </p:sp>
+      <p:sp>
+        <p:nvSpPr>
+          <p:cNvPr id="93" name="Text 90"/>
+          <p:cNvSpPr txBox="1"/>
+          <p:nvPr/>
+        </p:nvSpPr>
+        <p:spPr>
+          <a:xfrm>
+            <a:off x="2950769" y="6336792"/>
+            <a:ext cx="868680" cy="393192"/>
           </a:xfrm>
           <a:prstGeom prst="rect">
             <a:avLst/>
           </a:prstGeom>
+          <a:noFill/>
+          <a:ln/>
+        </p:spPr>
+        <p:txBody>
+          <a:bodyPr wrap="square" lIns="0" tIns="0" rIns="0" bIns="0" rtlCol="0" anchor="ctr"/>
+          <a:lstStyle/>
+          <a:p>
+            <a:pPr algn="l" indent="0" marL="0">
+              <a:buNone/>
+            </a:pPr>
+            <a:r>
+              <a:rPr lang="en-US" sz="1400" b="1" dirty="0">
+                <a:solidFill>
+                  <a:srgbClr val="1E2A5C"/>
+                </a:solidFill>
+                <a:latin typeface="Pretendard" pitchFamily="34" charset="0"/>
+                <a:ea typeface="Pretendard" pitchFamily="34" charset="-122"/>
+                <a:cs typeface="Pretendard" pitchFamily="34" charset="-120"/>
+              </a:rPr>
+              <a:t>토큰 벡터</a:t>
+            </a:r>
+            <a:endParaRPr lang="en-US" sz="1400" dirty="0"/>
+          </a:p>
+        </p:txBody>
+      </p:sp>
+      <p:sp>
+        <p:nvSpPr>
+          <p:cNvPr id="94" name="Text 91"/>
+          <p:cNvSpPr/>
+          <p:nvPr/>
+        </p:nvSpPr>
+        <p:spPr>
+          <a:xfrm>
+            <a:off x="3865169" y="6336792"/>
+            <a:ext cx="914400" cy="393192"/>
+          </a:xfrm>
+          <a:prstGeom prst="roundRect">
+            <a:avLst>
+              <a:gd name="adj" fmla="val 18605"/>
+            </a:avLst>
+          </a:prstGeom>
+          <a:solidFill>
+            <a:srgbClr val="EEF3FA"/>
+          </a:solidFill>
+          <a:ln w="12700">
+            <a:solidFill>
+              <a:srgbClr val="D9E0EC"/>
+            </a:solidFill>
+          </a:ln>
+        </p:spPr>
+        <p:txBody>
+          <a:bodyPr wrap="square" lIns="50800" tIns="50800" rIns="50800" bIns="50800" rtlCol="0" anchor="ctr"/>
+          <a:lstStyle/>
+          <a:p>
+            <a:pPr algn="ctr" indent="0" marL="0">
+              <a:buNone/>
+            </a:pPr>
+            <a:r>
+              <a:rPr lang="en-US" sz="1400" dirty="0">
+                <a:solidFill>
+                  <a:srgbClr val="2B3242"/>
+                </a:solidFill>
+                <a:latin typeface="Pretendard" pitchFamily="34" charset="0"/>
+                <a:ea typeface="Pretendard" pitchFamily="34" charset="-122"/>
+                <a:cs typeface="Pretendard" pitchFamily="34" charset="-120"/>
+              </a:rPr>
+              <a:t>[0.2, 0.9]</a:t>
+            </a:r>
+            <a:endParaRPr lang="en-US" sz="1400" dirty="0"/>
+          </a:p>
+        </p:txBody>
+      </p:sp>
+      <p:sp>
+        <p:nvSpPr>
+          <p:cNvPr id="95" name="Text 92"/>
+          <p:cNvSpPr/>
+          <p:nvPr/>
+        </p:nvSpPr>
+        <p:spPr>
+          <a:xfrm>
+            <a:off x="4834433" y="6336792"/>
+            <a:ext cx="914400" cy="393192"/>
+          </a:xfrm>
+          <a:prstGeom prst="roundRect">
+            <a:avLst>
+              <a:gd name="adj" fmla="val 18605"/>
+            </a:avLst>
+          </a:prstGeom>
+          <a:solidFill>
+            <a:srgbClr val="EEF3FA"/>
+          </a:solidFill>
+          <a:ln w="12700">
+            <a:solidFill>
+              <a:srgbClr val="D9E0EC"/>
+            </a:solidFill>
+          </a:ln>
+        </p:spPr>
+        <p:txBody>
+          <a:bodyPr wrap="square" lIns="50800" tIns="50800" rIns="50800" bIns="50800" rtlCol="0" anchor="ctr"/>
+          <a:lstStyle/>
+          <a:p>
+            <a:pPr algn="ctr" indent="0" marL="0">
+              <a:buNone/>
+            </a:pPr>
+            <a:r>
+              <a:rPr lang="en-US" sz="1400" dirty="0">
+                <a:solidFill>
+                  <a:srgbClr val="2B3242"/>
+                </a:solidFill>
+                <a:latin typeface="Pretendard" pitchFamily="34" charset="0"/>
+                <a:ea typeface="Pretendard" pitchFamily="34" charset="-122"/>
+                <a:cs typeface="Pretendard" pitchFamily="34" charset="-120"/>
+              </a:rPr>
+              <a:t>[0.4, 0.5]</a:t>
+            </a:r>
+            <a:endParaRPr lang="en-US" sz="1400" dirty="0"/>
+          </a:p>
+        </p:txBody>
+      </p:sp>
+      <p:sp>
+        <p:nvSpPr>
+          <p:cNvPr id="96" name="Text 93"/>
+          <p:cNvSpPr/>
+          <p:nvPr/>
+        </p:nvSpPr>
+        <p:spPr>
+          <a:xfrm>
+            <a:off x="5803697" y="6336792"/>
+            <a:ext cx="914400" cy="393192"/>
+          </a:xfrm>
+          <a:prstGeom prst="roundRect">
+            <a:avLst>
+              <a:gd name="adj" fmla="val 18605"/>
+            </a:avLst>
+          </a:prstGeom>
+          <a:solidFill>
+            <a:srgbClr val="EEF3FA"/>
+          </a:solidFill>
+          <a:ln w="12700">
+            <a:solidFill>
+              <a:srgbClr val="D9E0EC"/>
+            </a:solidFill>
+          </a:ln>
+        </p:spPr>
+        <p:txBody>
+          <a:bodyPr wrap="square" lIns="50800" tIns="50800" rIns="50800" bIns="50800" rtlCol="0" anchor="ctr"/>
+          <a:lstStyle/>
+          <a:p>
+            <a:pPr algn="ctr" indent="0" marL="0">
+              <a:buNone/>
+            </a:pPr>
+            <a:r>
+              <a:rPr lang="en-US" sz="1400" dirty="0">
+                <a:solidFill>
+                  <a:srgbClr val="2B3242"/>
+                </a:solidFill>
+                <a:latin typeface="Pretendard" pitchFamily="34" charset="0"/>
+                <a:ea typeface="Pretendard" pitchFamily="34" charset="-122"/>
+                <a:cs typeface="Pretendard" pitchFamily="34" charset="-120"/>
+              </a:rPr>
+              <a:t>[0.6, 0.1]</a:t>
+            </a:r>
+            <a:endParaRPr lang="en-US" sz="1400" dirty="0"/>
+          </a:p>
+        </p:txBody>
+      </p:sp>
+      <p:sp>
+        <p:nvSpPr>
+          <p:cNvPr id="97" name="Shape 94"/>
+          <p:cNvSpPr/>
+          <p:nvPr/>
+        </p:nvSpPr>
+        <p:spPr>
+          <a:xfrm>
+            <a:off x="6809537" y="6396228"/>
+            <a:ext cx="274320" cy="274320"/>
+          </a:xfrm>
+          <a:prstGeom prst="rightArrow">
+            <a:avLst/>
+          </a:prstGeom>
           <a:solidFill>
             <a:srgbClr val="2E74C6"/>
           </a:solidFill>
@@ -7166,13 +7390,174 @@
       </p:sp>
       <p:sp>
         <p:nvSpPr>
-          <p:cNvPr id="93" name="Text 90"/>
+          <p:cNvPr id="98" name="Text 95"/>
           <p:cNvSpPr txBox="1"/>
           <p:nvPr/>
         </p:nvSpPr>
         <p:spPr>
           <a:xfrm>
-            <a:off x="692201" y="6355080"/>
+            <a:off x="7175297" y="6336792"/>
+            <a:ext cx="1554480" cy="393192"/>
+          </a:xfrm>
+          <a:prstGeom prst="rect">
+            <a:avLst/>
+          </a:prstGeom>
+          <a:noFill/>
+          <a:ln/>
+        </p:spPr>
+        <p:txBody>
+          <a:bodyPr wrap="square" lIns="0" tIns="0" rIns="0" bIns="0" rtlCol="0" anchor="ctr"/>
+          <a:lstStyle/>
+          <a:p>
+            <a:pPr algn="ctr" indent="0" marL="0">
+              <a:buNone/>
+            </a:pPr>
+            <a:r>
+              <a:rPr lang="en-US" sz="1400" dirty="0">
+                <a:solidFill>
+                  <a:srgbClr val="4A5364"/>
+                </a:solidFill>
+                <a:latin typeface="Pretendard" pitchFamily="34" charset="0"/>
+                <a:ea typeface="Pretendard" pitchFamily="34" charset="-122"/>
+                <a:cs typeface="Pretendard" pitchFamily="34" charset="-120"/>
+              </a:rPr>
+              <a:t>자리별로 더해 ÷ 3</a:t>
+            </a:r>
+            <a:endParaRPr lang="en-US" sz="1400" dirty="0"/>
+          </a:p>
+        </p:txBody>
+      </p:sp>
+      <p:sp>
+        <p:nvSpPr>
+          <p:cNvPr id="99" name="Shape 96"/>
+          <p:cNvSpPr/>
+          <p:nvPr/>
+        </p:nvSpPr>
+        <p:spPr>
+          <a:xfrm>
+            <a:off x="8821217" y="6396228"/>
+            <a:ext cx="274320" cy="274320"/>
+          </a:xfrm>
+          <a:prstGeom prst="rightArrow">
+            <a:avLst/>
+          </a:prstGeom>
+          <a:solidFill>
+            <a:srgbClr val="2E74C6"/>
+          </a:solidFill>
+          <a:ln/>
+        </p:spPr>
+      </p:sp>
+      <p:sp>
+        <p:nvSpPr>
+          <p:cNvPr id="100" name="Text 97"/>
+          <p:cNvSpPr/>
+          <p:nvPr/>
+        </p:nvSpPr>
+        <p:spPr>
+          <a:xfrm>
+            <a:off x="9186977" y="6336792"/>
+            <a:ext cx="1143000" cy="393192"/>
+          </a:xfrm>
+          <a:prstGeom prst="roundRect">
+            <a:avLst>
+              <a:gd name="adj" fmla="val 18605"/>
+            </a:avLst>
+          </a:prstGeom>
+          <a:solidFill>
+            <a:srgbClr val="2E74C6"/>
+          </a:solidFill>
+          <a:ln/>
+        </p:spPr>
+        <p:txBody>
+          <a:bodyPr wrap="square" lIns="50800" tIns="50800" rIns="50800" bIns="50800" rtlCol="0" anchor="ctr"/>
+          <a:lstStyle/>
+          <a:p>
+            <a:pPr algn="ctr" indent="0" marL="0">
+              <a:buNone/>
+            </a:pPr>
+            <a:r>
+              <a:rPr lang="en-US" sz="1400" b="1" dirty="0">
+                <a:solidFill>
+                  <a:srgbClr val="FFFFFF"/>
+                </a:solidFill>
+                <a:latin typeface="Pretendard" pitchFamily="34" charset="0"/>
+                <a:ea typeface="Pretendard" pitchFamily="34" charset="-122"/>
+                <a:cs typeface="Pretendard" pitchFamily="34" charset="-120"/>
+              </a:rPr>
+              <a:t>[0.4, 0.5]</a:t>
+            </a:r>
+            <a:endParaRPr lang="en-US" sz="1400" dirty="0"/>
+          </a:p>
+        </p:txBody>
+      </p:sp>
+      <p:sp>
+        <p:nvSpPr>
+          <p:cNvPr id="101" name="Text 98"/>
+          <p:cNvSpPr txBox="1"/>
+          <p:nvPr/>
+        </p:nvSpPr>
+        <p:spPr>
+          <a:xfrm>
+            <a:off x="10467137" y="6336792"/>
+            <a:ext cx="3666744" cy="393192"/>
+          </a:xfrm>
+          <a:prstGeom prst="rect">
+            <a:avLst/>
+          </a:prstGeom>
+          <a:noFill/>
+          <a:ln/>
+        </p:spPr>
+        <p:txBody>
+          <a:bodyPr wrap="square" lIns="0" tIns="0" rIns="0" bIns="0" rtlCol="0" anchor="ctr"/>
+          <a:lstStyle/>
+          <a:p>
+            <a:pPr algn="l" indent="0" marL="0">
+              <a:buNone/>
+            </a:pPr>
+            <a:r>
+              <a:rPr lang="en-US" sz="1400" dirty="0">
+                <a:solidFill>
+                  <a:srgbClr val="4A5364"/>
+                </a:solidFill>
+                <a:latin typeface="Pretendard" pitchFamily="34" charset="0"/>
+                <a:ea typeface="Pretendard" pitchFamily="34" charset="-122"/>
+                <a:cs typeface="Pretendard" pitchFamily="34" charset="-120"/>
+              </a:rPr>
+              <a:t>청크 벡터 1개 (임베딩 API 안에서 늘 하는 일)</a:t>
+            </a:r>
+            <a:endParaRPr lang="en-US" sz="1400" dirty="0"/>
+          </a:p>
+        </p:txBody>
+      </p:sp>
+      <p:sp>
+        <p:nvSpPr>
+          <p:cNvPr id="102" name="Shape 99"/>
+          <p:cNvSpPr/>
+          <p:nvPr/>
+        </p:nvSpPr>
+        <p:spPr>
+          <a:xfrm>
+            <a:off x="509321" y="6812280"/>
+            <a:ext cx="64008" cy="365760"/>
+          </a:xfrm>
+          <a:prstGeom prst="rect">
+            <a:avLst/>
+          </a:prstGeom>
+          <a:solidFill>
+            <a:srgbClr val="2E74C6"/>
+          </a:solidFill>
+          <a:ln/>
+        </p:spPr>
+      </p:sp>
+      <p:sp>
+        <p:nvSpPr>
+          <p:cNvPr id="103" name="Text 100"/>
+          <p:cNvSpPr txBox="1"/>
+          <p:nvPr/>
+        </p:nvSpPr>
+        <p:spPr>
+          <a:xfrm>
+            <a:off x="692201" y="6812280"/>
             <a:ext cx="10920679" cy="365760"/>
           </a:xfrm>
           <a:prstGeom prst="rect">
@@ -7205,7 +7590,7 @@
       </p:sp>
       <p:sp>
         <p:nvSpPr>
-          <p:cNvPr id="94" name="Shape 91"/>
+          <p:cNvPr id="104" name="Shape 101"/>
           <p:cNvSpPr/>
           <p:nvPr/>
         </p:nvSpPr>
@@ -7232,7 +7617,7 @@
       </p:sp>
       <p:sp>
         <p:nvSpPr>
-          <p:cNvPr id="95" name="Text 92">
+          <p:cNvPr id="105" name="Text 102">
             <a:hlinkClick r:id="rId1" tooltip=""/>
           </p:cNvPr>
           <p:cNvSpPr/>
@@ -7280,7 +7665,7 @@
       </p:sp>
       <p:sp>
         <p:nvSpPr>
-          <p:cNvPr id="96" name="Shape 93"/>
+          <p:cNvPr id="106" name="Shape 103"/>
           <p:cNvSpPr/>
           <p:nvPr/>
         </p:nvSpPr>
@@ -7303,7 +7688,7 @@
       </p:sp>
       <p:sp>
         <p:nvSpPr>
-          <p:cNvPr id="97" name="Text 94"/>
+          <p:cNvPr id="107" name="Text 104"/>
           <p:cNvSpPr txBox="1"/>
           <p:nvPr/>
         </p:nvSpPr>

--- a/research/rag/late-chunking.pptx
+++ b/research/rag/late-chunking.pptx
@@ -602,13 +602,13 @@
             <a:r>
               <a:rPr lang="en-US" dirty="0"/>
               <a:t>슬라이드 2: Late Chunking 원리: 자르는 시점만 모델 통과 뒤로 옮깁니다
-위 줄(기존 방식): 문서를 청크 3개로 자른 뒤 청크마다 임베딩 모델을 따로 통과시킵니다. 모델은 같은 모델 하나이고 3회 호출하는 것입니다. 모델이 한 번에 보는 글이 청크 하나뿐이라, "Its"가 베를린을 가리킨다는 정보가 벡터에 들어가지 못합니다.
-아래 줄(Late Chunking): 같은 청크 경계를 쓰되, 문서 전체를 긴 문맥 임베딩 모델에 한 번 통과시켜 토큰 9개 각각의 벡터를 먼저 얻습니다. 임베딩 모델은 모든 토큰이 서로를 보는 양방향 구조라 토큰 벡터마다 문서 전체 정보가 섞입니다. 그 뒤 청크 경계대로 토큰 벡터를 구간별로 평균 내면 청크 벡터 3개가 나옵니다.
+위 줄(기존 방식): 문서를 청크 3개로 자른 뒤 청크마다 임베딩 모델을 따로 통과시킵니다. 모델은 같은 모델 하나이고 3회 호출하는 것입니다. 실습의 Cohere API가 이 방식으로, 청크 글을 보내면 벡터 1개가 돌아옵니다. 모델이 한 번에 보는 글이 청크 하나뿐이라, "Its"가 베를린을 가리킨다는 정보가 벡터에 들어가지 못합니다.
+아래 줄(Late Chunking): 같은 청크 경계를 쓰되, 문서 전체를 긴 문맥 임베딩 모델에 한 번 통과시켜 토큰 9개 각각의 벡터를 먼저 얻습니다. 임베딩 모델은 모든 토큰이 서로를 보는 양방향 구조라 토큰 벡터마다 문서 전체 정보가 섞입니다. 그 뒤 토큰 벡터를 청크 구간별로 나누고, 구간마다 평균을 내면 청크 벡터 3개가 나옵니다.
+아래 띠(토큰을 청크에 나눠 담는 법): 핵심은 글자 위치입니다. ① splitter가 청크마다 원문의 몇 번째 글자부터 몇 번째 글자까지인지 알려 줍니다. 예시에서 청크 1은 0 ~ 14, 청크 2는 15 ~ 35, 청크 3은 36 ~ 52번째 글자입니다. ② 토크나이저도 토큰마다 글자 위치를 기록합니다(offset mapping). 예를 들어 "Its"는 15 ~ 18, "population"은 19 ~ 29번째 글자입니다. 토큰의 시작 글자가 들어가는 청크에 그 토큰을 배정하면 청크 1은 토큰 0 ~ 2번, 청크 2는 3 ~ 5번, 청크 3은 6 ~ 8번이 됩니다. 모델이 내놓는 토큰 벡터도 같은 번호 순서이므로, 번호 구간대로 잘라 평균을 내면 됩니다.
+예시 문장은 설명을 위해 단순화했고 단어 하나를 토큰 하나로 그렸습니다. 실제 토크나이저는 "population"을 여러 토큰으로 나눌 수 있지만, 글자 위치 기록이 있어 배정 방식은 같습니다. 모델이 앞뒤에 붙이는 특수 토큰은 글자 위치가 없어 빼거나 첫 청크와 마지막 청크에 넣습니다. Jina API에 청크 글 목록을 순서대로 보내면 이 배정을 API가 대신 합니다.
 바뀌지 않는 것: 청크 수, 저장하는 벡터 수, 벡터DB 검색 방식은 기존과 같습니다. 바뀌는 것은 벡터에 담긴 문맥뿐이라 검색기 코드는 손대지 않아도 됩니다.
-전제: 토큰별 벡터를 내주는 모델이어야 하고(Cohere embed API처럼 최종 벡터 하나만 주는 API는 불가), 문서 전체를 담을 긴 문맥 모델이어야 합니다. 모델 한도(jina-embeddings-v3는 8192토큰)를 넘는 문서는 큰 창으로 나눠 통과시키고 창끼리 512토큰을 겹쳐 문맥을 보충합니다(논문 v3의 long late chunking).
-토큰 9개는 설명을 위한 단순화입니다. 실제로는 청크 하나가 수십에서 수백 토큰입니다. 글자 경계를 토큰 구간으로 바꿀 때는 tokenizer의 offset mapping을 씁니다.
+전제: 토큰별 벡터를 내주는 모델이어야 하고(Cohere embed API처럼 벡터 하나만 주는 API는 불가), 문서 전체를 담을 긴 문맥 모델이어야 합니다. 모델 한도(jina-embeddings-v3는 8192토큰)를 넘는 문서는 큰 창으로 나눠 통과시키고 창끼리 512토큰을 겹쳐 문맥을 보충합니다(논문 v3의 long late chunking).
 오른쪽 표: 논문 표 1의 값으로, jina-embeddings-v2-small에서 각 문장 임베딩과 "Berlin" 임베딩의 코사인 유사도입니다. 베를린이라는 단어가 없는 문장 2가 0.7084에서 0.8249로 가장 크게 올랐습니다.
-아래 띠(평균 풀링): 임베딩 모델은 토큰마다 벡터를 하나씩 만들고, 벡터DB에는 청크당 벡터 1개를 저장하므로 이를 하나로 합쳐야 합니다. 가장 흔한 방법이 평균 풀링으로, 같은 자리끼리 더해 개수로 나눕니다. 예시에서 첫째 자리는 (0.2 + 0.4 + 0.6) ÷ 3 = 0.4, 둘째 자리는 (0.9 + 0.5 + 0.1) ÷ 3 = 0.5입니다. 실제 벡터는 2칸이 아니라 수백에서 수천 칸입니다. 실습의 Cohere API는 이 단계를 서버 안에서 끝내고 결과 벡터만 돌려주기 때문에 실습 코드에는 드러나지 않습니다. Late Chunking은 이 단계를 사용자가 직접 하되, 문서 전체를 본 토큰 벡터를 청크 구간별로 평균한다는 점만 다릅니다.
 상세 문서: https://github.com/unicorn-campus/hybrid-ai/blob/main/research/rag/late-chunking.md#3-원리와-처리-절차</a:t>
             </a:r>
             <a:endParaRPr lang="en-US" dirty="0"/>
@@ -4223,7 +4223,7 @@
         <p:spPr>
           <a:xfrm>
             <a:off x="4843577" y="2240280"/>
-            <a:ext cx="1188720" cy="384048"/>
+            <a:ext cx="2459736" cy="384048"/>
           </a:xfrm>
           <a:prstGeom prst="roundRect">
             <a:avLst>
@@ -4269,7 +4269,7 @@
         </p:nvSpPr>
         <p:spPr>
           <a:xfrm>
-            <a:off x="6096305" y="2295144"/>
+            <a:off x="7367321" y="2295144"/>
             <a:ext cx="274320" cy="274320"/>
           </a:xfrm>
           <a:prstGeom prst="rightArrow">
@@ -4284,73 +4284,6 @@
       <p:sp>
         <p:nvSpPr>
           <p:cNvPr id="26" name="Text 24"/>
-          <p:cNvSpPr/>
-          <p:nvPr/>
-        </p:nvSpPr>
-        <p:spPr>
-          <a:xfrm>
-            <a:off x="6434633" y="2240280"/>
-            <a:ext cx="868680" cy="384048"/>
-          </a:xfrm>
-          <a:prstGeom prst="roundRect">
-            <a:avLst>
-              <a:gd name="adj" fmla="val 19048"/>
-            </a:avLst>
-          </a:prstGeom>
-          <a:solidFill>
-            <a:srgbClr val="F5F8FC"/>
-          </a:solidFill>
-          <a:ln w="12700">
-            <a:solidFill>
-              <a:srgbClr val="D9E0EC"/>
-            </a:solidFill>
-          </a:ln>
-        </p:spPr>
-        <p:txBody>
-          <a:bodyPr wrap="square" lIns="50800" tIns="50800" rIns="50800" bIns="50800" rtlCol="0" anchor="ctr"/>
-          <a:lstStyle/>
-          <a:p>
-            <a:pPr algn="ctr" indent="0" marL="0">
-              <a:buNone/>
-            </a:pPr>
-            <a:r>
-              <a:rPr lang="en-US" sz="1400" dirty="0">
-                <a:solidFill>
-                  <a:srgbClr val="2B3242"/>
-                </a:solidFill>
-                <a:latin typeface="Pretendard" pitchFamily="34" charset="0"/>
-                <a:ea typeface="Pretendard" pitchFamily="34" charset="-122"/>
-                <a:cs typeface="Pretendard" pitchFamily="34" charset="-120"/>
-              </a:rPr>
-              <a:t>토큰 평균</a:t>
-            </a:r>
-            <a:endParaRPr lang="en-US" sz="1400" dirty="0"/>
-          </a:p>
-        </p:txBody>
-      </p:sp>
-      <p:sp>
-        <p:nvSpPr>
-          <p:cNvPr id="27" name="Shape 25"/>
-          <p:cNvSpPr/>
-          <p:nvPr/>
-        </p:nvSpPr>
-        <p:spPr>
-          <a:xfrm>
-            <a:off x="7367321" y="2295144"/>
-            <a:ext cx="274320" cy="274320"/>
-          </a:xfrm>
-          <a:prstGeom prst="rightArrow">
-            <a:avLst/>
-          </a:prstGeom>
-          <a:solidFill>
-            <a:srgbClr val="2E74C6"/>
-          </a:solidFill>
-          <a:ln/>
-        </p:spPr>
-      </p:sp>
-      <p:sp>
-        <p:nvSpPr>
-          <p:cNvPr id="28" name="Text 26"/>
           <p:cNvSpPr/>
           <p:nvPr/>
         </p:nvSpPr>
@@ -4393,7 +4326,7 @@
       </p:sp>
       <p:sp>
         <p:nvSpPr>
-          <p:cNvPr id="29" name="Text 27"/>
+          <p:cNvPr id="27" name="Text 25"/>
           <p:cNvSpPr txBox="1"/>
           <p:nvPr/>
         </p:nvSpPr>
@@ -4432,7 +4365,7 @@
       </p:sp>
       <p:sp>
         <p:nvSpPr>
-          <p:cNvPr id="30" name="Shape 28"/>
+          <p:cNvPr id="28" name="Shape 26"/>
           <p:cNvSpPr/>
           <p:nvPr/>
         </p:nvSpPr>
@@ -4459,7 +4392,7 @@
       </p:sp>
       <p:sp>
         <p:nvSpPr>
-          <p:cNvPr id="31" name="Shape 29"/>
+          <p:cNvPr id="29" name="Shape 27"/>
           <p:cNvSpPr/>
           <p:nvPr/>
         </p:nvSpPr>
@@ -4481,7 +4414,7 @@
       </p:sp>
       <p:sp>
         <p:nvSpPr>
-          <p:cNvPr id="32" name="Shape 30"/>
+          <p:cNvPr id="30" name="Shape 28"/>
           <p:cNvSpPr/>
           <p:nvPr/>
         </p:nvSpPr>
@@ -4503,7 +4436,7 @@
       </p:sp>
       <p:sp>
         <p:nvSpPr>
-          <p:cNvPr id="33" name="Shape 31"/>
+          <p:cNvPr id="31" name="Shape 29"/>
           <p:cNvSpPr/>
           <p:nvPr/>
         </p:nvSpPr>
@@ -4525,7 +4458,7 @@
       </p:sp>
       <p:sp>
         <p:nvSpPr>
-          <p:cNvPr id="34" name="Text 32"/>
+          <p:cNvPr id="32" name="Text 30"/>
           <p:cNvSpPr txBox="1"/>
           <p:nvPr/>
         </p:nvSpPr>
@@ -4564,7 +4497,7 @@
       </p:sp>
       <p:sp>
         <p:nvSpPr>
-          <p:cNvPr id="35" name="Shape 33"/>
+          <p:cNvPr id="33" name="Shape 31"/>
           <p:cNvSpPr/>
           <p:nvPr/>
         </p:nvSpPr>
@@ -4584,14 +4517,14 @@
       </p:sp>
       <p:sp>
         <p:nvSpPr>
-          <p:cNvPr id="36" name="Text 34"/>
+          <p:cNvPr id="34" name="Text 32"/>
           <p:cNvSpPr/>
           <p:nvPr/>
         </p:nvSpPr>
         <p:spPr>
           <a:xfrm>
             <a:off x="4843577" y="2734056"/>
-            <a:ext cx="1188720" cy="384048"/>
+            <a:ext cx="2459736" cy="384048"/>
           </a:xfrm>
           <a:prstGeom prst="roundRect">
             <a:avLst>
@@ -4631,13 +4564,13 @@
       </p:sp>
       <p:sp>
         <p:nvSpPr>
-          <p:cNvPr id="37" name="Shape 35"/>
-          <p:cNvSpPr/>
-          <p:nvPr/>
-        </p:nvSpPr>
-        <p:spPr>
-          <a:xfrm>
-            <a:off x="6096305" y="2788920"/>
+          <p:cNvPr id="35" name="Shape 33"/>
+          <p:cNvSpPr/>
+          <p:nvPr/>
+        </p:nvSpPr>
+        <p:spPr>
+          <a:xfrm>
+            <a:off x="7367321" y="2788920"/>
             <a:ext cx="274320" cy="274320"/>
           </a:xfrm>
           <a:prstGeom prst="rightArrow">
@@ -4651,74 +4584,7 @@
       </p:sp>
       <p:sp>
         <p:nvSpPr>
-          <p:cNvPr id="38" name="Text 36"/>
-          <p:cNvSpPr/>
-          <p:nvPr/>
-        </p:nvSpPr>
-        <p:spPr>
-          <a:xfrm>
-            <a:off x="6434633" y="2734056"/>
-            <a:ext cx="868680" cy="384048"/>
-          </a:xfrm>
-          <a:prstGeom prst="roundRect">
-            <a:avLst>
-              <a:gd name="adj" fmla="val 19048"/>
-            </a:avLst>
-          </a:prstGeom>
-          <a:solidFill>
-            <a:srgbClr val="F5F8FC"/>
-          </a:solidFill>
-          <a:ln w="12700">
-            <a:solidFill>
-              <a:srgbClr val="D9E0EC"/>
-            </a:solidFill>
-          </a:ln>
-        </p:spPr>
-        <p:txBody>
-          <a:bodyPr wrap="square" lIns="50800" tIns="50800" rIns="50800" bIns="50800" rtlCol="0" anchor="ctr"/>
-          <a:lstStyle/>
-          <a:p>
-            <a:pPr algn="ctr" indent="0" marL="0">
-              <a:buNone/>
-            </a:pPr>
-            <a:r>
-              <a:rPr lang="en-US" sz="1400" dirty="0">
-                <a:solidFill>
-                  <a:srgbClr val="2B3242"/>
-                </a:solidFill>
-                <a:latin typeface="Pretendard" pitchFamily="34" charset="0"/>
-                <a:ea typeface="Pretendard" pitchFamily="34" charset="-122"/>
-                <a:cs typeface="Pretendard" pitchFamily="34" charset="-120"/>
-              </a:rPr>
-              <a:t>토큰 평균</a:t>
-            </a:r>
-            <a:endParaRPr lang="en-US" sz="1400" dirty="0"/>
-          </a:p>
-        </p:txBody>
-      </p:sp>
-      <p:sp>
-        <p:nvSpPr>
-          <p:cNvPr id="39" name="Shape 37"/>
-          <p:cNvSpPr/>
-          <p:nvPr/>
-        </p:nvSpPr>
-        <p:spPr>
-          <a:xfrm>
-            <a:off x="7367321" y="2788920"/>
-            <a:ext cx="274320" cy="274320"/>
-          </a:xfrm>
-          <a:prstGeom prst="rightArrow">
-            <a:avLst/>
-          </a:prstGeom>
-          <a:solidFill>
-            <a:srgbClr val="2E74C6"/>
-          </a:solidFill>
-          <a:ln/>
-        </p:spPr>
-      </p:sp>
-      <p:sp>
-        <p:nvSpPr>
-          <p:cNvPr id="40" name="Text 38"/>
+          <p:cNvPr id="36" name="Text 34"/>
           <p:cNvSpPr/>
           <p:nvPr/>
         </p:nvSpPr>
@@ -4761,7 +4627,7 @@
       </p:sp>
       <p:sp>
         <p:nvSpPr>
-          <p:cNvPr id="41" name="Shape 39"/>
+          <p:cNvPr id="37" name="Shape 35"/>
           <p:cNvSpPr/>
           <p:nvPr/>
         </p:nvSpPr>
@@ -4788,7 +4654,7 @@
       </p:sp>
       <p:sp>
         <p:nvSpPr>
-          <p:cNvPr id="42" name="Shape 40"/>
+          <p:cNvPr id="38" name="Shape 36"/>
           <p:cNvSpPr/>
           <p:nvPr/>
         </p:nvSpPr>
@@ -4810,7 +4676,7 @@
       </p:sp>
       <p:sp>
         <p:nvSpPr>
-          <p:cNvPr id="43" name="Shape 41"/>
+          <p:cNvPr id="39" name="Shape 37"/>
           <p:cNvSpPr/>
           <p:nvPr/>
         </p:nvSpPr>
@@ -4832,7 +4698,7 @@
       </p:sp>
       <p:sp>
         <p:nvSpPr>
-          <p:cNvPr id="44" name="Shape 42"/>
+          <p:cNvPr id="40" name="Shape 38"/>
           <p:cNvSpPr/>
           <p:nvPr/>
         </p:nvSpPr>
@@ -4854,7 +4720,7 @@
       </p:sp>
       <p:sp>
         <p:nvSpPr>
-          <p:cNvPr id="45" name="Text 43"/>
+          <p:cNvPr id="41" name="Text 39"/>
           <p:cNvSpPr txBox="1"/>
           <p:nvPr/>
         </p:nvSpPr>
@@ -4893,7 +4759,7 @@
       </p:sp>
       <p:sp>
         <p:nvSpPr>
-          <p:cNvPr id="46" name="Shape 44"/>
+          <p:cNvPr id="42" name="Shape 40"/>
           <p:cNvSpPr/>
           <p:nvPr/>
         </p:nvSpPr>
@@ -4913,14 +4779,14 @@
       </p:sp>
       <p:sp>
         <p:nvSpPr>
-          <p:cNvPr id="47" name="Text 45"/>
+          <p:cNvPr id="43" name="Text 41"/>
           <p:cNvSpPr/>
           <p:nvPr/>
         </p:nvSpPr>
         <p:spPr>
           <a:xfrm>
             <a:off x="4843577" y="3227832"/>
-            <a:ext cx="1188720" cy="384048"/>
+            <a:ext cx="2459736" cy="384048"/>
           </a:xfrm>
           <a:prstGeom prst="roundRect">
             <a:avLst>
@@ -4960,13 +4826,13 @@
       </p:sp>
       <p:sp>
         <p:nvSpPr>
-          <p:cNvPr id="48" name="Shape 46"/>
-          <p:cNvSpPr/>
-          <p:nvPr/>
-        </p:nvSpPr>
-        <p:spPr>
-          <a:xfrm>
-            <a:off x="6096305" y="3282696"/>
+          <p:cNvPr id="44" name="Shape 42"/>
+          <p:cNvSpPr/>
+          <p:nvPr/>
+        </p:nvSpPr>
+        <p:spPr>
+          <a:xfrm>
+            <a:off x="7367321" y="3282696"/>
             <a:ext cx="274320" cy="274320"/>
           </a:xfrm>
           <a:prstGeom prst="rightArrow">
@@ -4980,74 +4846,7 @@
       </p:sp>
       <p:sp>
         <p:nvSpPr>
-          <p:cNvPr id="49" name="Text 47"/>
-          <p:cNvSpPr/>
-          <p:nvPr/>
-        </p:nvSpPr>
-        <p:spPr>
-          <a:xfrm>
-            <a:off x="6434633" y="3227832"/>
-            <a:ext cx="868680" cy="384048"/>
-          </a:xfrm>
-          <a:prstGeom prst="roundRect">
-            <a:avLst>
-              <a:gd name="adj" fmla="val 19048"/>
-            </a:avLst>
-          </a:prstGeom>
-          <a:solidFill>
-            <a:srgbClr val="F5F8FC"/>
-          </a:solidFill>
-          <a:ln w="12700">
-            <a:solidFill>
-              <a:srgbClr val="D9E0EC"/>
-            </a:solidFill>
-          </a:ln>
-        </p:spPr>
-        <p:txBody>
-          <a:bodyPr wrap="square" lIns="50800" tIns="50800" rIns="50800" bIns="50800" rtlCol="0" anchor="ctr"/>
-          <a:lstStyle/>
-          <a:p>
-            <a:pPr algn="ctr" indent="0" marL="0">
-              <a:buNone/>
-            </a:pPr>
-            <a:r>
-              <a:rPr lang="en-US" sz="1400" dirty="0">
-                <a:solidFill>
-                  <a:srgbClr val="2B3242"/>
-                </a:solidFill>
-                <a:latin typeface="Pretendard" pitchFamily="34" charset="0"/>
-                <a:ea typeface="Pretendard" pitchFamily="34" charset="-122"/>
-                <a:cs typeface="Pretendard" pitchFamily="34" charset="-120"/>
-              </a:rPr>
-              <a:t>토큰 평균</a:t>
-            </a:r>
-            <a:endParaRPr lang="en-US" sz="1400" dirty="0"/>
-          </a:p>
-        </p:txBody>
-      </p:sp>
-      <p:sp>
-        <p:nvSpPr>
-          <p:cNvPr id="50" name="Shape 48"/>
-          <p:cNvSpPr/>
-          <p:nvPr/>
-        </p:nvSpPr>
-        <p:spPr>
-          <a:xfrm>
-            <a:off x="7367321" y="3282696"/>
-            <a:ext cx="274320" cy="274320"/>
-          </a:xfrm>
-          <a:prstGeom prst="rightArrow">
-            <a:avLst/>
-          </a:prstGeom>
-          <a:solidFill>
-            <a:srgbClr val="2E74C6"/>
-          </a:solidFill>
-          <a:ln/>
-        </p:spPr>
-      </p:sp>
-      <p:sp>
-        <p:nvSpPr>
-          <p:cNvPr id="51" name="Text 49"/>
+          <p:cNvPr id="45" name="Text 43"/>
           <p:cNvSpPr/>
           <p:nvPr/>
         </p:nvSpPr>
@@ -5090,7 +4889,7 @@
       </p:sp>
       <p:sp>
         <p:nvSpPr>
-          <p:cNvPr id="52" name="Text 50"/>
+          <p:cNvPr id="46" name="Text 44"/>
           <p:cNvSpPr txBox="1"/>
           <p:nvPr/>
         </p:nvSpPr>
@@ -5129,7 +4928,7 @@
       </p:sp>
       <p:sp>
         <p:nvSpPr>
-          <p:cNvPr id="53" name="Text 51"/>
+          <p:cNvPr id="47" name="Text 45"/>
           <p:cNvSpPr/>
           <p:nvPr/>
         </p:nvSpPr>
@@ -5172,7 +4971,7 @@
       </p:sp>
       <p:sp>
         <p:nvSpPr>
-          <p:cNvPr id="54" name="Shape 52"/>
+          <p:cNvPr id="48" name="Shape 46"/>
           <p:cNvSpPr/>
           <p:nvPr/>
         </p:nvSpPr>
@@ -5199,7 +4998,7 @@
       </p:sp>
       <p:sp>
         <p:nvSpPr>
-          <p:cNvPr id="55" name="Text 53"/>
+          <p:cNvPr id="49" name="Text 47"/>
           <p:cNvSpPr txBox="1"/>
           <p:nvPr/>
         </p:nvSpPr>
@@ -5238,7 +5037,7 @@
       </p:sp>
       <p:sp>
         <p:nvSpPr>
-          <p:cNvPr id="56" name="Shape 54"/>
+          <p:cNvPr id="50" name="Shape 48"/>
           <p:cNvSpPr/>
           <p:nvPr/>
         </p:nvSpPr>
@@ -5260,7 +5059,7 @@
       </p:sp>
       <p:sp>
         <p:nvSpPr>
-          <p:cNvPr id="57" name="Shape 55"/>
+          <p:cNvPr id="51" name="Shape 49"/>
           <p:cNvSpPr/>
           <p:nvPr/>
         </p:nvSpPr>
@@ -5282,7 +5081,7 @@
       </p:sp>
       <p:sp>
         <p:nvSpPr>
-          <p:cNvPr id="58" name="Shape 56"/>
+          <p:cNvPr id="52" name="Shape 50"/>
           <p:cNvSpPr/>
           <p:nvPr/>
         </p:nvSpPr>
@@ -5304,7 +5103,7 @@
       </p:sp>
       <p:sp>
         <p:nvSpPr>
-          <p:cNvPr id="59" name="Shape 57"/>
+          <p:cNvPr id="53" name="Shape 51"/>
           <p:cNvSpPr/>
           <p:nvPr/>
         </p:nvSpPr>
@@ -5326,7 +5125,7 @@
       </p:sp>
       <p:sp>
         <p:nvSpPr>
-          <p:cNvPr id="60" name="Shape 58"/>
+          <p:cNvPr id="54" name="Shape 52"/>
           <p:cNvSpPr/>
           <p:nvPr/>
         </p:nvSpPr>
@@ -5348,7 +5147,7 @@
       </p:sp>
       <p:sp>
         <p:nvSpPr>
-          <p:cNvPr id="61" name="Shape 59"/>
+          <p:cNvPr id="55" name="Shape 53"/>
           <p:cNvSpPr/>
           <p:nvPr/>
         </p:nvSpPr>
@@ -5370,7 +5169,7 @@
       </p:sp>
       <p:sp>
         <p:nvSpPr>
-          <p:cNvPr id="62" name="Shape 60"/>
+          <p:cNvPr id="56" name="Shape 54"/>
           <p:cNvSpPr/>
           <p:nvPr/>
         </p:nvSpPr>
@@ -5392,7 +5191,7 @@
       </p:sp>
       <p:sp>
         <p:nvSpPr>
-          <p:cNvPr id="63" name="Shape 61"/>
+          <p:cNvPr id="57" name="Shape 55"/>
           <p:cNvSpPr/>
           <p:nvPr/>
         </p:nvSpPr>
@@ -5414,7 +5213,7 @@
       </p:sp>
       <p:sp>
         <p:nvSpPr>
-          <p:cNvPr id="64" name="Shape 62"/>
+          <p:cNvPr id="58" name="Shape 56"/>
           <p:cNvSpPr/>
           <p:nvPr/>
         </p:nvSpPr>
@@ -5436,7 +5235,7 @@
       </p:sp>
       <p:sp>
         <p:nvSpPr>
-          <p:cNvPr id="65" name="Text 63"/>
+          <p:cNvPr id="59" name="Text 57"/>
           <p:cNvSpPr txBox="1"/>
           <p:nvPr/>
         </p:nvSpPr>
@@ -5475,7 +5274,7 @@
       </p:sp>
       <p:sp>
         <p:nvSpPr>
-          <p:cNvPr id="66" name="Shape 64"/>
+          <p:cNvPr id="60" name="Shape 58"/>
           <p:cNvSpPr/>
           <p:nvPr/>
         </p:nvSpPr>
@@ -5495,7 +5294,7 @@
       </p:sp>
       <p:sp>
         <p:nvSpPr>
-          <p:cNvPr id="67" name="Text 65"/>
+          <p:cNvPr id="61" name="Text 59"/>
           <p:cNvSpPr/>
           <p:nvPr/>
         </p:nvSpPr>
@@ -5542,7 +5341,7 @@
       </p:sp>
       <p:sp>
         <p:nvSpPr>
-          <p:cNvPr id="68" name="Shape 66"/>
+          <p:cNvPr id="62" name="Shape 60"/>
           <p:cNvSpPr/>
           <p:nvPr/>
         </p:nvSpPr>
@@ -5562,7 +5361,7 @@
       </p:sp>
       <p:sp>
         <p:nvSpPr>
-          <p:cNvPr id="69" name="Shape 67"/>
+          <p:cNvPr id="63" name="Shape 61"/>
           <p:cNvSpPr/>
           <p:nvPr/>
         </p:nvSpPr>
@@ -5589,7 +5388,7 @@
       </p:sp>
       <p:sp>
         <p:nvSpPr>
-          <p:cNvPr id="70" name="Text 68"/>
+          <p:cNvPr id="64" name="Text 62"/>
           <p:cNvSpPr txBox="1"/>
           <p:nvPr/>
         </p:nvSpPr>
@@ -5628,7 +5427,7 @@
       </p:sp>
       <p:sp>
         <p:nvSpPr>
-          <p:cNvPr id="71" name="Shape 69"/>
+          <p:cNvPr id="65" name="Shape 63"/>
           <p:cNvSpPr/>
           <p:nvPr/>
         </p:nvSpPr>
@@ -5650,7 +5449,7 @@
       </p:sp>
       <p:sp>
         <p:nvSpPr>
-          <p:cNvPr id="72" name="Shape 70"/>
+          <p:cNvPr id="66" name="Shape 64"/>
           <p:cNvSpPr/>
           <p:nvPr/>
         </p:nvSpPr>
@@ -5672,7 +5471,7 @@
       </p:sp>
       <p:sp>
         <p:nvSpPr>
-          <p:cNvPr id="73" name="Shape 71"/>
+          <p:cNvPr id="67" name="Shape 65"/>
           <p:cNvSpPr/>
           <p:nvPr/>
         </p:nvSpPr>
@@ -5694,7 +5493,7 @@
       </p:sp>
       <p:sp>
         <p:nvSpPr>
-          <p:cNvPr id="74" name="Shape 72"/>
+          <p:cNvPr id="68" name="Shape 66"/>
           <p:cNvSpPr/>
           <p:nvPr/>
         </p:nvSpPr>
@@ -5716,7 +5515,7 @@
       </p:sp>
       <p:sp>
         <p:nvSpPr>
-          <p:cNvPr id="75" name="Shape 73"/>
+          <p:cNvPr id="69" name="Shape 67"/>
           <p:cNvSpPr/>
           <p:nvPr/>
         </p:nvSpPr>
@@ -5738,7 +5537,7 @@
       </p:sp>
       <p:sp>
         <p:nvSpPr>
-          <p:cNvPr id="76" name="Shape 74"/>
+          <p:cNvPr id="70" name="Shape 68"/>
           <p:cNvSpPr/>
           <p:nvPr/>
         </p:nvSpPr>
@@ -5760,7 +5559,7 @@
       </p:sp>
       <p:sp>
         <p:nvSpPr>
-          <p:cNvPr id="77" name="Shape 75"/>
+          <p:cNvPr id="71" name="Shape 69"/>
           <p:cNvSpPr/>
           <p:nvPr/>
         </p:nvSpPr>
@@ -5782,7 +5581,7 @@
       </p:sp>
       <p:sp>
         <p:nvSpPr>
-          <p:cNvPr id="78" name="Shape 76"/>
+          <p:cNvPr id="72" name="Shape 70"/>
           <p:cNvSpPr/>
           <p:nvPr/>
         </p:nvSpPr>
@@ -5804,7 +5603,7 @@
       </p:sp>
       <p:sp>
         <p:nvSpPr>
-          <p:cNvPr id="79" name="Shape 77"/>
+          <p:cNvPr id="73" name="Shape 71"/>
           <p:cNvSpPr/>
           <p:nvPr/>
         </p:nvSpPr>
@@ -5826,7 +5625,7 @@
       </p:sp>
       <p:sp>
         <p:nvSpPr>
-          <p:cNvPr id="80" name="Text 78"/>
+          <p:cNvPr id="74" name="Text 72"/>
           <p:cNvSpPr txBox="1"/>
           <p:nvPr/>
         </p:nvSpPr>
@@ -5865,7 +5664,7 @@
       </p:sp>
       <p:sp>
         <p:nvSpPr>
-          <p:cNvPr id="81" name="Shape 79"/>
+          <p:cNvPr id="75" name="Shape 73"/>
           <p:cNvSpPr/>
           <p:nvPr/>
         </p:nvSpPr>
@@ -5885,7 +5684,7 @@
       </p:sp>
       <p:sp>
         <p:nvSpPr>
-          <p:cNvPr id="82" name="Text 80"/>
+          <p:cNvPr id="76" name="Text 74"/>
           <p:cNvSpPr/>
           <p:nvPr/>
         </p:nvSpPr>
@@ -5924,7 +5723,7 @@
                 <a:ea typeface="Pretendard" pitchFamily="34" charset="-122"/>
                 <a:cs typeface="Pretendard" pitchFamily="34" charset="-120"/>
               </a:rPr>
-              <a:t>구간별 토큰 평균</a:t>
+              <a:t>청크 구간별로 나눠 평균</a:t>
             </a:r>
             <a:endParaRPr lang="en-US" sz="1400" dirty="0"/>
           </a:p>
@@ -5932,7 +5731,7 @@
       </p:sp>
       <p:sp>
         <p:nvSpPr>
-          <p:cNvPr id="83" name="Shape 81"/>
+          <p:cNvPr id="77" name="Shape 75"/>
           <p:cNvSpPr/>
           <p:nvPr/>
         </p:nvSpPr>
@@ -5952,7 +5751,7 @@
       </p:sp>
       <p:sp>
         <p:nvSpPr>
-          <p:cNvPr id="84" name="Text 82"/>
+          <p:cNvPr id="78" name="Text 76"/>
           <p:cNvSpPr/>
           <p:nvPr/>
         </p:nvSpPr>
@@ -5995,7 +5794,7 @@
       </p:sp>
       <p:sp>
         <p:nvSpPr>
-          <p:cNvPr id="85" name="Text 83"/>
+          <p:cNvPr id="79" name="Text 77"/>
           <p:cNvSpPr/>
           <p:nvPr/>
         </p:nvSpPr>
@@ -6038,7 +5837,7 @@
       </p:sp>
       <p:sp>
         <p:nvSpPr>
-          <p:cNvPr id="86" name="Text 84"/>
+          <p:cNvPr id="80" name="Text 78"/>
           <p:cNvSpPr/>
           <p:nvPr/>
         </p:nvSpPr>
@@ -6081,7 +5880,7 @@
       </p:sp>
       <p:sp>
         <p:nvSpPr>
-          <p:cNvPr id="87" name="Text 85"/>
+          <p:cNvPr id="81" name="Text 79"/>
           <p:cNvSpPr txBox="1"/>
           <p:nvPr/>
         </p:nvSpPr>
@@ -6112,7 +5911,7 @@
                 <a:ea typeface="Pretendard" pitchFamily="34" charset="-122"/>
                 <a:cs typeface="Pretendard" pitchFamily="34" charset="-120"/>
               </a:rPr>
-              <a:t>저장하는 벡터 수와 검색 방식은 그대로. 바뀌는 것은 벡터에 담긴 문맥뿐</a:t>
+              <a:t>저장하는 벡터 수와 검색 방식은 그대로. 모델 한도(예: 8192토큰)를 넘는 문서는 나눠 처리</a:t>
             </a:r>
             <a:endParaRPr lang="en-US" sz="1400" dirty="0"/>
           </a:p>
@@ -6120,7 +5919,7 @@
       </p:sp>
       <p:sp>
         <p:nvSpPr>
-          <p:cNvPr id="88" name="Text 86"/>
+          <p:cNvPr id="82" name="Text 80"/>
           <p:cNvSpPr/>
           <p:nvPr/>
         </p:nvSpPr>
@@ -6163,7 +5962,7 @@
       </p:sp>
       <p:sp>
         <p:nvSpPr>
-          <p:cNvPr id="89" name="Text 87"/>
+          <p:cNvPr id="83" name="Text 81"/>
           <p:cNvSpPr/>
           <p:nvPr/>
         </p:nvSpPr>
@@ -7108,7 +6907,7 @@
       </p:graphicFrame>
       <p:sp>
         <p:nvSpPr>
-          <p:cNvPr id="91" name="Text 88"/>
+          <p:cNvPr id="85" name="Text 82"/>
           <p:cNvSpPr txBox="1"/>
           <p:nvPr/>
         </p:nvSpPr>
@@ -7147,18 +6946,18 @@
       </p:sp>
       <p:sp>
         <p:nvSpPr>
-          <p:cNvPr id="92" name="Text 89"/>
-          <p:cNvSpPr/>
-          <p:nvPr/>
-        </p:nvSpPr>
-        <p:spPr>
-          <a:xfrm>
-            <a:off x="509321" y="6336792"/>
-            <a:ext cx="2331720" cy="393192"/>
-          </a:xfrm>
-          <a:prstGeom prst="roundRect">
-            <a:avLst>
-              <a:gd name="adj" fmla="val 18605"/>
+          <p:cNvPr id="86" name="Text 83"/>
+          <p:cNvSpPr/>
+          <p:nvPr/>
+        </p:nvSpPr>
+        <p:spPr>
+          <a:xfrm>
+            <a:off x="509321" y="6327648"/>
+            <a:ext cx="1737360" cy="850392"/>
+          </a:xfrm>
+          <a:prstGeom prst="roundRect">
+            <a:avLst>
+              <a:gd name="adj" fmla="val 8602"/>
             </a:avLst>
           </a:prstGeom>
           <a:solidFill>
@@ -7182,7 +6981,7 @@
                 <a:ea typeface="Pretendard" pitchFamily="34" charset="-122"/>
                 <a:cs typeface="Pretendard" pitchFamily="34" charset="-120"/>
               </a:rPr>
-              <a:t>평균 풀링(토큰 평균)이란?</a:t>
+              <a:t>토큰을 청크에 나눠 담는 법</a:t>
             </a:r>
             <a:endParaRPr lang="en-US" sz="1400" dirty="0"/>
           </a:p>
@@ -7190,14 +6989,14 @@
       </p:sp>
       <p:sp>
         <p:nvSpPr>
-          <p:cNvPr id="93" name="Text 90"/>
+          <p:cNvPr id="87" name="Text 84"/>
           <p:cNvSpPr txBox="1"/>
           <p:nvPr/>
         </p:nvSpPr>
         <p:spPr>
           <a:xfrm>
-            <a:off x="2950769" y="6336792"/>
-            <a:ext cx="868680" cy="393192"/>
+            <a:off x="2374697" y="6327648"/>
+            <a:ext cx="1508760" cy="384048"/>
           </a:xfrm>
           <a:prstGeom prst="rect">
             <a:avLst/>
@@ -7221,7 +7020,7 @@
                 <a:ea typeface="Pretendard" pitchFamily="34" charset="-122"/>
                 <a:cs typeface="Pretendard" pitchFamily="34" charset="-120"/>
               </a:rPr>
-              <a:t>토큰 벡터</a:t>
+              <a:t>① 청크 글자 위치</a:t>
             </a:r>
             <a:endParaRPr lang="en-US" sz="1400" dirty="0"/>
           </a:p>
@@ -7229,46 +7028,38 @@
       </p:sp>
       <p:sp>
         <p:nvSpPr>
-          <p:cNvPr id="94" name="Text 91"/>
-          <p:cNvSpPr/>
-          <p:nvPr/>
-        </p:nvSpPr>
-        <p:spPr>
-          <a:xfrm>
-            <a:off x="3865169" y="6336792"/>
-            <a:ext cx="914400" cy="393192"/>
-          </a:xfrm>
-          <a:prstGeom prst="roundRect">
-            <a:avLst>
-              <a:gd name="adj" fmla="val 18605"/>
-            </a:avLst>
-          </a:prstGeom>
-          <a:solidFill>
-            <a:srgbClr val="EEF3FA"/>
-          </a:solidFill>
-          <a:ln w="12700">
-            <a:solidFill>
-              <a:srgbClr val="D9E0EC"/>
-            </a:solidFill>
-          </a:ln>
+          <p:cNvPr id="88" name="Text 85"/>
+          <p:cNvSpPr txBox="1"/>
+          <p:nvPr/>
+        </p:nvSpPr>
+        <p:spPr>
+          <a:xfrm>
+            <a:off x="2374697" y="6793992"/>
+            <a:ext cx="1508760" cy="384048"/>
+          </a:xfrm>
+          <a:prstGeom prst="rect">
+            <a:avLst/>
+          </a:prstGeom>
+          <a:noFill/>
+          <a:ln/>
         </p:spPr>
         <p:txBody>
-          <a:bodyPr wrap="square" lIns="50800" tIns="50800" rIns="50800" bIns="50800" rtlCol="0" anchor="ctr"/>
+          <a:bodyPr wrap="square" lIns="0" tIns="0" rIns="0" bIns="0" rtlCol="0" anchor="ctr"/>
           <a:lstStyle/>
           <a:p>
-            <a:pPr algn="ctr" indent="0" marL="0">
+            <a:pPr algn="l" indent="0" marL="0">
               <a:buNone/>
             </a:pPr>
             <a:r>
-              <a:rPr lang="en-US" sz="1400" dirty="0">
+              <a:rPr lang="en-US" sz="1400" b="1" dirty="0">
                 <a:solidFill>
-                  <a:srgbClr val="2B3242"/>
+                  <a:srgbClr val="1E2A5C"/>
                 </a:solidFill>
                 <a:latin typeface="Pretendard" pitchFamily="34" charset="0"/>
                 <a:ea typeface="Pretendard" pitchFamily="34" charset="-122"/>
                 <a:cs typeface="Pretendard" pitchFamily="34" charset="-120"/>
               </a:rPr>
-              <a:t>[0.2, 0.9]</a:t>
+              <a:t>② 시작 글자로 배정</a:t>
             </a:r>
             <a:endParaRPr lang="en-US" sz="1400" dirty="0"/>
           </a:p>
@@ -7276,191 +7067,18 @@
       </p:sp>
       <p:sp>
         <p:nvSpPr>
-          <p:cNvPr id="95" name="Text 92"/>
-          <p:cNvSpPr/>
-          <p:nvPr/>
-        </p:nvSpPr>
-        <p:spPr>
-          <a:xfrm>
-            <a:off x="4834433" y="6336792"/>
-            <a:ext cx="914400" cy="393192"/>
-          </a:xfrm>
-          <a:prstGeom prst="roundRect">
-            <a:avLst>
-              <a:gd name="adj" fmla="val 18605"/>
-            </a:avLst>
-          </a:prstGeom>
-          <a:solidFill>
-            <a:srgbClr val="EEF3FA"/>
-          </a:solidFill>
-          <a:ln w="12700">
-            <a:solidFill>
-              <a:srgbClr val="D9E0EC"/>
-            </a:solidFill>
-          </a:ln>
-        </p:spPr>
-        <p:txBody>
-          <a:bodyPr wrap="square" lIns="50800" tIns="50800" rIns="50800" bIns="50800" rtlCol="0" anchor="ctr"/>
-          <a:lstStyle/>
-          <a:p>
-            <a:pPr algn="ctr" indent="0" marL="0">
-              <a:buNone/>
-            </a:pPr>
-            <a:r>
-              <a:rPr lang="en-US" sz="1400" dirty="0">
-                <a:solidFill>
-                  <a:srgbClr val="2B3242"/>
-                </a:solidFill>
-                <a:latin typeface="Pretendard" pitchFamily="34" charset="0"/>
-                <a:ea typeface="Pretendard" pitchFamily="34" charset="-122"/>
-                <a:cs typeface="Pretendard" pitchFamily="34" charset="-120"/>
-              </a:rPr>
-              <a:t>[0.4, 0.5]</a:t>
-            </a:r>
-            <a:endParaRPr lang="en-US" sz="1400" dirty="0"/>
-          </a:p>
-        </p:txBody>
-      </p:sp>
-      <p:sp>
-        <p:nvSpPr>
-          <p:cNvPr id="96" name="Text 93"/>
-          <p:cNvSpPr/>
-          <p:nvPr/>
-        </p:nvSpPr>
-        <p:spPr>
-          <a:xfrm>
-            <a:off x="5803697" y="6336792"/>
-            <a:ext cx="914400" cy="393192"/>
-          </a:xfrm>
-          <a:prstGeom prst="roundRect">
-            <a:avLst>
-              <a:gd name="adj" fmla="val 18605"/>
-            </a:avLst>
-          </a:prstGeom>
-          <a:solidFill>
-            <a:srgbClr val="EEF3FA"/>
-          </a:solidFill>
-          <a:ln w="12700">
-            <a:solidFill>
-              <a:srgbClr val="D9E0EC"/>
-            </a:solidFill>
-          </a:ln>
-        </p:spPr>
-        <p:txBody>
-          <a:bodyPr wrap="square" lIns="50800" tIns="50800" rIns="50800" bIns="50800" rtlCol="0" anchor="ctr"/>
-          <a:lstStyle/>
-          <a:p>
-            <a:pPr algn="ctr" indent="0" marL="0">
-              <a:buNone/>
-            </a:pPr>
-            <a:r>
-              <a:rPr lang="en-US" sz="1400" dirty="0">
-                <a:solidFill>
-                  <a:srgbClr val="2B3242"/>
-                </a:solidFill>
-                <a:latin typeface="Pretendard" pitchFamily="34" charset="0"/>
-                <a:ea typeface="Pretendard" pitchFamily="34" charset="-122"/>
-                <a:cs typeface="Pretendard" pitchFamily="34" charset="-120"/>
-              </a:rPr>
-              <a:t>[0.6, 0.1]</a:t>
-            </a:r>
-            <a:endParaRPr lang="en-US" sz="1400" dirty="0"/>
-          </a:p>
-        </p:txBody>
-      </p:sp>
-      <p:sp>
-        <p:nvSpPr>
-          <p:cNvPr id="97" name="Shape 94"/>
-          <p:cNvSpPr/>
-          <p:nvPr/>
-        </p:nvSpPr>
-        <p:spPr>
-          <a:xfrm>
-            <a:off x="6809537" y="6396228"/>
-            <a:ext cx="274320" cy="274320"/>
-          </a:xfrm>
-          <a:prstGeom prst="rightArrow">
-            <a:avLst/>
-          </a:prstGeom>
-          <a:solidFill>
-            <a:srgbClr val="2E74C6"/>
-          </a:solidFill>
-          <a:ln/>
-        </p:spPr>
-      </p:sp>
-      <p:sp>
-        <p:nvSpPr>
-          <p:cNvPr id="98" name="Text 95"/>
-          <p:cNvSpPr txBox="1"/>
-          <p:nvPr/>
-        </p:nvSpPr>
-        <p:spPr>
-          <a:xfrm>
-            <a:off x="7175297" y="6336792"/>
-            <a:ext cx="1554480" cy="393192"/>
-          </a:xfrm>
-          <a:prstGeom prst="rect">
-            <a:avLst/>
-          </a:prstGeom>
-          <a:noFill/>
-          <a:ln/>
-        </p:spPr>
-        <p:txBody>
-          <a:bodyPr wrap="square" lIns="0" tIns="0" rIns="0" bIns="0" rtlCol="0" anchor="ctr"/>
-          <a:lstStyle/>
-          <a:p>
-            <a:pPr algn="ctr" indent="0" marL="0">
-              <a:buNone/>
-            </a:pPr>
-            <a:r>
-              <a:rPr lang="en-US" sz="1400" dirty="0">
-                <a:solidFill>
-                  <a:srgbClr val="4A5364"/>
-                </a:solidFill>
-                <a:latin typeface="Pretendard" pitchFamily="34" charset="0"/>
-                <a:ea typeface="Pretendard" pitchFamily="34" charset="-122"/>
-                <a:cs typeface="Pretendard" pitchFamily="34" charset="-120"/>
-              </a:rPr>
-              <a:t>자리별로 더해 ÷ 3</a:t>
-            </a:r>
-            <a:endParaRPr lang="en-US" sz="1400" dirty="0"/>
-          </a:p>
-        </p:txBody>
-      </p:sp>
-      <p:sp>
-        <p:nvSpPr>
-          <p:cNvPr id="99" name="Shape 96"/>
-          <p:cNvSpPr/>
-          <p:nvPr/>
-        </p:nvSpPr>
-        <p:spPr>
-          <a:xfrm>
-            <a:off x="8821217" y="6396228"/>
-            <a:ext cx="274320" cy="274320"/>
-          </a:xfrm>
-          <a:prstGeom prst="rightArrow">
-            <a:avLst/>
-          </a:prstGeom>
-          <a:solidFill>
-            <a:srgbClr val="2E74C6"/>
-          </a:solidFill>
-          <a:ln/>
-        </p:spPr>
-      </p:sp>
-      <p:sp>
-        <p:nvSpPr>
-          <p:cNvPr id="100" name="Text 97"/>
-          <p:cNvSpPr/>
-          <p:nvPr/>
-        </p:nvSpPr>
-        <p:spPr>
-          <a:xfrm>
-            <a:off x="9186977" y="6336792"/>
-            <a:ext cx="1143000" cy="393192"/>
-          </a:xfrm>
-          <a:prstGeom prst="roundRect">
-            <a:avLst>
-              <a:gd name="adj" fmla="val 18605"/>
+          <p:cNvPr id="89" name="Text 86"/>
+          <p:cNvSpPr/>
+          <p:nvPr/>
+        </p:nvSpPr>
+        <p:spPr>
+          <a:xfrm>
+            <a:off x="3929177" y="6327648"/>
+            <a:ext cx="2148840" cy="384048"/>
+          </a:xfrm>
+          <a:prstGeom prst="roundRect">
+            <a:avLst>
+              <a:gd name="adj" fmla="val 19048"/>
             </a:avLst>
           </a:prstGeom>
           <a:solidFill>
@@ -7484,7 +7102,7 @@
                 <a:ea typeface="Pretendard" pitchFamily="34" charset="-122"/>
                 <a:cs typeface="Pretendard" pitchFamily="34" charset="-120"/>
               </a:rPr>
-              <a:t>[0.4, 0.5]</a:t>
+              <a:t>Berlin is big. (0 ~ 14)</a:t>
             </a:r>
             <a:endParaRPr lang="en-US" sz="1400" dirty="0"/>
           </a:p>
@@ -7492,38 +7110,46 @@
       </p:sp>
       <p:sp>
         <p:nvSpPr>
-          <p:cNvPr id="101" name="Text 98"/>
-          <p:cNvSpPr txBox="1"/>
-          <p:nvPr/>
-        </p:nvSpPr>
-        <p:spPr>
-          <a:xfrm>
-            <a:off x="10467137" y="6336792"/>
-            <a:ext cx="3666744" cy="393192"/>
-          </a:xfrm>
-          <a:prstGeom prst="rect">
-            <a:avLst/>
-          </a:prstGeom>
-          <a:noFill/>
-          <a:ln/>
+          <p:cNvPr id="90" name="Text 87"/>
+          <p:cNvSpPr/>
+          <p:nvPr/>
+        </p:nvSpPr>
+        <p:spPr>
+          <a:xfrm>
+            <a:off x="3929177" y="6793992"/>
+            <a:ext cx="2148840" cy="384048"/>
+          </a:xfrm>
+          <a:prstGeom prst="roundRect">
+            <a:avLst>
+              <a:gd name="adj" fmla="val 19048"/>
+            </a:avLst>
+          </a:prstGeom>
+          <a:solidFill>
+            <a:srgbClr val="EEF3FA"/>
+          </a:solidFill>
+          <a:ln w="12700">
+            <a:solidFill>
+              <a:srgbClr val="2E74C6"/>
+            </a:solidFill>
+          </a:ln>
         </p:spPr>
         <p:txBody>
-          <a:bodyPr wrap="square" lIns="0" tIns="0" rIns="0" bIns="0" rtlCol="0" anchor="ctr"/>
+          <a:bodyPr wrap="square" lIns="50800" tIns="50800" rIns="50800" bIns="50800" rtlCol="0" anchor="ctr"/>
           <a:lstStyle/>
           <a:p>
-            <a:pPr algn="l" indent="0" marL="0">
+            <a:pPr algn="ctr" indent="0" marL="0">
               <a:buNone/>
             </a:pPr>
             <a:r>
-              <a:rPr lang="en-US" sz="1400" dirty="0">
+              <a:rPr lang="en-US" sz="1400" b="1" dirty="0">
                 <a:solidFill>
-                  <a:srgbClr val="4A5364"/>
+                  <a:srgbClr val="2E74C6"/>
                 </a:solidFill>
                 <a:latin typeface="Pretendard" pitchFamily="34" charset="0"/>
                 <a:ea typeface="Pretendard" pitchFamily="34" charset="-122"/>
                 <a:cs typeface="Pretendard" pitchFamily="34" charset="-120"/>
               </a:rPr>
-              <a:t>청크 벡터 1개 (임베딩 API 안에서 늘 하는 일)</a:t>
+              <a:t>토큰 0 ~ 2 평균 → 벡터 1</a:t>
             </a:r>
             <a:endParaRPr lang="en-US" sz="1400" dirty="0"/>
           </a:p>
@@ -7531,50 +7157,81 @@
       </p:sp>
       <p:sp>
         <p:nvSpPr>
-          <p:cNvPr id="102" name="Shape 99"/>
-          <p:cNvSpPr/>
-          <p:nvPr/>
-        </p:nvSpPr>
-        <p:spPr>
-          <a:xfrm>
-            <a:off x="509321" y="6812280"/>
-            <a:ext cx="64008" cy="365760"/>
-          </a:xfrm>
-          <a:prstGeom prst="rect">
-            <a:avLst/>
-          </a:prstGeom>
-          <a:solidFill>
-            <a:srgbClr val="2E74C6"/>
-          </a:solidFill>
-          <a:ln/>
-        </p:spPr>
-      </p:sp>
-      <p:sp>
-        <p:nvSpPr>
-          <p:cNvPr id="103" name="Text 100"/>
-          <p:cNvSpPr txBox="1"/>
-          <p:nvPr/>
-        </p:nvSpPr>
-        <p:spPr>
-          <a:xfrm>
-            <a:off x="692201" y="6812280"/>
-            <a:ext cx="10920679" cy="365760"/>
-          </a:xfrm>
-          <a:prstGeom prst="rect">
-            <a:avLst/>
-          </a:prstGeom>
-          <a:noFill/>
+          <p:cNvPr id="91" name="Text 88"/>
+          <p:cNvSpPr/>
+          <p:nvPr/>
+        </p:nvSpPr>
+        <p:spPr>
+          <a:xfrm>
+            <a:off x="6132881" y="6327648"/>
+            <a:ext cx="2788920" cy="384048"/>
+          </a:xfrm>
+          <a:prstGeom prst="roundRect">
+            <a:avLst>
+              <a:gd name="adj" fmla="val 19048"/>
+            </a:avLst>
+          </a:prstGeom>
+          <a:solidFill>
+            <a:srgbClr val="1E2A5C"/>
+          </a:solidFill>
           <a:ln/>
         </p:spPr>
         <p:txBody>
-          <a:bodyPr wrap="square" lIns="0" tIns="0" rIns="0" bIns="0" rtlCol="0" anchor="ctr"/>
+          <a:bodyPr wrap="square" lIns="50800" tIns="50800" rIns="50800" bIns="50800" rtlCol="0" anchor="ctr"/>
           <a:lstStyle/>
           <a:p>
-            <a:pPr indent="0" marL="0">
+            <a:pPr algn="ctr" indent="0" marL="0">
               <a:buNone/>
             </a:pPr>
             <a:r>
-              <a:rPr lang="en-US" sz="1600" b="1" i="1" dirty="0">
+              <a:rPr lang="en-US" sz="1400" b="1" dirty="0">
+                <a:solidFill>
+                  <a:srgbClr val="FFFFFF"/>
+                </a:solidFill>
+                <a:latin typeface="Pretendard" pitchFamily="34" charset="0"/>
+                <a:ea typeface="Pretendard" pitchFamily="34" charset="-122"/>
+                <a:cs typeface="Pretendard" pitchFamily="34" charset="-120"/>
+              </a:rPr>
+              <a:t>Its population grew. (15 ~ 35)</a:t>
+            </a:r>
+            <a:endParaRPr lang="en-US" sz="1400" dirty="0"/>
+          </a:p>
+        </p:txBody>
+      </p:sp>
+      <p:sp>
+        <p:nvSpPr>
+          <p:cNvPr id="92" name="Text 89"/>
+          <p:cNvSpPr/>
+          <p:nvPr/>
+        </p:nvSpPr>
+        <p:spPr>
+          <a:xfrm>
+            <a:off x="6132881" y="6793992"/>
+            <a:ext cx="2788920" cy="384048"/>
+          </a:xfrm>
+          <a:prstGeom prst="roundRect">
+            <a:avLst>
+              <a:gd name="adj" fmla="val 19048"/>
+            </a:avLst>
+          </a:prstGeom>
+          <a:solidFill>
+            <a:srgbClr val="EEF3FA"/>
+          </a:solidFill>
+          <a:ln w="12700">
+            <a:solidFill>
+              <a:srgbClr val="1E2A5C"/>
+            </a:solidFill>
+          </a:ln>
+        </p:spPr>
+        <p:txBody>
+          <a:bodyPr wrap="square" lIns="50800" tIns="50800" rIns="50800" bIns="50800" rtlCol="0" anchor="ctr"/>
+          <a:lstStyle/>
+          <a:p>
+            <a:pPr algn="ctr" indent="0" marL="0">
+              <a:buNone/>
+            </a:pPr>
+            <a:r>
+              <a:rPr lang="en-US" sz="1400" b="1" dirty="0">
                 <a:solidFill>
                   <a:srgbClr val="1E2A5C"/>
                 </a:solidFill>
@@ -7582,15 +7239,105 @@
                 <a:ea typeface="Pretendard" pitchFamily="34" charset="-122"/>
                 <a:cs typeface="Pretendard" pitchFamily="34" charset="-120"/>
               </a:rPr>
-              <a:t>경계는 같고, 모델을 자르기 전에 통과시키느냐 뒤에 통과시키느냐가 다릅니다. 모델 한도(예: 8192토큰)를 넘는 문서는 나눠 처리합니다.</a:t>
+              <a:t>토큰 3 ~ 5 평균 → 벡터 2</a:t>
             </a:r>
-            <a:endParaRPr lang="en-US" sz="1600" dirty="0"/>
+            <a:endParaRPr lang="en-US" sz="1400" dirty="0"/>
           </a:p>
         </p:txBody>
       </p:sp>
       <p:sp>
         <p:nvSpPr>
-          <p:cNvPr id="104" name="Shape 101"/>
+          <p:cNvPr id="93" name="Text 90"/>
+          <p:cNvSpPr/>
+          <p:nvPr/>
+        </p:nvSpPr>
+        <p:spPr>
+          <a:xfrm>
+            <a:off x="8976665" y="6327648"/>
+            <a:ext cx="2377440" cy="384048"/>
+          </a:xfrm>
+          <a:prstGeom prst="roundRect">
+            <a:avLst>
+              <a:gd name="adj" fmla="val 19048"/>
+            </a:avLst>
+          </a:prstGeom>
+          <a:solidFill>
+            <a:srgbClr val="404155"/>
+          </a:solidFill>
+          <a:ln/>
+        </p:spPr>
+        <p:txBody>
+          <a:bodyPr wrap="square" lIns="50800" tIns="50800" rIns="50800" bIns="50800" rtlCol="0" anchor="ctr"/>
+          <a:lstStyle/>
+          <a:p>
+            <a:pPr algn="ctr" indent="0" marL="0">
+              <a:buNone/>
+            </a:pPr>
+            <a:r>
+              <a:rPr lang="en-US" sz="1400" b="1" dirty="0">
+                <a:solidFill>
+                  <a:srgbClr val="FFFFFF"/>
+                </a:solidFill>
+                <a:latin typeface="Pretendard" pitchFamily="34" charset="0"/>
+                <a:ea typeface="Pretendard" pitchFamily="34" charset="-122"/>
+                <a:cs typeface="Pretendard" pitchFamily="34" charset="-120"/>
+              </a:rPr>
+              <a:t>The city shines. (36 ~ 52)</a:t>
+            </a:r>
+            <a:endParaRPr lang="en-US" sz="1400" dirty="0"/>
+          </a:p>
+        </p:txBody>
+      </p:sp>
+      <p:sp>
+        <p:nvSpPr>
+          <p:cNvPr id="94" name="Text 91"/>
+          <p:cNvSpPr/>
+          <p:nvPr/>
+        </p:nvSpPr>
+        <p:spPr>
+          <a:xfrm>
+            <a:off x="8976665" y="6793992"/>
+            <a:ext cx="2377440" cy="384048"/>
+          </a:xfrm>
+          <a:prstGeom prst="roundRect">
+            <a:avLst>
+              <a:gd name="adj" fmla="val 19048"/>
+            </a:avLst>
+          </a:prstGeom>
+          <a:solidFill>
+            <a:srgbClr val="EEF3FA"/>
+          </a:solidFill>
+          <a:ln w="12700">
+            <a:solidFill>
+              <a:srgbClr val="404155"/>
+            </a:solidFill>
+          </a:ln>
+        </p:spPr>
+        <p:txBody>
+          <a:bodyPr wrap="square" lIns="50800" tIns="50800" rIns="50800" bIns="50800" rtlCol="0" anchor="ctr"/>
+          <a:lstStyle/>
+          <a:p>
+            <a:pPr algn="ctr" indent="0" marL="0">
+              <a:buNone/>
+            </a:pPr>
+            <a:r>
+              <a:rPr lang="en-US" sz="1400" b="1" dirty="0">
+                <a:solidFill>
+                  <a:srgbClr val="404155"/>
+                </a:solidFill>
+                <a:latin typeface="Pretendard" pitchFamily="34" charset="0"/>
+                <a:ea typeface="Pretendard" pitchFamily="34" charset="-122"/>
+                <a:cs typeface="Pretendard" pitchFamily="34" charset="-120"/>
+              </a:rPr>
+              <a:t>토큰 6 ~ 8 평균 → 벡터 3</a:t>
+            </a:r>
+            <a:endParaRPr lang="en-US" sz="1400" dirty="0"/>
+          </a:p>
+        </p:txBody>
+      </p:sp>
+      <p:sp>
+        <p:nvSpPr>
+          <p:cNvPr id="95" name="Shape 92"/>
           <p:cNvSpPr/>
           <p:nvPr/>
         </p:nvSpPr>
@@ -7617,7 +7364,7 @@
       </p:sp>
       <p:sp>
         <p:nvSpPr>
-          <p:cNvPr id="105" name="Text 102">
+          <p:cNvPr id="96" name="Text 93">
             <a:hlinkClick r:id="rId1" tooltip=""/>
           </p:cNvPr>
           <p:cNvSpPr/>
@@ -7665,7 +7412,7 @@
       </p:sp>
       <p:sp>
         <p:nvSpPr>
-          <p:cNvPr id="106" name="Shape 103"/>
+          <p:cNvPr id="97" name="Shape 94"/>
           <p:cNvSpPr/>
           <p:nvPr/>
         </p:nvSpPr>
@@ -7688,7 +7435,7 @@
       </p:sp>
       <p:sp>
         <p:nvSpPr>
-          <p:cNvPr id="107" name="Text 104"/>
+          <p:cNvPr id="98" name="Text 95"/>
           <p:cNvSpPr txBox="1"/>
           <p:nvPr/>
         </p:nvSpPr>
